--- a/Results/KAT8_sex_interaction_presentation.pptx
+++ b/Results/KAT8_sex_interaction_presentation.pptx
@@ -20,6 +20,12 @@
     <p:sldId id="268" r:id="rId19"/>
     <p:sldId id="269" r:id="rId20"/>
     <p:sldId id="270" r:id="rId21"/>
+    <p:sldId id="271" r:id="rId22"/>
+    <p:sldId id="272" r:id="rId23"/>
+    <p:sldId id="273" r:id="rId24"/>
+    <p:sldId id="274" r:id="rId25"/>
+    <p:sldId id="275" r:id="rId26"/>
+    <p:sldId id="276" r:id="rId27"/>
   </p:sldIdLst>
   <p:sldSz cx="12191695" cy="6858000" type="screen4x3"/>
   <p:notesSz cx="6858000" cy="9144000"/>
@@ -3118,7 +3124,7 @@
         </p:nvSpPr>
         <p:spPr>
           <a:xfrm>
-            <a:off x="914400" y="1828800"/>
+            <a:off x="914400" y="1371600"/>
             <a:ext cx="10058400" cy="1371600"/>
           </a:xfrm>
           <a:prstGeom prst="rect">
@@ -3145,7 +3151,7 @@
             </a:r>
             <a:br/>
             <a:r>
-              <a:t>Sex x Genotype Interaction Analysis</a:t>
+              <a:t>Sex-Combining Validation &amp; Analysis Decision</a:t>
             </a:r>
           </a:p>
         </p:txBody>
@@ -3158,7 +3164,7 @@
         </p:nvSpPr>
         <p:spPr>
           <a:xfrm>
-            <a:off x="914400" y="3657600"/>
+            <a:off x="914400" y="3200400"/>
             <a:ext cx="10058400" cy="731520"/>
           </a:xfrm>
           <a:prstGeom prst="rect">
@@ -3181,7 +3187,7 @@
               </a:defRPr>
             </a:pPr>
             <a:r>
-              <a:t>Part 7.6  |  Formal test of sex-dependent transcriptional responses</a:t>
+              <a:t>Parts 7.6 + 7.7  |  Sex x Genotype interaction testing &amp; model comparison</a:t>
             </a:r>
           </a:p>
         </p:txBody>
@@ -3194,7 +3200,7 @@
         </p:nvSpPr>
         <p:spPr>
           <a:xfrm>
-            <a:off x="914400" y="5029200"/>
+            <a:off x="914400" y="4389120"/>
             <a:ext cx="10058400" cy="457200"/>
           </a:xfrm>
           <a:prstGeom prst="rect">
@@ -3218,6 +3224,42 @@
             </a:pPr>
             <a:r>
               <a:t>Adipose Depot Analysis: iWAT &amp; gWAT</a:t>
+            </a:r>
+          </a:p>
+        </p:txBody>
+      </p:sp>
+      <p:sp>
+        <p:nvSpPr>
+          <p:cNvPr id="5" name="TextBox 4"/>
+          <p:cNvSpPr txBox="1"/>
+          <p:nvPr/>
+        </p:nvSpPr>
+        <p:spPr>
+          <a:xfrm>
+            <a:off x="914400" y="5303520"/>
+            <a:ext cx="10058400" cy="457200"/>
+          </a:xfrm>
+          <a:prstGeom prst="rect">
+            <a:avLst/>
+          </a:prstGeom>
+          <a:noFill/>
+        </p:spPr>
+        <p:txBody>
+          <a:bodyPr wrap="square">
+            <a:spAutoFit/>
+          </a:bodyPr>
+          <a:lstStyle/>
+          <a:p>
+            <a:pPr algn="ctr">
+              <a:defRPr sz="1400" b="0">
+                <a:solidFill>
+                  <a:srgbClr val="7799BB"/>
+                </a:solidFill>
+                <a:latin typeface="Calibri"/>
+              </a:defRPr>
+            </a:pPr>
+            <a:r>
+              <a:t>Validation run: 2026-02-18  |  Decision: ~ 0 + GroupDepot (unified, no Sex covariate)</a:t>
             </a:r>
           </a:p>
         </p:txBody>
@@ -3233,6 +3275,14 @@
 <file path=ppt/slides/slide10.xml><?xml version="1.0" encoding="utf-8"?>
 <p:sld xmlns:a="http://schemas.openxmlformats.org/drawingml/2006/main" xmlns:p="http://schemas.openxmlformats.org/presentationml/2006/main" xmlns:r="http://schemas.openxmlformats.org/officeDocument/2006/relationships">
   <p:cSld>
+    <p:bg>
+      <p:bgPr>
+        <a:solidFill>
+          <a:srgbClr val="FDF2E9"/>
+        </a:solidFill>
+        <a:effectLst/>
+      </p:bgPr>
+    </p:bg>
     <p:spTree>
       <p:nvGrpSpPr>
         <p:cNvPr id="1" name=""/>
@@ -3271,7 +3321,700 @@
               </a:defRPr>
             </a:pPr>
             <a:r>
-              <a:t>Sex-Stratified Concordance: gWAT</a:t>
+              <a:t>Background: What is Pi0?</a:t>
+            </a:r>
+          </a:p>
+        </p:txBody>
+      </p:sp>
+      <p:sp>
+        <p:nvSpPr>
+          <p:cNvPr id="3" name="TextBox 2"/>
+          <p:cNvSpPr txBox="1"/>
+          <p:nvPr/>
+        </p:nvSpPr>
+        <p:spPr>
+          <a:xfrm>
+            <a:off x="548640" y="1188720"/>
+            <a:ext cx="10972800" cy="5029200"/>
+          </a:xfrm>
+          <a:prstGeom prst="rect">
+            <a:avLst/>
+          </a:prstGeom>
+          <a:noFill/>
+        </p:spPr>
+        <p:txBody>
+          <a:bodyPr wrap="square">
+            <a:spAutoFit/>
+          </a:bodyPr>
+          <a:lstStyle/>
+          <a:p>
+            <a:pPr>
+              <a:spcAft>
+                <a:spcPts val="600"/>
+              </a:spcAft>
+              <a:defRPr sz="1300">
+                <a:solidFill>
+                  <a:srgbClr val="000000"/>
+                </a:solidFill>
+                <a:latin typeface="Calibri"/>
+              </a:defRPr>
+            </a:pPr>
+            <a:r>
+              <a:t>When we test 16,000+ genes, we get a mix of:</a:t>
+            </a:r>
+          </a:p>
+          <a:p>
+            <a:pPr>
+              <a:spcAft>
+                <a:spcPts val="600"/>
+              </a:spcAft>
+              <a:defRPr sz="1300">
+                <a:solidFill>
+                  <a:srgbClr val="000000"/>
+                </a:solidFill>
+                <a:latin typeface="Calibri"/>
+              </a:defRPr>
+            </a:pPr>
+            <a:r>
+              <a:t>  - TRUE NULLS: genes where there really is no interaction (what we want!)</a:t>
+            </a:r>
+          </a:p>
+          <a:p>
+            <a:pPr>
+              <a:spcAft>
+                <a:spcPts val="600"/>
+              </a:spcAft>
+              <a:defRPr sz="1300">
+                <a:solidFill>
+                  <a:srgbClr val="000000"/>
+                </a:solidFill>
+                <a:latin typeface="Calibri"/>
+              </a:defRPr>
+            </a:pPr>
+            <a:r>
+              <a:t>  - TRUE SIGNALS: genes where the KD effect genuinely differs by sex</a:t>
+            </a:r>
+          </a:p>
+          <a:p>
+            <a:pPr>
+              <a:spcAft>
+                <a:spcPts val="600"/>
+              </a:spcAft>
+              <a:defRPr sz="1300">
+                <a:solidFill>
+                  <a:srgbClr val="000000"/>
+                </a:solidFill>
+                <a:latin typeface="Calibri"/>
+              </a:defRPr>
+            </a:pPr>
+            <a:r>
+              <a:t>  - FALSE POSITIVES: genes that look significant by chance</a:t>
+            </a:r>
+          </a:p>
+          <a:p>
+            <a:pPr>
+              <a:spcAft>
+                <a:spcPts val="600"/>
+              </a:spcAft>
+              <a:defRPr sz="1300">
+                <a:solidFill>
+                  <a:srgbClr val="000000"/>
+                </a:solidFill>
+                <a:latin typeface="Calibri"/>
+              </a:defRPr>
+            </a:pPr>
+          </a:p>
+          <a:p>
+            <a:pPr>
+              <a:spcAft>
+                <a:spcPts val="600"/>
+              </a:spcAft>
+              <a:defRPr sz="1300">
+                <a:solidFill>
+                  <a:srgbClr val="000000"/>
+                </a:solidFill>
+                <a:latin typeface="Calibri"/>
+              </a:defRPr>
+            </a:pPr>
+            <a:r>
+              <a:t>Pi0 (pi-zero) estimates the proportion of TRUE NULLS:</a:t>
+            </a:r>
+          </a:p>
+          <a:p>
+            <a:pPr>
+              <a:spcAft>
+                <a:spcPts val="600"/>
+              </a:spcAft>
+              <a:defRPr sz="1300">
+                <a:solidFill>
+                  <a:srgbClr val="000000"/>
+                </a:solidFill>
+                <a:latin typeface="Calibri"/>
+              </a:defRPr>
+            </a:pPr>
+            <a:r>
+              <a:t>  - Pi0 = 0.87 means: 87% of genes genuinely have NO sex-dependent KD response</a:t>
+            </a:r>
+          </a:p>
+          <a:p>
+            <a:pPr>
+              <a:spcAft>
+                <a:spcPts val="600"/>
+              </a:spcAft>
+              <a:defRPr sz="1300">
+                <a:solidFill>
+                  <a:srgbClr val="000000"/>
+                </a:solidFill>
+                <a:latin typeface="Calibri"/>
+              </a:defRPr>
+            </a:pPr>
+            <a:r>
+              <a:t>  - The other 13% includes both true interactions AND statistical noise</a:t>
+            </a:r>
+          </a:p>
+          <a:p>
+            <a:pPr>
+              <a:spcAft>
+                <a:spcPts val="600"/>
+              </a:spcAft>
+              <a:defRPr sz="1300">
+                <a:solidFill>
+                  <a:srgbClr val="000000"/>
+                </a:solidFill>
+                <a:latin typeface="Calibri"/>
+              </a:defRPr>
+            </a:pPr>
+          </a:p>
+          <a:p>
+            <a:pPr>
+              <a:spcAft>
+                <a:spcPts val="600"/>
+              </a:spcAft>
+              <a:defRPr sz="1300">
+                <a:solidFill>
+                  <a:srgbClr val="000000"/>
+                </a:solidFill>
+                <a:latin typeface="Calibri"/>
+              </a:defRPr>
+            </a:pPr>
+            <a:r>
+              <a:t>How is pi0 calculated? (Storey &amp; Tibshirani, 2003)</a:t>
+            </a:r>
+          </a:p>
+          <a:p>
+            <a:pPr>
+              <a:spcAft>
+                <a:spcPts val="600"/>
+              </a:spcAft>
+              <a:defRPr sz="1300">
+                <a:solidFill>
+                  <a:srgbClr val="000000"/>
+                </a:solidFill>
+                <a:latin typeface="Calibri"/>
+              </a:defRPr>
+            </a:pPr>
+            <a:r>
+              <a:t>  - If ALL genes were null, p-values would be perfectly uniform</a:t>
+            </a:r>
+          </a:p>
+          <a:p>
+            <a:pPr>
+              <a:spcAft>
+                <a:spcPts val="600"/>
+              </a:spcAft>
+              <a:defRPr sz="1300">
+                <a:solidFill>
+                  <a:srgbClr val="000000"/>
+                </a:solidFill>
+                <a:latin typeface="Calibri"/>
+              </a:defRPr>
+            </a:pPr>
+            <a:r>
+              <a:t>  - The method looks at how 'flat' the p-value distribution is away from p=0</a:t>
+            </a:r>
+          </a:p>
+          <a:p>
+            <a:pPr>
+              <a:spcAft>
+                <a:spcPts val="600"/>
+              </a:spcAft>
+              <a:defRPr sz="1300">
+                <a:solidFill>
+                  <a:srgbClr val="000000"/>
+                </a:solidFill>
+                <a:latin typeface="Calibri"/>
+              </a:defRPr>
+            </a:pPr>
+            <a:r>
+              <a:t>  - The flat part = true nulls. The spike near p=0 = real signals</a:t>
+            </a:r>
+          </a:p>
+          <a:p>
+            <a:pPr>
+              <a:spcAft>
+                <a:spcPts val="600"/>
+              </a:spcAft>
+              <a:defRPr sz="1300">
+                <a:solidFill>
+                  <a:srgbClr val="000000"/>
+                </a:solidFill>
+                <a:latin typeface="Calibri"/>
+              </a:defRPr>
+            </a:pPr>
+          </a:p>
+          <a:p>
+            <a:pPr>
+              <a:spcAft>
+                <a:spcPts val="600"/>
+              </a:spcAft>
+              <a:defRPr sz="1300">
+                <a:solidFill>
+                  <a:srgbClr val="000000"/>
+                </a:solidFill>
+                <a:latin typeface="Calibri"/>
+              </a:defRPr>
+            </a:pPr>
+            <a:r>
+              <a:t>Why this matters:</a:t>
+            </a:r>
+          </a:p>
+          <a:p>
+            <a:pPr>
+              <a:spcAft>
+                <a:spcPts val="600"/>
+              </a:spcAft>
+              <a:defRPr sz="1300">
+                <a:solidFill>
+                  <a:srgbClr val="000000"/>
+                </a:solidFill>
+                <a:latin typeface="Calibri"/>
+              </a:defRPr>
+            </a:pPr>
+            <a:r>
+              <a:t>  - Pi0 = 0.50 would mean half the genes have sex-dependent effects -&gt; BAD</a:t>
+            </a:r>
+          </a:p>
+          <a:p>
+            <a:pPr>
+              <a:spcAft>
+                <a:spcPts val="600"/>
+              </a:spcAft>
+              <a:defRPr sz="1300">
+                <a:solidFill>
+                  <a:srgbClr val="000000"/>
+                </a:solidFill>
+                <a:latin typeface="Calibri"/>
+              </a:defRPr>
+            </a:pPr>
+            <a:r>
+              <a:t>  - Pi0 = 0.95+ would mean almost no genes have sex-dependent effects -&gt; GREAT</a:t>
+            </a:r>
+          </a:p>
+          <a:p>
+            <a:pPr>
+              <a:spcAft>
+                <a:spcPts val="600"/>
+              </a:spcAft>
+              <a:defRPr sz="1300">
+                <a:solidFill>
+                  <a:srgbClr val="000000"/>
+                </a:solidFill>
+                <a:latin typeface="Calibri"/>
+              </a:defRPr>
+            </a:pPr>
+            <a:r>
+              <a:t>  - Pi0 = 0.85-0.87 (what we got) -&gt; GOOD: vast majority are sex-independent</a:t>
+            </a:r>
+          </a:p>
+        </p:txBody>
+      </p:sp>
+    </p:spTree>
+  </p:cSld>
+  <p:clrMapOvr>
+    <a:masterClrMapping/>
+  </p:clrMapOvr>
+</p:sld>
+</file>
+
+<file path=ppt/slides/slide11.xml><?xml version="1.0" encoding="utf-8"?>
+<p:sld xmlns:a="http://schemas.openxmlformats.org/drawingml/2006/main" xmlns:p="http://schemas.openxmlformats.org/presentationml/2006/main" xmlns:r="http://schemas.openxmlformats.org/officeDocument/2006/relationships">
+  <p:cSld>
+    <p:spTree>
+      <p:nvGrpSpPr>
+        <p:cNvPr id="1" name=""/>
+        <p:cNvGrpSpPr/>
+        <p:nvPr/>
+      </p:nvGrpSpPr>
+      <p:grpSpPr/>
+      <p:sp>
+        <p:nvSpPr>
+          <p:cNvPr id="2" name="TextBox 1"/>
+          <p:cNvSpPr txBox="1"/>
+          <p:nvPr/>
+        </p:nvSpPr>
+        <p:spPr>
+          <a:xfrm>
+            <a:off x="548640" y="274320"/>
+            <a:ext cx="10972800" cy="548640"/>
+          </a:xfrm>
+          <a:prstGeom prst="rect">
+            <a:avLst/>
+          </a:prstGeom>
+          <a:noFill/>
+        </p:spPr>
+        <p:txBody>
+          <a:bodyPr wrap="square">
+            <a:spAutoFit/>
+          </a:bodyPr>
+          <a:lstStyle/>
+          <a:p>
+            <a:pPr algn="l">
+              <a:defRPr sz="2800" b="1">
+                <a:solidFill>
+                  <a:srgbClr val="1B3A5C"/>
+                </a:solidFill>
+                <a:latin typeface="Calibri"/>
+              </a:defRPr>
+            </a:pPr>
+            <a:r>
+              <a:t>Pi0 Results: True Null Proportion</a:t>
+            </a:r>
+          </a:p>
+        </p:txBody>
+      </p:sp>
+      <p:sp>
+        <p:nvSpPr>
+          <p:cNvPr id="3" name="TextBox 2"/>
+          <p:cNvSpPr txBox="1"/>
+          <p:nvPr/>
+        </p:nvSpPr>
+        <p:spPr>
+          <a:xfrm>
+            <a:off x="548640" y="1188720"/>
+            <a:ext cx="10972800" cy="5029200"/>
+          </a:xfrm>
+          <a:prstGeom prst="rect">
+            <a:avLst/>
+          </a:prstGeom>
+          <a:noFill/>
+        </p:spPr>
+        <p:txBody>
+          <a:bodyPr wrap="square">
+            <a:spAutoFit/>
+          </a:bodyPr>
+          <a:lstStyle/>
+          <a:p>
+            <a:pPr>
+              <a:spcAft>
+                <a:spcPts val="600"/>
+              </a:spcAft>
+              <a:defRPr sz="1400">
+                <a:solidFill>
+                  <a:srgbClr val="000000"/>
+                </a:solidFill>
+                <a:latin typeface="Calibri"/>
+              </a:defRPr>
+            </a:pPr>
+            <a:r>
+              <a:t>Results:</a:t>
+            </a:r>
+          </a:p>
+          <a:p>
+            <a:pPr>
+              <a:spcAft>
+                <a:spcPts val="600"/>
+              </a:spcAft>
+              <a:defRPr sz="1400">
+                <a:solidFill>
+                  <a:srgbClr val="000000"/>
+                </a:solidFill>
+                <a:latin typeface="Calibri"/>
+              </a:defRPr>
+            </a:pPr>
+            <a:r>
+              <a:t>  iWAT:  pi0 = 0.8701  -&gt;  87% of genes genuinely have NO interaction</a:t>
+            </a:r>
+          </a:p>
+          <a:p>
+            <a:pPr>
+              <a:spcAft>
+                <a:spcPts val="600"/>
+              </a:spcAft>
+              <a:defRPr sz="1400">
+                <a:solidFill>
+                  <a:srgbClr val="000000"/>
+                </a:solidFill>
+                <a:latin typeface="Calibri"/>
+              </a:defRPr>
+            </a:pPr>
+            <a:r>
+              <a:t>  gWAT:  pi0 = 0.8483  -&gt;  85% of genes genuinely have NO interaction</a:t>
+            </a:r>
+          </a:p>
+          <a:p>
+            <a:pPr>
+              <a:spcAft>
+                <a:spcPts val="600"/>
+              </a:spcAft>
+              <a:defRPr sz="1400">
+                <a:solidFill>
+                  <a:srgbClr val="000000"/>
+                </a:solidFill>
+                <a:latin typeface="Calibri"/>
+              </a:defRPr>
+            </a:pPr>
+          </a:p>
+          <a:p>
+            <a:pPr>
+              <a:spcAft>
+                <a:spcPts val="600"/>
+              </a:spcAft>
+              <a:defRPr sz="1400">
+                <a:solidFill>
+                  <a:srgbClr val="000000"/>
+                </a:solidFill>
+                <a:latin typeface="Calibri"/>
+              </a:defRPr>
+            </a:pPr>
+            <a:r>
+              <a:t>What does this mean in plain English?</a:t>
+            </a:r>
+          </a:p>
+          <a:p>
+            <a:pPr>
+              <a:spcAft>
+                <a:spcPts val="600"/>
+              </a:spcAft>
+              <a:defRPr sz="1400">
+                <a:solidFill>
+                  <a:srgbClr val="000000"/>
+                </a:solidFill>
+                <a:latin typeface="Calibri"/>
+              </a:defRPr>
+            </a:pPr>
+          </a:p>
+          <a:p>
+            <a:pPr>
+              <a:spcAft>
+                <a:spcPts val="600"/>
+              </a:spcAft>
+              <a:defRPr sz="1400">
+                <a:solidFill>
+                  <a:srgbClr val="000000"/>
+                </a:solidFill>
+                <a:latin typeface="Calibri"/>
+              </a:defRPr>
+            </a:pPr>
+            <a:r>
+              <a:t>  Imagine lining up all ~16,500 genes in iWAT:</a:t>
+            </a:r>
+          </a:p>
+          <a:p>
+            <a:pPr>
+              <a:spcAft>
+                <a:spcPts val="600"/>
+              </a:spcAft>
+              <a:defRPr sz="1400">
+                <a:solidFill>
+                  <a:srgbClr val="000000"/>
+                </a:solidFill>
+                <a:latin typeface="Calibri"/>
+              </a:defRPr>
+            </a:pPr>
+            <a:r>
+              <a:t>  - ~14,350 genes (87%): KAT8 KD has the SAME effect in males and females</a:t>
+            </a:r>
+          </a:p>
+          <a:p>
+            <a:pPr>
+              <a:spcAft>
+                <a:spcPts val="600"/>
+              </a:spcAft>
+              <a:defRPr sz="1400">
+                <a:solidFill>
+                  <a:srgbClr val="000000"/>
+                </a:solidFill>
+                <a:latin typeface="Calibri"/>
+              </a:defRPr>
+            </a:pPr>
+            <a:r>
+              <a:t>  - ~2,150 genes (13%):  some have real sex-dependent effects, some are noise</a:t>
+            </a:r>
+          </a:p>
+          <a:p>
+            <a:pPr>
+              <a:spcAft>
+                <a:spcPts val="600"/>
+              </a:spcAft>
+              <a:defRPr sz="1400">
+                <a:solidFill>
+                  <a:srgbClr val="000000"/>
+                </a:solidFill>
+                <a:latin typeface="Calibri"/>
+              </a:defRPr>
+            </a:pPr>
+          </a:p>
+          <a:p>
+            <a:pPr>
+              <a:spcAft>
+                <a:spcPts val="600"/>
+              </a:spcAft>
+              <a:defRPr sz="1400">
+                <a:solidFill>
+                  <a:srgbClr val="000000"/>
+                </a:solidFill>
+                <a:latin typeface="Calibri"/>
+              </a:defRPr>
+            </a:pPr>
+            <a:r>
+              <a:t>  Of those 2,150:</a:t>
+            </a:r>
+          </a:p>
+          <a:p>
+            <a:pPr>
+              <a:spcAft>
+                <a:spcPts val="600"/>
+              </a:spcAft>
+              <a:defRPr sz="1400">
+                <a:solidFill>
+                  <a:srgbClr val="000000"/>
+                </a:solidFill>
+                <a:latin typeface="Calibri"/>
+              </a:defRPr>
+            </a:pPr>
+            <a:r>
+              <a:t>  - 630 reached statistical significance (FDR &lt; 0.05)</a:t>
+            </a:r>
+          </a:p>
+          <a:p>
+            <a:pPr>
+              <a:spcAft>
+                <a:spcPts val="600"/>
+              </a:spcAft>
+              <a:defRPr sz="1400">
+                <a:solidFill>
+                  <a:srgbClr val="000000"/>
+                </a:solidFill>
+                <a:latin typeface="Calibri"/>
+              </a:defRPr>
+            </a:pPr>
+            <a:r>
+              <a:t>  - The rest didn't quite reach significance but may have subtle effects</a:t>
+            </a:r>
+          </a:p>
+          <a:p>
+            <a:pPr>
+              <a:spcAft>
+                <a:spcPts val="600"/>
+              </a:spcAft>
+              <a:defRPr sz="1400">
+                <a:solidFill>
+                  <a:srgbClr val="000000"/>
+                </a:solidFill>
+                <a:latin typeface="Calibri"/>
+              </a:defRPr>
+            </a:pPr>
+          </a:p>
+          <a:p>
+            <a:pPr>
+              <a:spcAft>
+                <a:spcPts val="600"/>
+              </a:spcAft>
+              <a:defRPr sz="1400">
+                <a:solidFill>
+                  <a:srgbClr val="000000"/>
+                </a:solidFill>
+                <a:latin typeface="Calibri"/>
+              </a:defRPr>
+            </a:pPr>
+            <a:r>
+              <a:t>Bottom line: The vast majority of genes respond identically to KAT8-KD</a:t>
+            </a:r>
+          </a:p>
+          <a:p>
+            <a:pPr>
+              <a:spcAft>
+                <a:spcPts val="600"/>
+              </a:spcAft>
+              <a:defRPr sz="1400">
+                <a:solidFill>
+                  <a:srgbClr val="000000"/>
+                </a:solidFill>
+                <a:latin typeface="Calibri"/>
+              </a:defRPr>
+            </a:pPr>
+            <a:r>
+              <a:t>in both sexes. This strongly supports including sex as a covariate</a:t>
+            </a:r>
+          </a:p>
+          <a:p>
+            <a:pPr>
+              <a:spcAft>
+                <a:spcPts val="600"/>
+              </a:spcAft>
+              <a:defRPr sz="1400">
+                <a:solidFill>
+                  <a:srgbClr val="000000"/>
+                </a:solidFill>
+                <a:latin typeface="Calibri"/>
+              </a:defRPr>
+            </a:pPr>
+            <a:r>
+              <a:t>(rather than splitting the analysis by sex).</a:t>
+            </a:r>
+          </a:p>
+        </p:txBody>
+      </p:sp>
+    </p:spTree>
+  </p:cSld>
+  <p:clrMapOvr>
+    <a:masterClrMapping/>
+  </p:clrMapOvr>
+</p:sld>
+</file>
+
+<file path=ppt/slides/slide12.xml><?xml version="1.0" encoding="utf-8"?>
+<p:sld xmlns:a="http://schemas.openxmlformats.org/drawingml/2006/main" xmlns:p="http://schemas.openxmlformats.org/presentationml/2006/main" xmlns:r="http://schemas.openxmlformats.org/officeDocument/2006/relationships">
+  <p:cSld>
+    <p:spTree>
+      <p:nvGrpSpPr>
+        <p:cNvPr id="1" name=""/>
+        <p:cNvGrpSpPr/>
+        <p:nvPr/>
+      </p:nvGrpSpPr>
+      <p:grpSpPr/>
+      <p:sp>
+        <p:nvSpPr>
+          <p:cNvPr id="2" name="TextBox 1"/>
+          <p:cNvSpPr txBox="1"/>
+          <p:nvPr/>
+        </p:nvSpPr>
+        <p:spPr>
+          <a:xfrm>
+            <a:off x="548640" y="274320"/>
+            <a:ext cx="10972800" cy="548640"/>
+          </a:xfrm>
+          <a:prstGeom prst="rect">
+            <a:avLst/>
+          </a:prstGeom>
+          <a:noFill/>
+        </p:spPr>
+        <p:txBody>
+          <a:bodyPr wrap="square">
+            <a:spAutoFit/>
+          </a:bodyPr>
+          <a:lstStyle/>
+          <a:p>
+            <a:pPr algn="l">
+              <a:defRPr sz="2800" b="1">
+                <a:solidFill>
+                  <a:srgbClr val="1B3A5C"/>
+                </a:solidFill>
+                <a:latin typeface="Calibri"/>
+              </a:defRPr>
+            </a:pPr>
+            <a:r>
+              <a:t>Variance Attribution: What Drives Gene Expression?</a:t>
             </a:r>
           </a:p>
         </p:txBody>
@@ -3307,7 +4050,7 @@
               </a:defRPr>
             </a:pPr>
             <a:r>
-              <a:t>Run DESeq2 separately for F-only and M-only, then correlate KD log2FCs</a:t>
+              <a:t>For each gene, what fraction of variance comes from Sex, Genotype, or their interaction?</a:t>
             </a:r>
           </a:p>
         </p:txBody>
@@ -3321,7 +4064,7 @@
         <p:spPr>
           <a:xfrm>
             <a:off x="548640" y="1463040"/>
-            <a:ext cx="5029200" cy="4114800"/>
+            <a:ext cx="5029200" cy="2286000"/>
           </a:xfrm>
           <a:prstGeom prst="rect">
             <a:avLst/>
@@ -3346,181 +4089,255 @@
               </a:defRPr>
             </a:pPr>
             <a:r>
-              <a:t>Pearson r = 0.605 (moderate concordance)</a:t>
-            </a:r>
-          </a:p>
-          <a:p>
-            <a:pPr>
-              <a:spcAft>
-                <a:spcPts val="600"/>
-              </a:spcAft>
-              <a:defRPr sz="1300">
-                <a:solidFill>
-                  <a:srgbClr val="000000"/>
-                </a:solidFill>
-                <a:latin typeface="Calibri"/>
-              </a:defRPr>
-            </a:pPr>
-          </a:p>
-          <a:p>
-            <a:pPr>
-              <a:spcAft>
-                <a:spcPts val="600"/>
-              </a:spcAft>
-              <a:defRPr sz="1300">
-                <a:solidFill>
-                  <a:srgbClr val="000000"/>
-                </a:solidFill>
-                <a:latin typeface="Calibri"/>
-              </a:defRPr>
-            </a:pPr>
-            <a:r>
-              <a:t>Slightly lower than iWAT -- visceral fat (gWAT) shows</a:t>
-            </a:r>
-          </a:p>
-          <a:p>
-            <a:pPr>
-              <a:spcAft>
-                <a:spcPts val="600"/>
-              </a:spcAft>
-              <a:defRPr sz="1300">
-                <a:solidFill>
-                  <a:srgbClr val="000000"/>
-                </a:solidFill>
-                <a:latin typeface="Calibri"/>
-              </a:defRPr>
-            </a:pPr>
-            <a:r>
-              <a:t>more baseline sex dimorphism than subcutaneous fat (iWAT),</a:t>
-            </a:r>
-          </a:p>
-          <a:p>
-            <a:pPr>
-              <a:spcAft>
-                <a:spcPts val="600"/>
-              </a:spcAft>
-              <a:defRPr sz="1300">
-                <a:solidFill>
-                  <a:srgbClr val="000000"/>
-                </a:solidFill>
-                <a:latin typeface="Calibri"/>
-              </a:defRPr>
-            </a:pPr>
-            <a:r>
-              <a:t>which is consistent with known adipose biology.</a:t>
-            </a:r>
-          </a:p>
-          <a:p>
-            <a:pPr>
-              <a:spcAft>
-                <a:spcPts val="600"/>
-              </a:spcAft>
-              <a:defRPr sz="1300">
-                <a:solidFill>
-                  <a:srgbClr val="000000"/>
-                </a:solidFill>
-                <a:latin typeface="Calibri"/>
-              </a:defRPr>
-            </a:pPr>
-          </a:p>
-          <a:p>
-            <a:pPr>
-              <a:spcAft>
-                <a:spcPts val="600"/>
-              </a:spcAft>
-              <a:defRPr sz="1300">
-                <a:solidFill>
-                  <a:srgbClr val="000000"/>
-                </a:solidFill>
-                <a:latin typeface="Calibri"/>
-              </a:defRPr>
-            </a:pPr>
-            <a:r>
-              <a:t>However, the direction of KD effects is still positively</a:t>
-            </a:r>
-          </a:p>
-          <a:p>
-            <a:pPr>
-              <a:spcAft>
-                <a:spcPts val="600"/>
-              </a:spcAft>
-              <a:defRPr sz="1300">
-                <a:solidFill>
-                  <a:srgbClr val="000000"/>
-                </a:solidFill>
-                <a:latin typeface="Calibri"/>
-              </a:defRPr>
-            </a:pPr>
-            <a:r>
-              <a:t>correlated -- genes up in F are generally also up in M.</a:t>
-            </a:r>
-          </a:p>
-          <a:p>
-            <a:pPr>
-              <a:spcAft>
-                <a:spcPts val="600"/>
-              </a:spcAft>
-              <a:defRPr sz="1300">
-                <a:solidFill>
-                  <a:srgbClr val="000000"/>
-                </a:solidFill>
-                <a:latin typeface="Calibri"/>
-              </a:defRPr>
-            </a:pPr>
-          </a:p>
-          <a:p>
-            <a:pPr>
-              <a:spcAft>
-                <a:spcPts val="600"/>
-              </a:spcAft>
-              <a:defRPr sz="1300">
-                <a:solidFill>
-                  <a:srgbClr val="000000"/>
-                </a:solidFill>
-                <a:latin typeface="Calibri"/>
-              </a:defRPr>
-            </a:pPr>
-            <a:r>
-              <a:t>Note: With only n=4-5 per sex-genotype group, per-sex</a:t>
-            </a:r>
-          </a:p>
-          <a:p>
-            <a:pPr>
-              <a:spcAft>
-                <a:spcPts val="600"/>
-              </a:spcAft>
-              <a:defRPr sz="1300">
-                <a:solidFill>
-                  <a:srgbClr val="000000"/>
-                </a:solidFill>
-                <a:latin typeface="Calibri"/>
-              </a:defRPr>
-            </a:pPr>
-            <a:r>
-              <a:t>analyses have limited power, so the true concordance</a:t>
-            </a:r>
-          </a:p>
-          <a:p>
-            <a:pPr>
-              <a:spcAft>
-                <a:spcPts val="600"/>
-              </a:spcAft>
-              <a:defRPr sz="1300">
-                <a:solidFill>
-                  <a:srgbClr val="000000"/>
-                </a:solidFill>
-                <a:latin typeface="Calibri"/>
-              </a:defRPr>
-            </a:pPr>
-            <a:r>
-              <a:t>is likely higher than observed.</a:t>
-            </a:r>
-          </a:p>
-        </p:txBody>
-      </p:sp>
-      <p:sp>
-        <p:nvSpPr>
-          <p:cNvPr id="5" name="Rectangle 4"/>
+              <a:t>Method: ANOVA on VST-transformed counts:</a:t>
+            </a:r>
+          </a:p>
+          <a:p>
+            <a:pPr>
+              <a:spcAft>
+                <a:spcPts val="600"/>
+              </a:spcAft>
+              <a:defRPr sz="1300">
+                <a:solidFill>
+                  <a:srgbClr val="000000"/>
+                </a:solidFill>
+                <a:latin typeface="Calibri"/>
+              </a:defRPr>
+            </a:pPr>
+            <a:r>
+              <a:t>  lm(expression ~ Sex + Genotype + Sex:Genotype)</a:t>
+            </a:r>
+          </a:p>
+          <a:p>
+            <a:pPr>
+              <a:spcAft>
+                <a:spcPts val="600"/>
+              </a:spcAft>
+              <a:defRPr sz="1300">
+                <a:solidFill>
+                  <a:srgbClr val="000000"/>
+                </a:solidFill>
+                <a:latin typeface="Calibri"/>
+              </a:defRPr>
+            </a:pPr>
+          </a:p>
+          <a:p>
+            <a:pPr>
+              <a:spcAft>
+                <a:spcPts val="600"/>
+              </a:spcAft>
+              <a:defRPr sz="1300">
+                <a:solidFill>
+                  <a:srgbClr val="000000"/>
+                </a:solidFill>
+                <a:latin typeface="Calibri"/>
+              </a:defRPr>
+            </a:pPr>
+            <a:r>
+              <a:t>         Term               iWAT (median)   gWAT (median)</a:t>
+            </a:r>
+          </a:p>
+          <a:p>
+            <a:pPr>
+              <a:spcAft>
+                <a:spcPts val="600"/>
+              </a:spcAft>
+              <a:defRPr sz="1300">
+                <a:solidFill>
+                  <a:srgbClr val="000000"/>
+                </a:solidFill>
+                <a:latin typeface="Calibri"/>
+              </a:defRPr>
+            </a:pPr>
+            <a:r>
+              <a:t>  Sex (M vs F)                    6.5%           11.5%</a:t>
+            </a:r>
+          </a:p>
+          <a:p>
+            <a:pPr>
+              <a:spcAft>
+                <a:spcPts val="600"/>
+              </a:spcAft>
+              <a:defRPr sz="1300">
+                <a:solidFill>
+                  <a:srgbClr val="000000"/>
+                </a:solidFill>
+                <a:latin typeface="Calibri"/>
+              </a:defRPr>
+            </a:pPr>
+            <a:r>
+              <a:t>  Genotype (KD effect)          33.2%           16.7%</a:t>
+            </a:r>
+          </a:p>
+          <a:p>
+            <a:pPr>
+              <a:spcAft>
+                <a:spcPts val="600"/>
+              </a:spcAft>
+              <a:defRPr sz="1300">
+                <a:solidFill>
+                  <a:srgbClr val="000000"/>
+                </a:solidFill>
+                <a:latin typeface="Calibri"/>
+              </a:defRPr>
+            </a:pPr>
+            <a:r>
+              <a:t>  Sex x Genotype                  2.1%             2.4%</a:t>
+            </a:r>
+          </a:p>
+          <a:p>
+            <a:pPr>
+              <a:spcAft>
+                <a:spcPts val="600"/>
+              </a:spcAft>
+              <a:defRPr sz="1300">
+                <a:solidFill>
+                  <a:srgbClr val="000000"/>
+                </a:solidFill>
+                <a:latin typeface="Calibri"/>
+              </a:defRPr>
+            </a:pPr>
+            <a:r>
+              <a:t>  Residual (unexplained)        46.3%           50.1%</a:t>
+            </a:r>
+          </a:p>
+        </p:txBody>
+      </p:sp>
+      <p:sp>
+        <p:nvSpPr>
+          <p:cNvPr id="5" name="TextBox 4"/>
+          <p:cNvSpPr txBox="1"/>
+          <p:nvPr/>
+        </p:nvSpPr>
+        <p:spPr>
+          <a:xfrm>
+            <a:off x="548640" y="4114800"/>
+            <a:ext cx="5029200" cy="1828800"/>
+          </a:xfrm>
+          <a:prstGeom prst="rect">
+            <a:avLst/>
+          </a:prstGeom>
+          <a:noFill/>
+        </p:spPr>
+        <p:txBody>
+          <a:bodyPr wrap="square">
+            <a:spAutoFit/>
+          </a:bodyPr>
+          <a:lstStyle/>
+          <a:p>
+            <a:pPr>
+              <a:spcAft>
+                <a:spcPts val="600"/>
+              </a:spcAft>
+              <a:defRPr sz="1300">
+                <a:solidFill>
+                  <a:srgbClr val="1B3A5C"/>
+                </a:solidFill>
+                <a:latin typeface="Calibri"/>
+              </a:defRPr>
+            </a:pPr>
+            <a:r>
+              <a:t>Key takeaway: The interaction term explains only ~2% of variance</a:t>
+            </a:r>
+          </a:p>
+          <a:p>
+            <a:pPr>
+              <a:spcAft>
+                <a:spcPts val="600"/>
+              </a:spcAft>
+              <a:defRPr sz="1300">
+                <a:solidFill>
+                  <a:srgbClr val="1B3A5C"/>
+                </a:solidFill>
+                <a:latin typeface="Calibri"/>
+              </a:defRPr>
+            </a:pPr>
+            <a:r>
+              <a:t>  vs. 17-33% for the Genotype main effect (8-16x more)</a:t>
+            </a:r>
+          </a:p>
+          <a:p>
+            <a:pPr>
+              <a:spcAft>
+                <a:spcPts val="600"/>
+              </a:spcAft>
+              <a:defRPr sz="1300">
+                <a:solidFill>
+                  <a:srgbClr val="1B3A5C"/>
+                </a:solidFill>
+                <a:latin typeface="Calibri"/>
+              </a:defRPr>
+            </a:pPr>
+          </a:p>
+          <a:p>
+            <a:pPr>
+              <a:spcAft>
+                <a:spcPts val="600"/>
+              </a:spcAft>
+              <a:defRPr sz="1300">
+                <a:solidFill>
+                  <a:srgbClr val="1B3A5C"/>
+                </a:solidFill>
+                <a:latin typeface="Calibri"/>
+              </a:defRPr>
+            </a:pPr>
+            <a:r>
+              <a:t>Think of it this way: if gene expression were a pie chart,</a:t>
+            </a:r>
+          </a:p>
+          <a:p>
+            <a:pPr>
+              <a:spcAft>
+                <a:spcPts val="600"/>
+              </a:spcAft>
+              <a:defRPr sz="1300">
+                <a:solidFill>
+                  <a:srgbClr val="1B3A5C"/>
+                </a:solidFill>
+                <a:latin typeface="Calibri"/>
+              </a:defRPr>
+            </a:pPr>
+            <a:r>
+              <a:t>  the KD effect gets a BIG slice (17-33%),</a:t>
+            </a:r>
+          </a:p>
+          <a:p>
+            <a:pPr>
+              <a:spcAft>
+                <a:spcPts val="600"/>
+              </a:spcAft>
+              <a:defRPr sz="1300">
+                <a:solidFill>
+                  <a:srgbClr val="1B3A5C"/>
+                </a:solidFill>
+                <a:latin typeface="Calibri"/>
+              </a:defRPr>
+            </a:pPr>
+            <a:r>
+              <a:t>  Sex gets a medium slice (6-12%),</a:t>
+            </a:r>
+          </a:p>
+          <a:p>
+            <a:pPr>
+              <a:spcAft>
+                <a:spcPts val="600"/>
+              </a:spcAft>
+              <a:defRPr sz="1300">
+                <a:solidFill>
+                  <a:srgbClr val="1B3A5C"/>
+                </a:solidFill>
+                <a:latin typeface="Calibri"/>
+              </a:defRPr>
+            </a:pPr>
+            <a:r>
+              <a:t>  but Sex x KD interaction gets a TINY slice (~2%)</a:t>
+            </a:r>
+          </a:p>
+        </p:txBody>
+      </p:sp>
+      <p:sp>
+        <p:nvSpPr>
+          <p:cNvPr id="6" name="Rectangle 5"/>
           <p:cNvSpPr/>
           <p:nvPr/>
         </p:nvSpPr>
@@ -3580,7 +4397,7 @@
               </a:defRPr>
             </a:pPr>
             <a:r>
-              <a:t>sex_concordance_scatter_gWAT_&lt;run_tag&gt;.png</a:t>
+              <a:t>variance_explained_&lt;depot&gt;_&lt;run_tag&gt;.png</a:t>
             </a:r>
           </a:p>
         </p:txBody>
@@ -3593,9 +4410,17 @@
 </p:sld>
 </file>
 
-<file path=ppt/slides/slide11.xml><?xml version="1.0" encoding="utf-8"?>
+<file path=ppt/slides/slide13.xml><?xml version="1.0" encoding="utf-8"?>
 <p:sld xmlns:a="http://schemas.openxmlformats.org/drawingml/2006/main" xmlns:p="http://schemas.openxmlformats.org/presentationml/2006/main" xmlns:r="http://schemas.openxmlformats.org/officeDocument/2006/relationships">
   <p:cSld>
+    <p:bg>
+      <p:bgPr>
+        <a:solidFill>
+          <a:srgbClr val="FDF2E9"/>
+        </a:solidFill>
+        <a:effectLst/>
+      </p:bgPr>
+    </p:bg>
     <p:spTree>
       <p:nvGrpSpPr>
         <p:cNvPr id="1" name=""/>
@@ -3634,6 +4459,1261 @@
               </a:defRPr>
             </a:pPr>
             <a:r>
+              <a:t>Background: What is Concordance?</a:t>
+            </a:r>
+          </a:p>
+        </p:txBody>
+      </p:sp>
+      <p:sp>
+        <p:nvSpPr>
+          <p:cNvPr id="3" name="TextBox 2"/>
+          <p:cNvSpPr txBox="1"/>
+          <p:nvPr/>
+        </p:nvSpPr>
+        <p:spPr>
+          <a:xfrm>
+            <a:off x="548640" y="1188720"/>
+            <a:ext cx="10972800" cy="5029200"/>
+          </a:xfrm>
+          <a:prstGeom prst="rect">
+            <a:avLst/>
+          </a:prstGeom>
+          <a:noFill/>
+        </p:spPr>
+        <p:txBody>
+          <a:bodyPr wrap="square">
+            <a:spAutoFit/>
+          </a:bodyPr>
+          <a:lstStyle/>
+          <a:p>
+            <a:pPr>
+              <a:spcAft>
+                <a:spcPts val="600"/>
+              </a:spcAft>
+              <a:defRPr sz="1300">
+                <a:solidFill>
+                  <a:srgbClr val="000000"/>
+                </a:solidFill>
+                <a:latin typeface="Calibri"/>
+              </a:defRPr>
+            </a:pPr>
+            <a:r>
+              <a:t>Concordance = do males and females AGREE on which genes are affected by KD?</a:t>
+            </a:r>
+          </a:p>
+          <a:p>
+            <a:pPr>
+              <a:spcAft>
+                <a:spcPts val="600"/>
+              </a:spcAft>
+              <a:defRPr sz="1300">
+                <a:solidFill>
+                  <a:srgbClr val="000000"/>
+                </a:solidFill>
+                <a:latin typeface="Calibri"/>
+              </a:defRPr>
+            </a:pPr>
+          </a:p>
+          <a:p>
+            <a:pPr>
+              <a:spcAft>
+                <a:spcPts val="600"/>
+              </a:spcAft>
+              <a:defRPr sz="1300">
+                <a:solidFill>
+                  <a:srgbClr val="000000"/>
+                </a:solidFill>
+                <a:latin typeface="Calibri"/>
+              </a:defRPr>
+            </a:pPr>
+            <a:r>
+              <a:t>How we test this:</a:t>
+            </a:r>
+          </a:p>
+          <a:p>
+            <a:pPr>
+              <a:spcAft>
+                <a:spcPts val="600"/>
+              </a:spcAft>
+              <a:defRPr sz="1300">
+                <a:solidFill>
+                  <a:srgbClr val="000000"/>
+                </a:solidFill>
+                <a:latin typeface="Calibri"/>
+              </a:defRPr>
+            </a:pPr>
+            <a:r>
+              <a:t>  1. Run DESeq2 on FEMALES ONLY -&gt; get a fold change for every gene</a:t>
+            </a:r>
+          </a:p>
+          <a:p>
+            <a:pPr>
+              <a:spcAft>
+                <a:spcPts val="600"/>
+              </a:spcAft>
+              <a:defRPr sz="1300">
+                <a:solidFill>
+                  <a:srgbClr val="000000"/>
+                </a:solidFill>
+                <a:latin typeface="Calibri"/>
+              </a:defRPr>
+            </a:pPr>
+            <a:r>
+              <a:t>  2. Run DESeq2 on MALES ONLY -&gt; get a fold change for every gene</a:t>
+            </a:r>
+          </a:p>
+          <a:p>
+            <a:pPr>
+              <a:spcAft>
+                <a:spcPts val="600"/>
+              </a:spcAft>
+              <a:defRPr sz="1300">
+                <a:solidFill>
+                  <a:srgbClr val="000000"/>
+                </a:solidFill>
+                <a:latin typeface="Calibri"/>
+              </a:defRPr>
+            </a:pPr>
+            <a:r>
+              <a:t>  3. Plot female fold changes (x-axis) vs male fold changes (y-axis)</a:t>
+            </a:r>
+          </a:p>
+          <a:p>
+            <a:pPr>
+              <a:spcAft>
+                <a:spcPts val="600"/>
+              </a:spcAft>
+              <a:defRPr sz="1300">
+                <a:solidFill>
+                  <a:srgbClr val="000000"/>
+                </a:solidFill>
+                <a:latin typeface="Calibri"/>
+              </a:defRPr>
+            </a:pPr>
+            <a:r>
+              <a:t>  4. Compute Pearson correlation (r) -- how well do they match?</a:t>
+            </a:r>
+          </a:p>
+          <a:p>
+            <a:pPr>
+              <a:spcAft>
+                <a:spcPts val="600"/>
+              </a:spcAft>
+              <a:defRPr sz="1300">
+                <a:solidFill>
+                  <a:srgbClr val="000000"/>
+                </a:solidFill>
+                <a:latin typeface="Calibri"/>
+              </a:defRPr>
+            </a:pPr>
+          </a:p>
+          <a:p>
+            <a:pPr>
+              <a:spcAft>
+                <a:spcPts val="600"/>
+              </a:spcAft>
+              <a:defRPr sz="1300">
+                <a:solidFill>
+                  <a:srgbClr val="000000"/>
+                </a:solidFill>
+                <a:latin typeface="Calibri"/>
+              </a:defRPr>
+            </a:pPr>
+            <a:r>
+              <a:t>Interpreting the scatter plot:</a:t>
+            </a:r>
+          </a:p>
+          <a:p>
+            <a:pPr>
+              <a:spcAft>
+                <a:spcPts val="600"/>
+              </a:spcAft>
+              <a:defRPr sz="1300">
+                <a:solidFill>
+                  <a:srgbClr val="000000"/>
+                </a:solidFill>
+                <a:latin typeface="Calibri"/>
+              </a:defRPr>
+            </a:pPr>
+            <a:r>
+              <a:t>  - Points on the diagonal (y = x): perfect agreement (M and F same)</a:t>
+            </a:r>
+          </a:p>
+          <a:p>
+            <a:pPr>
+              <a:spcAft>
+                <a:spcPts val="600"/>
+              </a:spcAft>
+              <a:defRPr sz="1300">
+                <a:solidFill>
+                  <a:srgbClr val="000000"/>
+                </a:solidFill>
+                <a:latin typeface="Calibri"/>
+              </a:defRPr>
+            </a:pPr>
+            <a:r>
+              <a:t>  - Points in upper-right quadrant: gene goes UP in both sexes (concordant)</a:t>
+            </a:r>
+          </a:p>
+          <a:p>
+            <a:pPr>
+              <a:spcAft>
+                <a:spcPts val="600"/>
+              </a:spcAft>
+              <a:defRPr sz="1300">
+                <a:solidFill>
+                  <a:srgbClr val="000000"/>
+                </a:solidFill>
+                <a:latin typeface="Calibri"/>
+              </a:defRPr>
+            </a:pPr>
+            <a:r>
+              <a:t>  - Points in lower-left quadrant: gene goes DOWN in both sexes (concordant)</a:t>
+            </a:r>
+          </a:p>
+          <a:p>
+            <a:pPr>
+              <a:spcAft>
+                <a:spcPts val="600"/>
+              </a:spcAft>
+              <a:defRPr sz="1300">
+                <a:solidFill>
+                  <a:srgbClr val="000000"/>
+                </a:solidFill>
+                <a:latin typeface="Calibri"/>
+              </a:defRPr>
+            </a:pPr>
+            <a:r>
+              <a:t>  - Points in upper-left or lower-right: gene goes UP in one sex but DOWN</a:t>
+            </a:r>
+          </a:p>
+          <a:p>
+            <a:pPr>
+              <a:spcAft>
+                <a:spcPts val="600"/>
+              </a:spcAft>
+              <a:defRPr sz="1300">
+                <a:solidFill>
+                  <a:srgbClr val="000000"/>
+                </a:solidFill>
+                <a:latin typeface="Calibri"/>
+              </a:defRPr>
+            </a:pPr>
+            <a:r>
+              <a:t>    in the other (DISCORDANT -- these are the problematic ones)</a:t>
+            </a:r>
+          </a:p>
+          <a:p>
+            <a:pPr>
+              <a:spcAft>
+                <a:spcPts val="600"/>
+              </a:spcAft>
+              <a:defRPr sz="1300">
+                <a:solidFill>
+                  <a:srgbClr val="000000"/>
+                </a:solidFill>
+                <a:latin typeface="Calibri"/>
+              </a:defRPr>
+            </a:pPr>
+          </a:p>
+          <a:p>
+            <a:pPr>
+              <a:spcAft>
+                <a:spcPts val="600"/>
+              </a:spcAft>
+              <a:defRPr sz="1300">
+                <a:solidFill>
+                  <a:srgbClr val="000000"/>
+                </a:solidFill>
+                <a:latin typeface="Calibri"/>
+              </a:defRPr>
+            </a:pPr>
+            <a:r>
+              <a:t>What r values mean:</a:t>
+            </a:r>
+          </a:p>
+          <a:p>
+            <a:pPr>
+              <a:spcAft>
+                <a:spcPts val="600"/>
+              </a:spcAft>
+              <a:defRPr sz="1300">
+                <a:solidFill>
+                  <a:srgbClr val="000000"/>
+                </a:solidFill>
+                <a:latin typeface="Calibri"/>
+              </a:defRPr>
+            </a:pPr>
+            <a:r>
+              <a:t>  r = 1.0: perfect agreement   r = 0.7-0.9: strong   r = 0.5-0.7: moderate</a:t>
+            </a:r>
+          </a:p>
+          <a:p>
+            <a:pPr>
+              <a:spcAft>
+                <a:spcPts val="600"/>
+              </a:spcAft>
+              <a:defRPr sz="1300">
+                <a:solidFill>
+                  <a:srgbClr val="000000"/>
+                </a:solidFill>
+                <a:latin typeface="Calibri"/>
+              </a:defRPr>
+            </a:pPr>
+            <a:r>
+              <a:t>  r &lt; 0.5: poor agreement (males and females respond very differently)</a:t>
+            </a:r>
+          </a:p>
+        </p:txBody>
+      </p:sp>
+    </p:spTree>
+  </p:cSld>
+  <p:clrMapOvr>
+    <a:masterClrMapping/>
+  </p:clrMapOvr>
+</p:sld>
+</file>
+
+<file path=ppt/slides/slide14.xml><?xml version="1.0" encoding="utf-8"?>
+<p:sld xmlns:a="http://schemas.openxmlformats.org/drawingml/2006/main" xmlns:p="http://schemas.openxmlformats.org/presentationml/2006/main" xmlns:r="http://schemas.openxmlformats.org/officeDocument/2006/relationships">
+  <p:cSld>
+    <p:spTree>
+      <p:nvGrpSpPr>
+        <p:cNvPr id="1" name=""/>
+        <p:cNvGrpSpPr/>
+        <p:nvPr/>
+      </p:nvGrpSpPr>
+      <p:grpSpPr/>
+      <p:sp>
+        <p:nvSpPr>
+          <p:cNvPr id="2" name="TextBox 1"/>
+          <p:cNvSpPr txBox="1"/>
+          <p:nvPr/>
+        </p:nvSpPr>
+        <p:spPr>
+          <a:xfrm>
+            <a:off x="548640" y="274320"/>
+            <a:ext cx="10972800" cy="548640"/>
+          </a:xfrm>
+          <a:prstGeom prst="rect">
+            <a:avLst/>
+          </a:prstGeom>
+          <a:noFill/>
+        </p:spPr>
+        <p:txBody>
+          <a:bodyPr wrap="square">
+            <a:spAutoFit/>
+          </a:bodyPr>
+          <a:lstStyle/>
+          <a:p>
+            <a:pPr algn="l">
+              <a:defRPr sz="2800" b="1">
+                <a:solidFill>
+                  <a:srgbClr val="1B3A5C"/>
+                </a:solidFill>
+                <a:latin typeface="Calibri"/>
+              </a:defRPr>
+            </a:pPr>
+            <a:r>
+              <a:t>Sex-Stratified Concordance: iWAT</a:t>
+            </a:r>
+          </a:p>
+        </p:txBody>
+      </p:sp>
+      <p:sp>
+        <p:nvSpPr>
+          <p:cNvPr id="3" name="TextBox 2"/>
+          <p:cNvSpPr txBox="1"/>
+          <p:nvPr/>
+        </p:nvSpPr>
+        <p:spPr>
+          <a:xfrm>
+            <a:off x="548640" y="822960"/>
+            <a:ext cx="10972800" cy="365760"/>
+          </a:xfrm>
+          <a:prstGeom prst="rect">
+            <a:avLst/>
+          </a:prstGeom>
+          <a:noFill/>
+        </p:spPr>
+        <p:txBody>
+          <a:bodyPr wrap="square">
+            <a:spAutoFit/>
+          </a:bodyPr>
+          <a:lstStyle/>
+          <a:p>
+            <a:pPr algn="l">
+              <a:defRPr sz="1400" b="0">
+                <a:solidFill>
+                  <a:srgbClr val="666666"/>
+                </a:solidFill>
+                <a:latin typeface="Calibri"/>
+              </a:defRPr>
+            </a:pPr>
+            <a:r>
+              <a:t>DESeq2 run separately for F-only and M-only, then fold changes correlated</a:t>
+            </a:r>
+          </a:p>
+        </p:txBody>
+      </p:sp>
+      <p:sp>
+        <p:nvSpPr>
+          <p:cNvPr id="4" name="TextBox 3"/>
+          <p:cNvSpPr txBox="1"/>
+          <p:nvPr/>
+        </p:nvSpPr>
+        <p:spPr>
+          <a:xfrm>
+            <a:off x="548640" y="1463040"/>
+            <a:ext cx="5029200" cy="4114800"/>
+          </a:xfrm>
+          <a:prstGeom prst="rect">
+            <a:avLst/>
+          </a:prstGeom>
+          <a:noFill/>
+        </p:spPr>
+        <p:txBody>
+          <a:bodyPr wrap="square">
+            <a:spAutoFit/>
+          </a:bodyPr>
+          <a:lstStyle/>
+          <a:p>
+            <a:pPr>
+              <a:spcAft>
+                <a:spcPts val="600"/>
+              </a:spcAft>
+              <a:defRPr sz="1200">
+                <a:solidFill>
+                  <a:srgbClr val="000000"/>
+                </a:solidFill>
+                <a:latin typeface="Calibri"/>
+              </a:defRPr>
+            </a:pPr>
+            <a:r>
+              <a:t>Pearson r = 0.727 (moderate-to-strong concordance)</a:t>
+            </a:r>
+          </a:p>
+          <a:p>
+            <a:pPr>
+              <a:spcAft>
+                <a:spcPts val="600"/>
+              </a:spcAft>
+              <a:defRPr sz="1200">
+                <a:solidFill>
+                  <a:srgbClr val="000000"/>
+                </a:solidFill>
+                <a:latin typeface="Calibri"/>
+              </a:defRPr>
+            </a:pPr>
+            <a:r>
+              <a:t>Directional concordance = 99.0%</a:t>
+            </a:r>
+          </a:p>
+          <a:p>
+            <a:pPr>
+              <a:spcAft>
+                <a:spcPts val="600"/>
+              </a:spcAft>
+              <a:defRPr sz="1200">
+                <a:solidFill>
+                  <a:srgbClr val="000000"/>
+                </a:solidFill>
+                <a:latin typeface="Calibri"/>
+              </a:defRPr>
+            </a:pPr>
+          </a:p>
+          <a:p>
+            <a:pPr>
+              <a:spcAft>
+                <a:spcPts val="600"/>
+              </a:spcAft>
+              <a:defRPr sz="1200">
+                <a:solidFill>
+                  <a:srgbClr val="000000"/>
+                </a:solidFill>
+                <a:latin typeface="Calibri"/>
+              </a:defRPr>
+            </a:pPr>
+            <a:r>
+              <a:t>What these numbers mean:</a:t>
+            </a:r>
+          </a:p>
+          <a:p>
+            <a:pPr>
+              <a:spcAft>
+                <a:spcPts val="600"/>
+              </a:spcAft>
+              <a:defRPr sz="1200">
+                <a:solidFill>
+                  <a:srgbClr val="000000"/>
+                </a:solidFill>
+                <a:latin typeface="Calibri"/>
+              </a:defRPr>
+            </a:pPr>
+            <a:r>
+              <a:t>  r = 0.73: Males and females largely agree on which genes</a:t>
+            </a:r>
+          </a:p>
+          <a:p>
+            <a:pPr>
+              <a:spcAft>
+                <a:spcPts val="600"/>
+              </a:spcAft>
+              <a:defRPr sz="1200">
+                <a:solidFill>
+                  <a:srgbClr val="000000"/>
+                </a:solidFill>
+                <a:latin typeface="Calibri"/>
+              </a:defRPr>
+            </a:pPr>
+            <a:r>
+              <a:t>  are affected by KD and how much they change</a:t>
+            </a:r>
+          </a:p>
+          <a:p>
+            <a:pPr>
+              <a:spcAft>
+                <a:spcPts val="600"/>
+              </a:spcAft>
+              <a:defRPr sz="1200">
+                <a:solidFill>
+                  <a:srgbClr val="000000"/>
+                </a:solidFill>
+                <a:latin typeface="Calibri"/>
+              </a:defRPr>
+            </a:pPr>
+          </a:p>
+          <a:p>
+            <a:pPr>
+              <a:spcAft>
+                <a:spcPts val="600"/>
+              </a:spcAft>
+              <a:defRPr sz="1200">
+                <a:solidFill>
+                  <a:srgbClr val="000000"/>
+                </a:solidFill>
+                <a:latin typeface="Calibri"/>
+              </a:defRPr>
+            </a:pPr>
+            <a:r>
+              <a:t>  99.0% directional concordance: Of ALL significant DEGs,</a:t>
+            </a:r>
+          </a:p>
+          <a:p>
+            <a:pPr>
+              <a:spcAft>
+                <a:spcPts val="600"/>
+              </a:spcAft>
+              <a:defRPr sz="1200">
+                <a:solidFill>
+                  <a:srgbClr val="000000"/>
+                </a:solidFill>
+                <a:latin typeface="Calibri"/>
+              </a:defRPr>
+            </a:pPr>
+            <a:r>
+              <a:t>  99% go the SAME direction in both sexes. Only 1% are</a:t>
+            </a:r>
+          </a:p>
+          <a:p>
+            <a:pPr>
+              <a:spcAft>
+                <a:spcPts val="600"/>
+              </a:spcAft>
+              <a:defRPr sz="1200">
+                <a:solidFill>
+                  <a:srgbClr val="000000"/>
+                </a:solidFill>
+                <a:latin typeface="Calibri"/>
+              </a:defRPr>
+            </a:pPr>
+            <a:r>
+              <a:t>  discordant (up in one sex, down in the other).</a:t>
+            </a:r>
+          </a:p>
+          <a:p>
+            <a:pPr>
+              <a:spcAft>
+                <a:spcPts val="600"/>
+              </a:spcAft>
+              <a:defRPr sz="1200">
+                <a:solidFill>
+                  <a:srgbClr val="000000"/>
+                </a:solidFill>
+                <a:latin typeface="Calibri"/>
+              </a:defRPr>
+            </a:pPr>
+          </a:p>
+          <a:p>
+            <a:pPr>
+              <a:spcAft>
+                <a:spcPts val="600"/>
+              </a:spcAft>
+              <a:defRPr sz="1200">
+                <a:solidFill>
+                  <a:srgbClr val="000000"/>
+                </a:solidFill>
+                <a:latin typeface="Calibri"/>
+              </a:defRPr>
+            </a:pPr>
+            <a:r>
+              <a:t>  Purple dots: significant in BOTH sexes (strongest evidence)</a:t>
+            </a:r>
+          </a:p>
+          <a:p>
+            <a:pPr>
+              <a:spcAft>
+                <a:spcPts val="600"/>
+              </a:spcAft>
+              <a:defRPr sz="1200">
+                <a:solidFill>
+                  <a:srgbClr val="000000"/>
+                </a:solidFill>
+                <a:latin typeface="Calibri"/>
+              </a:defRPr>
+            </a:pPr>
+            <a:r>
+              <a:t>  Red dots: significant in F only</a:t>
+            </a:r>
+          </a:p>
+          <a:p>
+            <a:pPr>
+              <a:spcAft>
+                <a:spcPts val="600"/>
+              </a:spcAft>
+              <a:defRPr sz="1200">
+                <a:solidFill>
+                  <a:srgbClr val="000000"/>
+                </a:solidFill>
+                <a:latin typeface="Calibri"/>
+              </a:defRPr>
+            </a:pPr>
+            <a:r>
+              <a:t>  Blue dots: significant in M only</a:t>
+            </a:r>
+          </a:p>
+          <a:p>
+            <a:pPr>
+              <a:spcAft>
+                <a:spcPts val="600"/>
+              </a:spcAft>
+              <a:defRPr sz="1200">
+                <a:solidFill>
+                  <a:srgbClr val="000000"/>
+                </a:solidFill>
+                <a:latin typeface="Calibri"/>
+              </a:defRPr>
+            </a:pPr>
+            <a:r>
+              <a:t>  Grey dots: not significant in either</a:t>
+            </a:r>
+          </a:p>
+          <a:p>
+            <a:pPr>
+              <a:spcAft>
+                <a:spcPts val="600"/>
+              </a:spcAft>
+              <a:defRPr sz="1200">
+                <a:solidFill>
+                  <a:srgbClr val="000000"/>
+                </a:solidFill>
+                <a:latin typeface="Calibri"/>
+              </a:defRPr>
+            </a:pPr>
+          </a:p>
+          <a:p>
+            <a:pPr>
+              <a:spcAft>
+                <a:spcPts val="600"/>
+              </a:spcAft>
+              <a:defRPr sz="1200">
+                <a:solidFill>
+                  <a:srgbClr val="000000"/>
+                </a:solidFill>
+                <a:latin typeface="Calibri"/>
+              </a:defRPr>
+            </a:pPr>
+            <a:r>
+              <a:t>Note: r = 0.73 (not 0.99) because with n=4-5 per group,</a:t>
+            </a:r>
+          </a:p>
+          <a:p>
+            <a:pPr>
+              <a:spcAft>
+                <a:spcPts val="600"/>
+              </a:spcAft>
+              <a:defRPr sz="1200">
+                <a:solidFill>
+                  <a:srgbClr val="000000"/>
+                </a:solidFill>
+                <a:latin typeface="Calibri"/>
+              </a:defRPr>
+            </a:pPr>
+            <a:r>
+              <a:t>per-sex analyses are noisy. True concordance is likely higher.</a:t>
+            </a:r>
+          </a:p>
+        </p:txBody>
+      </p:sp>
+      <p:sp>
+        <p:nvSpPr>
+          <p:cNvPr id="5" name="Rectangle 4"/>
+          <p:cNvSpPr/>
+          <p:nvPr/>
+        </p:nvSpPr>
+        <p:spPr>
+          <a:xfrm>
+            <a:off x="5943600" y="1371600"/>
+            <a:ext cx="5486400" cy="4572000"/>
+          </a:xfrm>
+          <a:prstGeom prst="rect">
+            <a:avLst/>
+          </a:prstGeom>
+          <a:solidFill>
+            <a:srgbClr val="F2F2F2"/>
+          </a:solidFill>
+          <a:ln w="19050">
+            <a:solidFill>
+              <a:srgbClr val="999999"/>
+            </a:solidFill>
+            <a:prstDash val="sysDash"/>
+          </a:ln>
+        </p:spPr>
+        <p:style>
+          <a:lnRef idx="1">
+            <a:schemeClr val="accent1"/>
+          </a:lnRef>
+          <a:fillRef idx="3">
+            <a:schemeClr val="accent1"/>
+          </a:fillRef>
+          <a:effectRef idx="2">
+            <a:schemeClr val="accent1"/>
+          </a:effectRef>
+          <a:fontRef idx="minor">
+            <a:schemeClr val="lt1"/>
+          </a:fontRef>
+        </p:style>
+        <p:txBody>
+          <a:bodyPr rtlCol="0" anchor="ctr" wrap="square"/>
+          <a:lstStyle/>
+          <a:p>
+            <a:pPr algn="ctr">
+              <a:defRPr sz="1400" b="1">
+                <a:solidFill>
+                  <a:srgbClr val="666666"/>
+                </a:solidFill>
+              </a:defRPr>
+            </a:pPr>
+            <a:r>
+              <a:t>INSERT PLOT</a:t>
+            </a:r>
+          </a:p>
+          <a:p>
+            <a:pPr algn="ctr">
+              <a:defRPr sz="1100" i="1">
+                <a:solidFill>
+                  <a:srgbClr val="666666"/>
+                </a:solidFill>
+              </a:defRPr>
+            </a:pPr>
+            <a:r>
+              <a:t>sex_concordance_scatter_iWAT_&lt;run_tag&gt;.png</a:t>
+            </a:r>
+          </a:p>
+        </p:txBody>
+      </p:sp>
+    </p:spTree>
+  </p:cSld>
+  <p:clrMapOvr>
+    <a:masterClrMapping/>
+  </p:clrMapOvr>
+</p:sld>
+</file>
+
+<file path=ppt/slides/slide15.xml><?xml version="1.0" encoding="utf-8"?>
+<p:sld xmlns:a="http://schemas.openxmlformats.org/drawingml/2006/main" xmlns:p="http://schemas.openxmlformats.org/presentationml/2006/main" xmlns:r="http://schemas.openxmlformats.org/officeDocument/2006/relationships">
+  <p:cSld>
+    <p:spTree>
+      <p:nvGrpSpPr>
+        <p:cNvPr id="1" name=""/>
+        <p:cNvGrpSpPr/>
+        <p:nvPr/>
+      </p:nvGrpSpPr>
+      <p:grpSpPr/>
+      <p:sp>
+        <p:nvSpPr>
+          <p:cNvPr id="2" name="TextBox 1"/>
+          <p:cNvSpPr txBox="1"/>
+          <p:nvPr/>
+        </p:nvSpPr>
+        <p:spPr>
+          <a:xfrm>
+            <a:off x="548640" y="274320"/>
+            <a:ext cx="10972800" cy="548640"/>
+          </a:xfrm>
+          <a:prstGeom prst="rect">
+            <a:avLst/>
+          </a:prstGeom>
+          <a:noFill/>
+        </p:spPr>
+        <p:txBody>
+          <a:bodyPr wrap="square">
+            <a:spAutoFit/>
+          </a:bodyPr>
+          <a:lstStyle/>
+          <a:p>
+            <a:pPr algn="l">
+              <a:defRPr sz="2800" b="1">
+                <a:solidFill>
+                  <a:srgbClr val="1B3A5C"/>
+                </a:solidFill>
+                <a:latin typeface="Calibri"/>
+              </a:defRPr>
+            </a:pPr>
+            <a:r>
+              <a:t>Sex-Stratified Concordance: gWAT</a:t>
+            </a:r>
+          </a:p>
+        </p:txBody>
+      </p:sp>
+      <p:sp>
+        <p:nvSpPr>
+          <p:cNvPr id="3" name="TextBox 2"/>
+          <p:cNvSpPr txBox="1"/>
+          <p:nvPr/>
+        </p:nvSpPr>
+        <p:spPr>
+          <a:xfrm>
+            <a:off x="548640" y="822960"/>
+            <a:ext cx="10972800" cy="365760"/>
+          </a:xfrm>
+          <a:prstGeom prst="rect">
+            <a:avLst/>
+          </a:prstGeom>
+          <a:noFill/>
+        </p:spPr>
+        <p:txBody>
+          <a:bodyPr wrap="square">
+            <a:spAutoFit/>
+          </a:bodyPr>
+          <a:lstStyle/>
+          <a:p>
+            <a:pPr algn="l">
+              <a:defRPr sz="1400" b="0">
+                <a:solidFill>
+                  <a:srgbClr val="666666"/>
+                </a:solidFill>
+                <a:latin typeface="Calibri"/>
+              </a:defRPr>
+            </a:pPr>
+            <a:r>
+              <a:t>DESeq2 run separately for F-only and M-only, then fold changes correlated</a:t>
+            </a:r>
+          </a:p>
+        </p:txBody>
+      </p:sp>
+      <p:sp>
+        <p:nvSpPr>
+          <p:cNvPr id="4" name="TextBox 3"/>
+          <p:cNvSpPr txBox="1"/>
+          <p:nvPr/>
+        </p:nvSpPr>
+        <p:spPr>
+          <a:xfrm>
+            <a:off x="548640" y="1463040"/>
+            <a:ext cx="5029200" cy="4114800"/>
+          </a:xfrm>
+          <a:prstGeom prst="rect">
+            <a:avLst/>
+          </a:prstGeom>
+          <a:noFill/>
+        </p:spPr>
+        <p:txBody>
+          <a:bodyPr wrap="square">
+            <a:spAutoFit/>
+          </a:bodyPr>
+          <a:lstStyle/>
+          <a:p>
+            <a:pPr>
+              <a:spcAft>
+                <a:spcPts val="600"/>
+              </a:spcAft>
+              <a:defRPr sz="1200">
+                <a:solidFill>
+                  <a:srgbClr val="000000"/>
+                </a:solidFill>
+                <a:latin typeface="Calibri"/>
+              </a:defRPr>
+            </a:pPr>
+            <a:r>
+              <a:t>Pearson r = 0.605 (moderate concordance)</a:t>
+            </a:r>
+          </a:p>
+          <a:p>
+            <a:pPr>
+              <a:spcAft>
+                <a:spcPts val="600"/>
+              </a:spcAft>
+              <a:defRPr sz="1200">
+                <a:solidFill>
+                  <a:srgbClr val="000000"/>
+                </a:solidFill>
+                <a:latin typeface="Calibri"/>
+              </a:defRPr>
+            </a:pPr>
+            <a:r>
+              <a:t>Directional concordance = 99.5%</a:t>
+            </a:r>
+          </a:p>
+          <a:p>
+            <a:pPr>
+              <a:spcAft>
+                <a:spcPts val="600"/>
+              </a:spcAft>
+              <a:defRPr sz="1200">
+                <a:solidFill>
+                  <a:srgbClr val="000000"/>
+                </a:solidFill>
+                <a:latin typeface="Calibri"/>
+              </a:defRPr>
+            </a:pPr>
+          </a:p>
+          <a:p>
+            <a:pPr>
+              <a:spcAft>
+                <a:spcPts val="600"/>
+              </a:spcAft>
+              <a:defRPr sz="1200">
+                <a:solidFill>
+                  <a:srgbClr val="000000"/>
+                </a:solidFill>
+                <a:latin typeface="Calibri"/>
+              </a:defRPr>
+            </a:pPr>
+            <a:r>
+              <a:t>Lower r than iWAT -- why?</a:t>
+            </a:r>
+          </a:p>
+          <a:p>
+            <a:pPr>
+              <a:spcAft>
+                <a:spcPts val="600"/>
+              </a:spcAft>
+              <a:defRPr sz="1200">
+                <a:solidFill>
+                  <a:srgbClr val="000000"/>
+                </a:solidFill>
+                <a:latin typeface="Calibri"/>
+              </a:defRPr>
+            </a:pPr>
+            <a:r>
+              <a:t>  Visceral fat (gWAT) has more baseline sex dimorphism than</a:t>
+            </a:r>
+          </a:p>
+          <a:p>
+            <a:pPr>
+              <a:spcAft>
+                <a:spcPts val="600"/>
+              </a:spcAft>
+              <a:defRPr sz="1200">
+                <a:solidFill>
+                  <a:srgbClr val="000000"/>
+                </a:solidFill>
+                <a:latin typeface="Calibri"/>
+              </a:defRPr>
+            </a:pPr>
+            <a:r>
+              <a:t>  subcutaneous fat (iWAT). This is well-documented in the</a:t>
+            </a:r>
+          </a:p>
+          <a:p>
+            <a:pPr>
+              <a:spcAft>
+                <a:spcPts val="600"/>
+              </a:spcAft>
+              <a:defRPr sz="1200">
+                <a:solidFill>
+                  <a:srgbClr val="000000"/>
+                </a:solidFill>
+                <a:latin typeface="Calibri"/>
+              </a:defRPr>
+            </a:pPr>
+            <a:r>
+              <a:t>  adipose biology literature. Male and female gWAT differ</a:t>
+            </a:r>
+          </a:p>
+          <a:p>
+            <a:pPr>
+              <a:spcAft>
+                <a:spcPts val="600"/>
+              </a:spcAft>
+              <a:defRPr sz="1200">
+                <a:solidFill>
+                  <a:srgbClr val="000000"/>
+                </a:solidFill>
+                <a:latin typeface="Calibri"/>
+              </a:defRPr>
+            </a:pPr>
+            <a:r>
+              <a:t>  more at baseline, adding more noise to per-sex analyses.</a:t>
+            </a:r>
+          </a:p>
+          <a:p>
+            <a:pPr>
+              <a:spcAft>
+                <a:spcPts val="600"/>
+              </a:spcAft>
+              <a:defRPr sz="1200">
+                <a:solidFill>
+                  <a:srgbClr val="000000"/>
+                </a:solidFill>
+                <a:latin typeface="Calibri"/>
+              </a:defRPr>
+            </a:pPr>
+          </a:p>
+          <a:p>
+            <a:pPr>
+              <a:spcAft>
+                <a:spcPts val="600"/>
+              </a:spcAft>
+              <a:defRPr sz="1200">
+                <a:solidFill>
+                  <a:srgbClr val="000000"/>
+                </a:solidFill>
+                <a:latin typeface="Calibri"/>
+              </a:defRPr>
+            </a:pPr>
+            <a:r>
+              <a:t>BUT: 99.5% directional concordance is excellent!</a:t>
+            </a:r>
+          </a:p>
+          <a:p>
+            <a:pPr>
+              <a:spcAft>
+                <a:spcPts val="600"/>
+              </a:spcAft>
+              <a:defRPr sz="1200">
+                <a:solidFill>
+                  <a:srgbClr val="000000"/>
+                </a:solidFill>
+                <a:latin typeface="Calibri"/>
+              </a:defRPr>
+            </a:pPr>
+            <a:r>
+              <a:t>  Genes that go up in female gWAT also go up in male gWAT.</a:t>
+            </a:r>
+          </a:p>
+          <a:p>
+            <a:pPr>
+              <a:spcAft>
+                <a:spcPts val="600"/>
+              </a:spcAft>
+              <a:defRPr sz="1200">
+                <a:solidFill>
+                  <a:srgbClr val="000000"/>
+                </a:solidFill>
+                <a:latin typeface="Calibri"/>
+              </a:defRPr>
+            </a:pPr>
+            <a:r>
+              <a:t>  The DIRECTION of KD effects is almost perfectly consistent.</a:t>
+            </a:r>
+          </a:p>
+          <a:p>
+            <a:pPr>
+              <a:spcAft>
+                <a:spcPts val="600"/>
+              </a:spcAft>
+              <a:defRPr sz="1200">
+                <a:solidFill>
+                  <a:srgbClr val="000000"/>
+                </a:solidFill>
+                <a:latin typeface="Calibri"/>
+              </a:defRPr>
+            </a:pPr>
+          </a:p>
+          <a:p>
+            <a:pPr>
+              <a:spcAft>
+                <a:spcPts val="600"/>
+              </a:spcAft>
+              <a:defRPr sz="1200">
+                <a:solidFill>
+                  <a:srgbClr val="000000"/>
+                </a:solidFill>
+                <a:latin typeface="Calibri"/>
+              </a:defRPr>
+            </a:pPr>
+            <a:r>
+              <a:t>The lower r mostly reflects MAGNITUDE differences:</a:t>
+            </a:r>
+          </a:p>
+          <a:p>
+            <a:pPr>
+              <a:spcAft>
+                <a:spcPts val="600"/>
+              </a:spcAft>
+              <a:defRPr sz="1200">
+                <a:solidFill>
+                  <a:srgbClr val="000000"/>
+                </a:solidFill>
+                <a:latin typeface="Calibri"/>
+              </a:defRPr>
+            </a:pPr>
+            <a:r>
+              <a:t>  e.g., gene goes up 2-fold in F but 3-fold in M.</a:t>
+            </a:r>
+          </a:p>
+          <a:p>
+            <a:pPr>
+              <a:spcAft>
+                <a:spcPts val="600"/>
+              </a:spcAft>
+              <a:defRPr sz="1200">
+                <a:solidFill>
+                  <a:srgbClr val="000000"/>
+                </a:solidFill>
+                <a:latin typeface="Calibri"/>
+              </a:defRPr>
+            </a:pPr>
+            <a:r>
+              <a:t>  This is normal biological variation, not a problem.</a:t>
+            </a:r>
+          </a:p>
+          <a:p>
+            <a:pPr>
+              <a:spcAft>
+                <a:spcPts val="600"/>
+              </a:spcAft>
+              <a:defRPr sz="1200">
+                <a:solidFill>
+                  <a:srgbClr val="000000"/>
+                </a:solidFill>
+                <a:latin typeface="Calibri"/>
+              </a:defRPr>
+            </a:pPr>
+            <a:r>
+              <a:t>  Including sex as a covariate handles this optimally.</a:t>
+            </a:r>
+          </a:p>
+        </p:txBody>
+      </p:sp>
+      <p:sp>
+        <p:nvSpPr>
+          <p:cNvPr id="5" name="Rectangle 4"/>
+          <p:cNvSpPr/>
+          <p:nvPr/>
+        </p:nvSpPr>
+        <p:spPr>
+          <a:xfrm>
+            <a:off x="5943600" y="1371600"/>
+            <a:ext cx="5486400" cy="4572000"/>
+          </a:xfrm>
+          <a:prstGeom prst="rect">
+            <a:avLst/>
+          </a:prstGeom>
+          <a:solidFill>
+            <a:srgbClr val="F2F2F2"/>
+          </a:solidFill>
+          <a:ln w="19050">
+            <a:solidFill>
+              <a:srgbClr val="999999"/>
+            </a:solidFill>
+            <a:prstDash val="sysDash"/>
+          </a:ln>
+        </p:spPr>
+        <p:style>
+          <a:lnRef idx="1">
+            <a:schemeClr val="accent1"/>
+          </a:lnRef>
+          <a:fillRef idx="3">
+            <a:schemeClr val="accent1"/>
+          </a:fillRef>
+          <a:effectRef idx="2">
+            <a:schemeClr val="accent1"/>
+          </a:effectRef>
+          <a:fontRef idx="minor">
+            <a:schemeClr val="lt1"/>
+          </a:fontRef>
+        </p:style>
+        <p:txBody>
+          <a:bodyPr rtlCol="0" anchor="ctr" wrap="square"/>
+          <a:lstStyle/>
+          <a:p>
+            <a:pPr algn="ctr">
+              <a:defRPr sz="1400" b="1">
+                <a:solidFill>
+                  <a:srgbClr val="666666"/>
+                </a:solidFill>
+              </a:defRPr>
+            </a:pPr>
+            <a:r>
+              <a:t>INSERT PLOT</a:t>
+            </a:r>
+          </a:p>
+          <a:p>
+            <a:pPr algn="ctr">
+              <a:defRPr sz="1100" i="1">
+                <a:solidFill>
+                  <a:srgbClr val="666666"/>
+                </a:solidFill>
+              </a:defRPr>
+            </a:pPr>
+            <a:r>
+              <a:t>sex_concordance_scatter_gWAT_&lt;run_tag&gt;.png</a:t>
+            </a:r>
+          </a:p>
+        </p:txBody>
+      </p:sp>
+    </p:spTree>
+  </p:cSld>
+  <p:clrMapOvr>
+    <a:masterClrMapping/>
+  </p:clrMapOvr>
+</p:sld>
+</file>
+
+<file path=ppt/slides/slide16.xml><?xml version="1.0" encoding="utf-8"?>
+<p:sld xmlns:a="http://schemas.openxmlformats.org/drawingml/2006/main" xmlns:p="http://schemas.openxmlformats.org/presentationml/2006/main" xmlns:r="http://schemas.openxmlformats.org/officeDocument/2006/relationships">
+  <p:cSld>
+    <p:spTree>
+      <p:nvGrpSpPr>
+        <p:cNvPr id="1" name=""/>
+        <p:cNvGrpSpPr/>
+        <p:nvPr/>
+      </p:nvGrpSpPr>
+      <p:grpSpPr/>
+      <p:sp>
+        <p:nvSpPr>
+          <p:cNvPr id="2" name="TextBox 1"/>
+          <p:cNvSpPr txBox="1"/>
+          <p:nvPr/>
+        </p:nvSpPr>
+        <p:spPr>
+          <a:xfrm>
+            <a:off x="548640" y="274320"/>
+            <a:ext cx="10972800" cy="548640"/>
+          </a:xfrm>
+          <a:prstGeom prst="rect">
+            <a:avLst/>
+          </a:prstGeom>
+          <a:noFill/>
+        </p:spPr>
+        <p:txBody>
+          <a:bodyPr wrap="square">
+            <a:spAutoFit/>
+          </a:bodyPr>
+          <a:lstStyle/>
+          <a:p>
+            <a:pPr algn="l">
+              <a:defRPr sz="2800" b="1">
+                <a:solidFill>
+                  <a:srgbClr val="1B3A5C"/>
+                </a:solidFill>
+                <a:latin typeface="Calibri"/>
+              </a:defRPr>
+            </a:pPr>
+            <a:r>
               <a:t>PCA by Sex and Genotype</a:t>
             </a:r>
           </a:p>
@@ -3665,7 +5745,7 @@
               <a:spcAft>
                 <a:spcPts val="600"/>
               </a:spcAft>
-              <a:defRPr sz="1400">
+              <a:defRPr sz="1300">
                 <a:solidFill>
                   <a:srgbClr val="000000"/>
                 </a:solidFill>
@@ -3681,20 +5761,20 @@
               <a:spcAft>
                 <a:spcPts val="600"/>
               </a:spcAft>
-              <a:defRPr sz="1400">
-                <a:solidFill>
-                  <a:srgbClr val="000000"/>
-                </a:solidFill>
-                <a:latin typeface="Calibri"/>
-              </a:defRPr>
-            </a:pPr>
-          </a:p>
-          <a:p>
-            <a:pPr>
-              <a:spcAft>
-                <a:spcPts val="600"/>
-              </a:spcAft>
-              <a:defRPr sz="1400">
+              <a:defRPr sz="1300">
+                <a:solidFill>
+                  <a:srgbClr val="000000"/>
+                </a:solidFill>
+                <a:latin typeface="Calibri"/>
+              </a:defRPr>
+            </a:pPr>
+          </a:p>
+          <a:p>
+            <a:pPr>
+              <a:spcAft>
+                <a:spcPts val="600"/>
+              </a:spcAft>
+              <a:defRPr sz="1300">
                 <a:solidFill>
                   <a:srgbClr val="000000"/>
                 </a:solidFill>
@@ -3710,7 +5790,7 @@
               <a:spcAft>
                 <a:spcPts val="600"/>
               </a:spcAft>
-              <a:defRPr sz="1400">
+              <a:defRPr sz="1300">
                 <a:solidFill>
                   <a:srgbClr val="000000"/>
                 </a:solidFill>
@@ -3726,7 +5806,7 @@
               <a:spcAft>
                 <a:spcPts val="600"/>
               </a:spcAft>
-              <a:defRPr sz="1400">
+              <a:defRPr sz="1300">
                 <a:solidFill>
                   <a:srgbClr val="000000"/>
                 </a:solidFill>
@@ -3742,20 +5822,20 @@
               <a:spcAft>
                 <a:spcPts val="600"/>
               </a:spcAft>
-              <a:defRPr sz="1400">
-                <a:solidFill>
-                  <a:srgbClr val="000000"/>
-                </a:solidFill>
-                <a:latin typeface="Calibri"/>
-              </a:defRPr>
-            </a:pPr>
-          </a:p>
-          <a:p>
-            <a:pPr>
-              <a:spcAft>
-                <a:spcPts val="600"/>
-              </a:spcAft>
-              <a:defRPr sz="1400">
+              <a:defRPr sz="1300">
+                <a:solidFill>
+                  <a:srgbClr val="000000"/>
+                </a:solidFill>
+                <a:latin typeface="Calibri"/>
+              </a:defRPr>
+            </a:pPr>
+          </a:p>
+          <a:p>
+            <a:pPr>
+              <a:spcAft>
+                <a:spcPts val="600"/>
+              </a:spcAft>
+              <a:defRPr sz="1300">
                 <a:solidFill>
                   <a:srgbClr val="000000"/>
                 </a:solidFill>
@@ -3771,7 +5851,7 @@
               <a:spcAft>
                 <a:spcPts val="600"/>
               </a:spcAft>
-              <a:defRPr sz="1400">
+              <a:defRPr sz="1300">
                 <a:solidFill>
                   <a:srgbClr val="000000"/>
                 </a:solidFill>
@@ -3787,36 +5867,36 @@
               <a:spcAft>
                 <a:spcPts val="600"/>
               </a:spcAft>
-              <a:defRPr sz="1400">
-                <a:solidFill>
-                  <a:srgbClr val="000000"/>
-                </a:solidFill>
-                <a:latin typeface="Calibri"/>
-              </a:defRPr>
-            </a:pPr>
-            <a:r>
-              <a:t>  -&gt; sexes are transcriptionally similar</a:t>
-            </a:r>
-          </a:p>
-          <a:p>
-            <a:pPr>
-              <a:spcAft>
-                <a:spcPts val="600"/>
-              </a:spcAft>
-              <a:defRPr sz="1400">
-                <a:solidFill>
-                  <a:srgbClr val="000000"/>
-                </a:solidFill>
-                <a:latin typeface="Calibri"/>
-              </a:defRPr>
-            </a:pPr>
-          </a:p>
-          <a:p>
-            <a:pPr>
-              <a:spcAft>
-                <a:spcPts val="600"/>
-              </a:spcAft>
-              <a:defRPr sz="1400">
+              <a:defRPr sz="1300">
+                <a:solidFill>
+                  <a:srgbClr val="000000"/>
+                </a:solidFill>
+                <a:latin typeface="Calibri"/>
+              </a:defRPr>
+            </a:pPr>
+            <a:r>
+              <a:t>  -&gt; sexes are transcriptionally similar (GOOD)</a:t>
+            </a:r>
+          </a:p>
+          <a:p>
+            <a:pPr>
+              <a:spcAft>
+                <a:spcPts val="600"/>
+              </a:spcAft>
+              <a:defRPr sz="1300">
+                <a:solidFill>
+                  <a:srgbClr val="000000"/>
+                </a:solidFill>
+                <a:latin typeface="Calibri"/>
+              </a:defRPr>
+            </a:pPr>
+          </a:p>
+          <a:p>
+            <a:pPr>
+              <a:spcAft>
+                <a:spcPts val="600"/>
+              </a:spcAft>
+              <a:defRPr sz="1300">
                 <a:solidFill>
                   <a:srgbClr val="000000"/>
                 </a:solidFill>
@@ -3832,44 +5912,108 @@
               <a:spcAft>
                 <a:spcPts val="600"/>
               </a:spcAft>
-              <a:defRPr sz="1400">
-                <a:solidFill>
-                  <a:srgbClr val="000000"/>
-                </a:solidFill>
-                <a:latin typeface="Calibri"/>
-              </a:defRPr>
-            </a:pPr>
-            <a:r>
-              <a:t>  -&gt; sex differences dominate over KD effects</a:t>
-            </a:r>
-          </a:p>
-          <a:p>
-            <a:pPr>
-              <a:spcAft>
-                <a:spcPts val="600"/>
-              </a:spcAft>
-              <a:defRPr sz="1400">
-                <a:solidFill>
-                  <a:srgbClr val="000000"/>
-                </a:solidFill>
-                <a:latin typeface="Calibri"/>
-              </a:defRPr>
-            </a:pPr>
-          </a:p>
-          <a:p>
-            <a:pPr>
-              <a:spcAft>
-                <a:spcPts val="600"/>
-              </a:spcAft>
-              <a:defRPr sz="1400">
-                <a:solidFill>
-                  <a:srgbClr val="000000"/>
-                </a:solidFill>
-                <a:latin typeface="Calibri"/>
-              </a:defRPr>
-            </a:pPr>
-            <a:r>
-              <a:t>Expected: genotype drives separation more than sex</a:t>
+              <a:defRPr sz="1300">
+                <a:solidFill>
+                  <a:srgbClr val="000000"/>
+                </a:solidFill>
+                <a:latin typeface="Calibri"/>
+              </a:defRPr>
+            </a:pPr>
+            <a:r>
+              <a:t>  -&gt; sex differences dominate (PROBLEMATIC)</a:t>
+            </a:r>
+          </a:p>
+          <a:p>
+            <a:pPr>
+              <a:spcAft>
+                <a:spcPts val="600"/>
+              </a:spcAft>
+              <a:defRPr sz="1300">
+                <a:solidFill>
+                  <a:srgbClr val="000000"/>
+                </a:solidFill>
+                <a:latin typeface="Calibri"/>
+              </a:defRPr>
+            </a:pPr>
+          </a:p>
+          <a:p>
+            <a:pPr>
+              <a:spcAft>
+                <a:spcPts val="600"/>
+              </a:spcAft>
+              <a:defRPr sz="1300">
+                <a:solidFill>
+                  <a:srgbClr val="000000"/>
+                </a:solidFill>
+                <a:latin typeface="Calibri"/>
+              </a:defRPr>
+            </a:pPr>
+            <a:r>
+              <a:t>What we see: genotype drives separation more than sex,</a:t>
+            </a:r>
+          </a:p>
+          <a:p>
+            <a:pPr>
+              <a:spcAft>
+                <a:spcPts val="600"/>
+              </a:spcAft>
+              <a:defRPr sz="1300">
+                <a:solidFill>
+                  <a:srgbClr val="000000"/>
+                </a:solidFill>
+                <a:latin typeface="Calibri"/>
+              </a:defRPr>
+            </a:pPr>
+            <a:r>
+              <a:t>but male KD samples tend to be slightly more extreme</a:t>
+            </a:r>
+          </a:p>
+          <a:p>
+            <a:pPr>
+              <a:spcAft>
+                <a:spcPts val="600"/>
+              </a:spcAft>
+              <a:defRPr sz="1300">
+                <a:solidFill>
+                  <a:srgbClr val="000000"/>
+                </a:solidFill>
+                <a:latin typeface="Calibri"/>
+              </a:defRPr>
+            </a:pPr>
+            <a:r>
+              <a:t>(further from controls) than female KD samples,</a:t>
+            </a:r>
+          </a:p>
+          <a:p>
+            <a:pPr>
+              <a:spcAft>
+                <a:spcPts val="600"/>
+              </a:spcAft>
+              <a:defRPr sz="1300">
+                <a:solidFill>
+                  <a:srgbClr val="000000"/>
+                </a:solidFill>
+                <a:latin typeface="Calibri"/>
+              </a:defRPr>
+            </a:pPr>
+            <a:r>
+              <a:t>especially in iWAT. This is expected and handled</a:t>
+            </a:r>
+          </a:p>
+          <a:p>
+            <a:pPr>
+              <a:spcAft>
+                <a:spcPts val="600"/>
+              </a:spcAft>
+              <a:defRPr sz="1300">
+                <a:solidFill>
+                  <a:srgbClr val="000000"/>
+                </a:solidFill>
+                <a:latin typeface="Calibri"/>
+              </a:defRPr>
+            </a:pPr>
+            <a:r>
+              <a:t>by the sex covariate in our model.</a:t>
             </a:r>
           </a:p>
         </p:txBody>
@@ -3949,7 +6093,7 @@
 </p:sld>
 </file>
 
-<file path=ppt/slides/slide12.xml><?xml version="1.0" encoding="utf-8"?>
+<file path=ppt/slides/slide17.xml><?xml version="1.0" encoding="utf-8"?>
 <p:sld xmlns:a="http://schemas.openxmlformats.org/drawingml/2006/main" xmlns:p="http://schemas.openxmlformats.org/presentationml/2006/main" xmlns:r="http://schemas.openxmlformats.org/officeDocument/2006/relationships">
   <p:cSld>
     <p:spTree>
@@ -4021,198 +6165,275 @@
               <a:spcAft>
                 <a:spcPts val="600"/>
               </a:spcAft>
-              <a:defRPr sz="1400">
-                <a:solidFill>
-                  <a:srgbClr val="000000"/>
-                </a:solidFill>
-                <a:latin typeface="Calibri"/>
-              </a:defRPr>
-            </a:pPr>
-            <a:r>
-              <a:t>X-axis = Genotype main effect log2FC (KD vs CTL)</a:t>
-            </a:r>
-          </a:p>
-          <a:p>
-            <a:pPr>
-              <a:spcAft>
-                <a:spcPts val="600"/>
-              </a:spcAft>
-              <a:defRPr sz="1400">
-                <a:solidFill>
-                  <a:srgbClr val="000000"/>
-                </a:solidFill>
-                <a:latin typeface="Calibri"/>
-              </a:defRPr>
-            </a:pPr>
-            <a:r>
-              <a:t>Y-axis = Interaction log2FC (sex-dependent component)</a:t>
-            </a:r>
-          </a:p>
-          <a:p>
-            <a:pPr>
-              <a:spcAft>
-                <a:spcPts val="600"/>
-              </a:spcAft>
-              <a:defRPr sz="1400">
-                <a:solidFill>
-                  <a:srgbClr val="000000"/>
-                </a:solidFill>
-                <a:latin typeface="Calibri"/>
-              </a:defRPr>
-            </a:pPr>
-          </a:p>
-          <a:p>
-            <a:pPr>
-              <a:spcAft>
-                <a:spcPts val="600"/>
-              </a:spcAft>
-              <a:defRPr sz="1400">
-                <a:solidFill>
-                  <a:srgbClr val="000000"/>
-                </a:solidFill>
-                <a:latin typeface="Calibri"/>
-              </a:defRPr>
-            </a:pPr>
-            <a:r>
-              <a:t>Red dots: significant interaction genes</a:t>
-            </a:r>
-          </a:p>
-          <a:p>
-            <a:pPr>
-              <a:spcAft>
-                <a:spcPts val="600"/>
-              </a:spcAft>
-              <a:defRPr sz="1400">
-                <a:solidFill>
-                  <a:srgbClr val="000000"/>
-                </a:solidFill>
-                <a:latin typeface="Calibri"/>
-              </a:defRPr>
-            </a:pPr>
-            <a:r>
-              <a:t>Blue dots: significant genotype DEGs (no interaction)</a:t>
-            </a:r>
-          </a:p>
-          <a:p>
-            <a:pPr>
-              <a:spcAft>
-                <a:spcPts val="600"/>
-              </a:spcAft>
-              <a:defRPr sz="1400">
-                <a:solidFill>
-                  <a:srgbClr val="000000"/>
-                </a:solidFill>
-                <a:latin typeface="Calibri"/>
-              </a:defRPr>
-            </a:pPr>
-            <a:r>
-              <a:t>Grey dots: neither significant</a:t>
-            </a:r>
-          </a:p>
-          <a:p>
-            <a:pPr>
-              <a:spcAft>
-                <a:spcPts val="600"/>
-              </a:spcAft>
-              <a:defRPr sz="1400">
-                <a:solidFill>
-                  <a:srgbClr val="000000"/>
-                </a:solidFill>
-                <a:latin typeface="Calibri"/>
-              </a:defRPr>
-            </a:pPr>
-          </a:p>
-          <a:p>
-            <a:pPr>
-              <a:spcAft>
-                <a:spcPts val="600"/>
-              </a:spcAft>
-              <a:defRPr sz="1400">
-                <a:solidFill>
-                  <a:srgbClr val="000000"/>
-                </a:solidFill>
-                <a:latin typeface="Calibri"/>
-              </a:defRPr>
-            </a:pPr>
-            <a:r>
-              <a:t>What to look for:</a:t>
-            </a:r>
-          </a:p>
-          <a:p>
-            <a:pPr>
-              <a:spcAft>
-                <a:spcPts val="600"/>
-              </a:spcAft>
-              <a:defRPr sz="1400">
-                <a:solidFill>
-                  <a:srgbClr val="000000"/>
-                </a:solidFill>
-                <a:latin typeface="Calibri"/>
-              </a:defRPr>
-            </a:pPr>
-            <a:r>
-              <a:t>  Most dots clustered near y = 0 means the interaction</a:t>
-            </a:r>
-          </a:p>
-          <a:p>
-            <a:pPr>
-              <a:spcAft>
-                <a:spcPts val="600"/>
-              </a:spcAft>
-              <a:defRPr sz="1400">
-                <a:solidFill>
-                  <a:srgbClr val="000000"/>
-                </a:solidFill>
-                <a:latin typeface="Calibri"/>
-              </a:defRPr>
-            </a:pPr>
-            <a:r>
-              <a:t>  effect is small relative to the genotype effect.</a:t>
-            </a:r>
-          </a:p>
-          <a:p>
-            <a:pPr>
-              <a:spcAft>
-                <a:spcPts val="600"/>
-              </a:spcAft>
-              <a:defRPr sz="1400">
-                <a:solidFill>
-                  <a:srgbClr val="000000"/>
-                </a:solidFill>
-                <a:latin typeface="Calibri"/>
-              </a:defRPr>
-            </a:pPr>
-          </a:p>
-          <a:p>
-            <a:pPr>
-              <a:spcAft>
-                <a:spcPts val="600"/>
-              </a:spcAft>
-              <a:defRPr sz="1400">
-                <a:solidFill>
-                  <a:srgbClr val="000000"/>
-                </a:solidFill>
-                <a:latin typeface="Calibri"/>
-              </a:defRPr>
-            </a:pPr>
-            <a:r>
-              <a:t>  The horizontal spread (x-axis) &gt;&gt; vertical spread (y-axis)</a:t>
-            </a:r>
-          </a:p>
-          <a:p>
-            <a:pPr>
-              <a:spcAft>
-                <a:spcPts val="600"/>
-              </a:spcAft>
-              <a:defRPr sz="1400">
-                <a:solidFill>
-                  <a:srgbClr val="000000"/>
-                </a:solidFill>
-                <a:latin typeface="Calibri"/>
-              </a:defRPr>
-            </a:pPr>
-            <a:r>
-              <a:t>  confirms that KD drives expression, not sex x KD.</a:t>
+              <a:defRPr sz="1300">
+                <a:solidFill>
+                  <a:srgbClr val="000000"/>
+                </a:solidFill>
+                <a:latin typeface="Calibri"/>
+              </a:defRPr>
+            </a:pPr>
+            <a:r>
+              <a:t>This plot directly compares two effects for every gene:</a:t>
+            </a:r>
+          </a:p>
+          <a:p>
+            <a:pPr>
+              <a:spcAft>
+                <a:spcPts val="600"/>
+              </a:spcAft>
+              <a:defRPr sz="1300">
+                <a:solidFill>
+                  <a:srgbClr val="000000"/>
+                </a:solidFill>
+                <a:latin typeface="Calibri"/>
+              </a:defRPr>
+            </a:pPr>
+          </a:p>
+          <a:p>
+            <a:pPr>
+              <a:spcAft>
+                <a:spcPts val="600"/>
+              </a:spcAft>
+              <a:defRPr sz="1300">
+                <a:solidFill>
+                  <a:srgbClr val="000000"/>
+                </a:solidFill>
+                <a:latin typeface="Calibri"/>
+              </a:defRPr>
+            </a:pPr>
+            <a:r>
+              <a:t>X-axis = Genotype main effect log2FC (how much KD changes the gene)</a:t>
+            </a:r>
+          </a:p>
+          <a:p>
+            <a:pPr>
+              <a:spcAft>
+                <a:spcPts val="600"/>
+              </a:spcAft>
+              <a:defRPr sz="1300">
+                <a:solidFill>
+                  <a:srgbClr val="000000"/>
+                </a:solidFill>
+                <a:latin typeface="Calibri"/>
+              </a:defRPr>
+            </a:pPr>
+            <a:r>
+              <a:t>Y-axis = Interaction log2FC (how much the KD effect DIFFERS by sex)</a:t>
+            </a:r>
+          </a:p>
+          <a:p>
+            <a:pPr>
+              <a:spcAft>
+                <a:spcPts val="600"/>
+              </a:spcAft>
+              <a:defRPr sz="1300">
+                <a:solidFill>
+                  <a:srgbClr val="000000"/>
+                </a:solidFill>
+                <a:latin typeface="Calibri"/>
+              </a:defRPr>
+            </a:pPr>
+          </a:p>
+          <a:p>
+            <a:pPr>
+              <a:spcAft>
+                <a:spcPts val="600"/>
+              </a:spcAft>
+              <a:defRPr sz="1300">
+                <a:solidFill>
+                  <a:srgbClr val="000000"/>
+                </a:solidFill>
+                <a:latin typeface="Calibri"/>
+              </a:defRPr>
+            </a:pPr>
+            <a:r>
+              <a:t>  Red dots: significant interaction genes</a:t>
+            </a:r>
+          </a:p>
+          <a:p>
+            <a:pPr>
+              <a:spcAft>
+                <a:spcPts val="600"/>
+              </a:spcAft>
+              <a:defRPr sz="1300">
+                <a:solidFill>
+                  <a:srgbClr val="000000"/>
+                </a:solidFill>
+                <a:latin typeface="Calibri"/>
+              </a:defRPr>
+            </a:pPr>
+            <a:r>
+              <a:t>  Blue dots: significant genotype DEGs (no interaction)</a:t>
+            </a:r>
+          </a:p>
+          <a:p>
+            <a:pPr>
+              <a:spcAft>
+                <a:spcPts val="600"/>
+              </a:spcAft>
+              <a:defRPr sz="1300">
+                <a:solidFill>
+                  <a:srgbClr val="000000"/>
+                </a:solidFill>
+                <a:latin typeface="Calibri"/>
+              </a:defRPr>
+            </a:pPr>
+            <a:r>
+              <a:t>  Grey dots: neither significant</a:t>
+            </a:r>
+          </a:p>
+          <a:p>
+            <a:pPr>
+              <a:spcAft>
+                <a:spcPts val="600"/>
+              </a:spcAft>
+              <a:defRPr sz="1300">
+                <a:solidFill>
+                  <a:srgbClr val="000000"/>
+                </a:solidFill>
+                <a:latin typeface="Calibri"/>
+              </a:defRPr>
+            </a:pPr>
+          </a:p>
+          <a:p>
+            <a:pPr>
+              <a:spcAft>
+                <a:spcPts val="600"/>
+              </a:spcAft>
+              <a:defRPr sz="1300">
+                <a:solidFill>
+                  <a:srgbClr val="000000"/>
+                </a:solidFill>
+                <a:latin typeface="Calibri"/>
+              </a:defRPr>
+            </a:pPr>
+            <a:r>
+              <a:t>What we want to see:</a:t>
+            </a:r>
+          </a:p>
+          <a:p>
+            <a:pPr>
+              <a:spcAft>
+                <a:spcPts val="600"/>
+              </a:spcAft>
+              <a:defRPr sz="1300">
+                <a:solidFill>
+                  <a:srgbClr val="000000"/>
+                </a:solidFill>
+                <a:latin typeface="Calibri"/>
+              </a:defRPr>
+            </a:pPr>
+            <a:r>
+              <a:t>  Wide horizontal spread (big genotype effects)</a:t>
+            </a:r>
+          </a:p>
+          <a:p>
+            <a:pPr>
+              <a:spcAft>
+                <a:spcPts val="600"/>
+              </a:spcAft>
+              <a:defRPr sz="1300">
+                <a:solidFill>
+                  <a:srgbClr val="000000"/>
+                </a:solidFill>
+                <a:latin typeface="Calibri"/>
+              </a:defRPr>
+            </a:pPr>
+            <a:r>
+              <a:t>  Narrow vertical spread (small interaction effects)</a:t>
+            </a:r>
+          </a:p>
+          <a:p>
+            <a:pPr>
+              <a:spcAft>
+                <a:spcPts val="600"/>
+              </a:spcAft>
+              <a:defRPr sz="1300">
+                <a:solidFill>
+                  <a:srgbClr val="000000"/>
+                </a:solidFill>
+                <a:latin typeface="Calibri"/>
+              </a:defRPr>
+            </a:pPr>
+            <a:r>
+              <a:t>  = the KD signal is MUCH bigger than any sex-dependent variation</a:t>
+            </a:r>
+          </a:p>
+          <a:p>
+            <a:pPr>
+              <a:spcAft>
+                <a:spcPts val="600"/>
+              </a:spcAft>
+              <a:defRPr sz="1300">
+                <a:solidFill>
+                  <a:srgbClr val="000000"/>
+                </a:solidFill>
+                <a:latin typeface="Calibri"/>
+              </a:defRPr>
+            </a:pPr>
+          </a:p>
+          <a:p>
+            <a:pPr>
+              <a:spcAft>
+                <a:spcPts val="600"/>
+              </a:spcAft>
+              <a:defRPr sz="1300">
+                <a:solidFill>
+                  <a:srgbClr val="000000"/>
+                </a:solidFill>
+                <a:latin typeface="Calibri"/>
+              </a:defRPr>
+            </a:pPr>
+            <a:r>
+              <a:t>What we actually see:</a:t>
+            </a:r>
+          </a:p>
+          <a:p>
+            <a:pPr>
+              <a:spcAft>
+                <a:spcPts val="600"/>
+              </a:spcAft>
+              <a:defRPr sz="1300">
+                <a:solidFill>
+                  <a:srgbClr val="000000"/>
+                </a:solidFill>
+                <a:latin typeface="Calibri"/>
+              </a:defRPr>
+            </a:pPr>
+            <a:r>
+              <a:t>  Horizontal spread &gt;&gt; vertical spread</a:t>
+            </a:r>
+          </a:p>
+          <a:p>
+            <a:pPr>
+              <a:spcAft>
+                <a:spcPts val="600"/>
+              </a:spcAft>
+              <a:defRPr sz="1300">
+                <a:solidFill>
+                  <a:srgbClr val="000000"/>
+                </a:solidFill>
+                <a:latin typeface="Calibri"/>
+              </a:defRPr>
+            </a:pPr>
+            <a:r>
+              <a:t>  Most dots cluster near y = 0 (no interaction)</a:t>
+            </a:r>
+          </a:p>
+          <a:p>
+            <a:pPr>
+              <a:spcAft>
+                <a:spcPts val="600"/>
+              </a:spcAft>
+              <a:defRPr sz="1300">
+                <a:solidFill>
+                  <a:srgbClr val="000000"/>
+                </a:solidFill>
+                <a:latin typeface="Calibri"/>
+              </a:defRPr>
+            </a:pPr>
+            <a:r>
+              <a:t>  -&gt; CONFIRMS: genotype effect dominates</a:t>
             </a:r>
           </a:p>
         </p:txBody>
@@ -4292,9 +6513,17 @@
 </p:sld>
 </file>
 
-<file path=ppt/slides/slide13.xml><?xml version="1.0" encoding="utf-8"?>
+<file path=ppt/slides/slide18.xml><?xml version="1.0" encoding="utf-8"?>
 <p:sld xmlns:a="http://schemas.openxmlformats.org/drawingml/2006/main" xmlns:p="http://schemas.openxmlformats.org/presentationml/2006/main" xmlns:r="http://schemas.openxmlformats.org/officeDocument/2006/relationships">
   <p:cSld>
+    <p:bg>
+      <p:bgPr>
+        <a:solidFill>
+          <a:srgbClr val="E8F8F5"/>
+        </a:solidFill>
+        <a:effectLst/>
+      </p:bgPr>
+    </p:bg>
     <p:spTree>
       <p:nvGrpSpPr>
         <p:cNvPr id="1" name=""/>
@@ -4333,7 +6562,7 @@
               </a:defRPr>
             </a:pPr>
             <a:r>
-              <a:t>Interaction Gene Pathways (ORA)</a:t>
+              <a:t>Per-Depot Models: ~ Genotype vs. ~ Sex + Genotype</a:t>
             </a:r>
           </a:p>
         </p:txBody>
@@ -4369,365 +6598,22 @@
               </a:defRPr>
             </a:pPr>
             <a:r>
-              <a:t>Over-representation analysis on genes with significant Sex x Genotype interaction</a:t>
-            </a:r>
-          </a:p>
-        </p:txBody>
-      </p:sp>
-      <p:sp>
-        <p:nvSpPr>
-          <p:cNvPr id="4" name="TextBox 3"/>
-          <p:cNvSpPr txBox="1"/>
-          <p:nvPr/>
-        </p:nvSpPr>
-        <p:spPr>
-          <a:xfrm>
-            <a:off x="548640" y="1463040"/>
-            <a:ext cx="5029200" cy="4572000"/>
-          </a:xfrm>
-          <a:prstGeom prst="rect">
-            <a:avLst/>
-          </a:prstGeom>
-          <a:noFill/>
-        </p:spPr>
-        <p:txBody>
-          <a:bodyPr wrap="square">
-            <a:spAutoFit/>
-          </a:bodyPr>
-          <a:lstStyle/>
-          <a:p>
-            <a:pPr>
-              <a:spcAft>
-                <a:spcPts val="600"/>
-              </a:spcAft>
-              <a:defRPr sz="1300">
-                <a:solidFill>
-                  <a:srgbClr val="000000"/>
-                </a:solidFill>
-                <a:latin typeface="Calibri"/>
-              </a:defRPr>
-            </a:pPr>
-            <a:r>
-              <a:t>For each depot, the significant interaction genes were tested</a:t>
-            </a:r>
-          </a:p>
-          <a:p>
-            <a:pPr>
-              <a:spcAft>
-                <a:spcPts val="600"/>
-              </a:spcAft>
-              <a:defRPr sz="1300">
-                <a:solidFill>
-                  <a:srgbClr val="000000"/>
-                </a:solidFill>
-                <a:latin typeface="Calibri"/>
-              </a:defRPr>
-            </a:pPr>
-            <a:r>
-              <a:t>for enrichment in GO:BP and KEGG pathways.</a:t>
-            </a:r>
-          </a:p>
-          <a:p>
-            <a:pPr>
-              <a:spcAft>
-                <a:spcPts val="600"/>
-              </a:spcAft>
-              <a:defRPr sz="1300">
-                <a:solidFill>
-                  <a:srgbClr val="000000"/>
-                </a:solidFill>
-                <a:latin typeface="Calibri"/>
-              </a:defRPr>
-            </a:pPr>
-          </a:p>
-          <a:p>
-            <a:pPr>
-              <a:spcAft>
-                <a:spcPts val="600"/>
-              </a:spcAft>
-              <a:defRPr sz="1300">
-                <a:solidFill>
-                  <a:srgbClr val="000000"/>
-                </a:solidFill>
-                <a:latin typeface="Calibri"/>
-              </a:defRPr>
-            </a:pPr>
-            <a:r>
-              <a:t>This tells us WHICH biological processes have sex-dependent</a:t>
-            </a:r>
-          </a:p>
-          <a:p>
-            <a:pPr>
-              <a:spcAft>
-                <a:spcPts val="600"/>
-              </a:spcAft>
-              <a:defRPr sz="1300">
-                <a:solidFill>
-                  <a:srgbClr val="000000"/>
-                </a:solidFill>
-                <a:latin typeface="Calibri"/>
-              </a:defRPr>
-            </a:pPr>
-            <a:r>
-              <a:t>KAT8-KD responses (even though most genes do not).</a:t>
-            </a:r>
-          </a:p>
-          <a:p>
-            <a:pPr>
-              <a:spcAft>
-                <a:spcPts val="600"/>
-              </a:spcAft>
-              <a:defRPr sz="1300">
-                <a:solidFill>
-                  <a:srgbClr val="000000"/>
-                </a:solidFill>
-                <a:latin typeface="Calibri"/>
-              </a:defRPr>
-            </a:pPr>
-          </a:p>
-          <a:p>
-            <a:pPr>
-              <a:spcAft>
-                <a:spcPts val="600"/>
-              </a:spcAft>
-              <a:defRPr sz="1300">
-                <a:solidFill>
-                  <a:srgbClr val="000000"/>
-                </a:solidFill>
-                <a:latin typeface="Calibri"/>
-              </a:defRPr>
-            </a:pPr>
-            <a:r>
-              <a:t>Method: clusterProfiler enrichGO / enrichKEGG</a:t>
-            </a:r>
-          </a:p>
-          <a:p>
-            <a:pPr>
-              <a:spcAft>
-                <a:spcPts val="600"/>
-              </a:spcAft>
-              <a:defRPr sz="1300">
-                <a:solidFill>
-                  <a:srgbClr val="000000"/>
-                </a:solidFill>
-                <a:latin typeface="Calibri"/>
-              </a:defRPr>
-            </a:pPr>
-            <a:r>
-              <a:t>  Universe = all tested genes in that depot</a:t>
-            </a:r>
-          </a:p>
-          <a:p>
-            <a:pPr>
-              <a:spcAft>
-                <a:spcPts val="600"/>
-              </a:spcAft>
-              <a:defRPr sz="1300">
-                <a:solidFill>
-                  <a:srgbClr val="000000"/>
-                </a:solidFill>
-                <a:latin typeface="Calibri"/>
-              </a:defRPr>
-            </a:pPr>
-            <a:r>
-              <a:t>  FDR &lt; 0.05 significance threshold</a:t>
-            </a:r>
-          </a:p>
-          <a:p>
-            <a:pPr>
-              <a:spcAft>
-                <a:spcPts val="600"/>
-              </a:spcAft>
-              <a:defRPr sz="1300">
-                <a:solidFill>
-                  <a:srgbClr val="000000"/>
-                </a:solidFill>
-                <a:latin typeface="Calibri"/>
-              </a:defRPr>
-            </a:pPr>
-          </a:p>
-          <a:p>
-            <a:pPr>
-              <a:spcAft>
-                <a:spcPts val="600"/>
-              </a:spcAft>
-              <a:defRPr sz="1300">
-                <a:solidFill>
-                  <a:srgbClr val="000000"/>
-                </a:solidFill>
-                <a:latin typeface="Calibri"/>
-              </a:defRPr>
-            </a:pPr>
-            <a:r>
-              <a:t>Insert the dotplots from the output directory:</a:t>
-            </a:r>
-          </a:p>
-          <a:p>
-            <a:pPr>
-              <a:spcAft>
-                <a:spcPts val="600"/>
-              </a:spcAft>
-              <a:defRPr sz="1300">
-                <a:solidFill>
-                  <a:srgbClr val="000000"/>
-                </a:solidFill>
-                <a:latin typeface="Calibri"/>
-              </a:defRPr>
-            </a:pPr>
-            <a:r>
-              <a:t>  interaction_ORA_GOBP_dotplot_&lt;depot&gt;_&lt;run_tag&gt;.png</a:t>
-            </a:r>
-          </a:p>
-          <a:p>
-            <a:pPr>
-              <a:spcAft>
-                <a:spcPts val="600"/>
-              </a:spcAft>
-              <a:defRPr sz="1300">
-                <a:solidFill>
-                  <a:srgbClr val="000000"/>
-                </a:solidFill>
-                <a:latin typeface="Calibri"/>
-              </a:defRPr>
-            </a:pPr>
-            <a:r>
-              <a:t>  interaction_ORA_KEGG_dotplot_&lt;depot&gt;_&lt;run_tag&gt;.png</a:t>
-            </a:r>
-          </a:p>
-        </p:txBody>
-      </p:sp>
-      <p:sp>
-        <p:nvSpPr>
-          <p:cNvPr id="5" name="Rectangle 4"/>
-          <p:cNvSpPr/>
-          <p:nvPr/>
-        </p:nvSpPr>
-        <p:spPr>
-          <a:xfrm>
-            <a:off x="5943600" y="1371600"/>
-            <a:ext cx="5486400" cy="4572000"/>
-          </a:xfrm>
-          <a:prstGeom prst="rect">
-            <a:avLst/>
-          </a:prstGeom>
-          <a:solidFill>
-            <a:srgbClr val="F2F2F2"/>
-          </a:solidFill>
-          <a:ln w="19050">
-            <a:solidFill>
-              <a:srgbClr val="999999"/>
-            </a:solidFill>
-            <a:prstDash val="sysDash"/>
-          </a:ln>
-        </p:spPr>
-        <p:style>
-          <a:lnRef idx="1">
-            <a:schemeClr val="accent1"/>
-          </a:lnRef>
-          <a:fillRef idx="3">
-            <a:schemeClr val="accent1"/>
-          </a:fillRef>
-          <a:effectRef idx="2">
-            <a:schemeClr val="accent1"/>
-          </a:effectRef>
-          <a:fontRef idx="minor">
-            <a:schemeClr val="lt1"/>
-          </a:fontRef>
-        </p:style>
-        <p:txBody>
-          <a:bodyPr rtlCol="0" anchor="ctr" wrap="square"/>
-          <a:lstStyle/>
-          <a:p>
-            <a:pPr algn="ctr">
-              <a:defRPr sz="1400" b="1">
-                <a:solidFill>
-                  <a:srgbClr val="666666"/>
-                </a:solidFill>
-              </a:defRPr>
-            </a:pPr>
-            <a:r>
-              <a:t>INSERT PLOT</a:t>
-            </a:r>
-          </a:p>
-          <a:p>
-            <a:pPr algn="ctr">
-              <a:defRPr sz="1100" i="1">
-                <a:solidFill>
-                  <a:srgbClr val="666666"/>
-                </a:solidFill>
-              </a:defRPr>
-            </a:pPr>
-            <a:r>
-              <a:t>interaction_ORA_GOBP_dotplot_&lt;depot&gt;_&lt;run_tag&gt;.png</a:t>
-            </a:r>
-          </a:p>
-        </p:txBody>
-      </p:sp>
-    </p:spTree>
-  </p:cSld>
-  <p:clrMapOvr>
-    <a:masterClrMapping/>
-  </p:clrMapOvr>
-</p:sld>
-</file>
-
-<file path=ppt/slides/slide14.xml><?xml version="1.0" encoding="utf-8"?>
-<p:sld xmlns:a="http://schemas.openxmlformats.org/drawingml/2006/main" xmlns:p="http://schemas.openxmlformats.org/presentationml/2006/main" xmlns:r="http://schemas.openxmlformats.org/officeDocument/2006/relationships">
-  <p:cSld>
-    <p:spTree>
-      <p:nvGrpSpPr>
-        <p:cNvPr id="1" name=""/>
-        <p:cNvGrpSpPr/>
-        <p:nvPr/>
-      </p:nvGrpSpPr>
-      <p:grpSpPr/>
-      <p:sp>
-        <p:nvSpPr>
-          <p:cNvPr id="2" name="TextBox 1"/>
-          <p:cNvSpPr txBox="1"/>
-          <p:nvPr/>
-        </p:nvSpPr>
-        <p:spPr>
-          <a:xfrm>
-            <a:off x="548640" y="274320"/>
-            <a:ext cx="10972800" cy="548640"/>
-          </a:xfrm>
-          <a:prstGeom prst="rect">
-            <a:avLst/>
-          </a:prstGeom>
-          <a:noFill/>
-        </p:spPr>
-        <p:txBody>
-          <a:bodyPr wrap="square">
-            <a:spAutoFit/>
-          </a:bodyPr>
-          <a:lstStyle/>
-          <a:p>
-            <a:pPr algn="l">
-              <a:defRPr sz="2800" b="1">
-                <a:solidFill>
-                  <a:srgbClr val="1B3A5C"/>
-                </a:solidFill>
-                <a:latin typeface="Calibri"/>
-              </a:defRPr>
-            </a:pPr>
-            <a:r>
-              <a:t>Summary: All Evidence at a Glance</a:t>
+              <a:t>Part 7.7 Test 3a: At the per-depot level (n ~ 19), adding Sex helps</a:t>
             </a:r>
           </a:p>
         </p:txBody>
       </p:sp>
       <p:graphicFrame>
         <p:nvGraphicFramePr>
-          <p:cNvPr id="3" name="Table 2"/>
+          <p:cNvPr id="4" name="Table 3"/>
           <p:cNvGraphicFramePr>
             <a:graphicFrameLocks noGrp="1"/>
           </p:cNvGraphicFramePr>
           <p:nvPr/>
         </p:nvGraphicFramePr>
         <p:xfrm>
-          <a:off x="914400" y="1188720"/>
-          <a:ext cx="10058400" cy="4114800"/>
+          <a:off x="914400" y="1371600"/>
+          <a:ext cx="10058400" cy="2560320"/>
         </p:xfrm>
         <a:graphic>
           <a:graphicData uri="http://schemas.openxmlformats.org/drawingml/2006/table">
@@ -4740,7 +6626,1251 @@
                 <a:gridCol w="3352800"/>
                 <a:gridCol w="3352800"/>
               </a:tblGrid>
-              <a:tr h="514350">
+              <a:tr h="426720">
+                <a:tc>
+                  <a:txBody>
+                    <a:bodyPr/>
+                    <a:lstStyle/>
+                    <a:p>
+                      <a:pPr>
+                        <a:defRPr b="1" sz="1400">
+                          <a:solidFill>
+                            <a:srgbClr val="FFFFFF"/>
+                          </a:solidFill>
+                          <a:latin typeface="Calibri"/>
+                        </a:defRPr>
+                      </a:pPr>
+                      <a:r>
+                        <a:t>Per-Depot Comparison</a:t>
+                      </a:r>
+                    </a:p>
+                  </a:txBody>
+                  <a:tcPr>
+                    <a:solidFill>
+                      <a:srgbClr val="1B3A5C"/>
+                    </a:solidFill>
+                  </a:tcPr>
+                </a:tc>
+                <a:tc>
+                  <a:txBody>
+                    <a:bodyPr/>
+                    <a:lstStyle/>
+                    <a:p>
+                      <a:pPr>
+                        <a:defRPr b="1" sz="1400">
+                          <a:solidFill>
+                            <a:srgbClr val="FFFFFF"/>
+                          </a:solidFill>
+                          <a:latin typeface="Calibri"/>
+                        </a:defRPr>
+                      </a:pPr>
+                      <a:r>
+                        <a:t>iWAT (n=19)</a:t>
+                      </a:r>
+                    </a:p>
+                  </a:txBody>
+                  <a:tcPr>
+                    <a:solidFill>
+                      <a:srgbClr val="1B3A5C"/>
+                    </a:solidFill>
+                  </a:tcPr>
+                </a:tc>
+                <a:tc>
+                  <a:txBody>
+                    <a:bodyPr/>
+                    <a:lstStyle/>
+                    <a:p>
+                      <a:pPr>
+                        <a:defRPr b="1" sz="1400">
+                          <a:solidFill>
+                            <a:srgbClr val="FFFFFF"/>
+                          </a:solidFill>
+                          <a:latin typeface="Calibri"/>
+                        </a:defRPr>
+                      </a:pPr>
+                      <a:r>
+                        <a:t>gWAT (n=19)</a:t>
+                      </a:r>
+                    </a:p>
+                  </a:txBody>
+                  <a:tcPr>
+                    <a:solidFill>
+                      <a:srgbClr val="1B3A5C"/>
+                    </a:solidFill>
+                  </a:tcPr>
+                </a:tc>
+              </a:tr>
+              <a:tr h="426720">
+                <a:tc>
+                  <a:txBody>
+                    <a:bodyPr/>
+                    <a:lstStyle/>
+                    <a:p>
+                      <a:pPr>
+                        <a:defRPr sz="1300" b="1">
+                          <a:latin typeface="Calibri"/>
+                        </a:defRPr>
+                      </a:pPr>
+                      <a:r>
+                        <a:t>~ Genotype (no Sex)</a:t>
+                      </a:r>
+                    </a:p>
+                  </a:txBody>
+                  <a:tcPr>
+                    <a:solidFill>
+                      <a:srgbClr val="D6E8F7"/>
+                    </a:solidFill>
+                  </a:tcPr>
+                </a:tc>
+                <a:tc>
+                  <a:txBody>
+                    <a:bodyPr/>
+                    <a:lstStyle/>
+                    <a:p>
+                      <a:pPr>
+                        <a:defRPr sz="1300">
+                          <a:latin typeface="Calibri"/>
+                        </a:defRPr>
+                      </a:pPr>
+                      <a:r>
+                        <a:t>2,665 DEGs</a:t>
+                      </a:r>
+                    </a:p>
+                  </a:txBody>
+                  <a:tcPr>
+                    <a:solidFill>
+                      <a:srgbClr val="D6E8F7"/>
+                    </a:solidFill>
+                  </a:tcPr>
+                </a:tc>
+                <a:tc>
+                  <a:txBody>
+                    <a:bodyPr/>
+                    <a:lstStyle/>
+                    <a:p>
+                      <a:pPr>
+                        <a:defRPr sz="1300">
+                          <a:latin typeface="Calibri"/>
+                        </a:defRPr>
+                      </a:pPr>
+                      <a:r>
+                        <a:t>1,077 DEGs</a:t>
+                      </a:r>
+                    </a:p>
+                  </a:txBody>
+                  <a:tcPr>
+                    <a:solidFill>
+                      <a:srgbClr val="D6E8F7"/>
+                    </a:solidFill>
+                  </a:tcPr>
+                </a:tc>
+              </a:tr>
+              <a:tr h="426720">
+                <a:tc>
+                  <a:txBody>
+                    <a:bodyPr/>
+                    <a:lstStyle/>
+                    <a:p>
+                      <a:pPr>
+                        <a:defRPr sz="1300" b="1">
+                          <a:latin typeface="Calibri"/>
+                        </a:defRPr>
+                      </a:pPr>
+                      <a:r>
+                        <a:t>~ Sex + Genotype</a:t>
+                      </a:r>
+                    </a:p>
+                  </a:txBody>
+                  <a:tcPr/>
+                </a:tc>
+                <a:tc>
+                  <a:txBody>
+                    <a:bodyPr/>
+                    <a:lstStyle/>
+                    <a:p>
+                      <a:pPr>
+                        <a:defRPr sz="1300">
+                          <a:latin typeface="Calibri"/>
+                        </a:defRPr>
+                      </a:pPr>
+                      <a:r>
+                        <a:t>3,042 DEGs</a:t>
+                      </a:r>
+                    </a:p>
+                  </a:txBody>
+                  <a:tcPr/>
+                </a:tc>
+                <a:tc>
+                  <a:txBody>
+                    <a:bodyPr/>
+                    <a:lstStyle/>
+                    <a:p>
+                      <a:pPr>
+                        <a:defRPr sz="1300">
+                          <a:latin typeface="Calibri"/>
+                        </a:defRPr>
+                      </a:pPr>
+                      <a:r>
+                        <a:t>1,131 DEGs</a:t>
+                      </a:r>
+                    </a:p>
+                  </a:txBody>
+                  <a:tcPr/>
+                </a:tc>
+              </a:tr>
+              <a:tr h="426720">
+                <a:tc>
+                  <a:txBody>
+                    <a:bodyPr/>
+                    <a:lstStyle/>
+                    <a:p>
+                      <a:pPr>
+                        <a:defRPr sz="1300" b="1">
+                          <a:latin typeface="Calibri"/>
+                        </a:defRPr>
+                      </a:pPr>
+                      <a:r>
+                        <a:t>Net DEG change</a:t>
+                      </a:r>
+                    </a:p>
+                  </a:txBody>
+                  <a:tcPr>
+                    <a:solidFill>
+                      <a:srgbClr val="D5F5E3"/>
+                    </a:solidFill>
+                  </a:tcPr>
+                </a:tc>
+                <a:tc>
+                  <a:txBody>
+                    <a:bodyPr/>
+                    <a:lstStyle/>
+                    <a:p>
+                      <a:pPr>
+                        <a:defRPr sz="1300">
+                          <a:latin typeface="Calibri"/>
+                        </a:defRPr>
+                      </a:pPr>
+                      <a:r>
+                        <a:t>+377 (+14.1%)</a:t>
+                      </a:r>
+                    </a:p>
+                  </a:txBody>
+                  <a:tcPr>
+                    <a:solidFill>
+                      <a:srgbClr val="D5F5E3"/>
+                    </a:solidFill>
+                  </a:tcPr>
+                </a:tc>
+                <a:tc>
+                  <a:txBody>
+                    <a:bodyPr/>
+                    <a:lstStyle/>
+                    <a:p>
+                      <a:pPr>
+                        <a:defRPr sz="1300">
+                          <a:latin typeface="Calibri"/>
+                        </a:defRPr>
+                      </a:pPr>
+                      <a:r>
+                        <a:t>+54 (+5.0%)</a:t>
+                      </a:r>
+                    </a:p>
+                  </a:txBody>
+                  <a:tcPr>
+                    <a:solidFill>
+                      <a:srgbClr val="D5F5E3"/>
+                    </a:solidFill>
+                  </a:tcPr>
+                </a:tc>
+              </a:tr>
+              <a:tr h="426720">
+                <a:tc>
+                  <a:txBody>
+                    <a:bodyPr/>
+                    <a:lstStyle/>
+                    <a:p>
+                      <a:pPr>
+                        <a:defRPr sz="1300" b="1">
+                          <a:latin typeface="Calibri"/>
+                        </a:defRPr>
+                      </a:pPr>
+                      <a:r>
+                        <a:t>Directional concordance</a:t>
+                      </a:r>
+                    </a:p>
+                  </a:txBody>
+                  <a:tcPr/>
+                </a:tc>
+                <a:tc>
+                  <a:txBody>
+                    <a:bodyPr/>
+                    <a:lstStyle/>
+                    <a:p>
+                      <a:pPr>
+                        <a:defRPr sz="1300">
+                          <a:latin typeface="Calibri"/>
+                        </a:defRPr>
+                      </a:pPr>
+                      <a:r>
+                        <a:t>99.0%</a:t>
+                      </a:r>
+                    </a:p>
+                  </a:txBody>
+                  <a:tcPr/>
+                </a:tc>
+                <a:tc>
+                  <a:txBody>
+                    <a:bodyPr/>
+                    <a:lstStyle/>
+                    <a:p>
+                      <a:pPr>
+                        <a:defRPr sz="1300">
+                          <a:latin typeface="Calibri"/>
+                        </a:defRPr>
+                      </a:pPr>
+                      <a:r>
+                        <a:t>99.5%</a:t>
+                      </a:r>
+                    </a:p>
+                  </a:txBody>
+                  <a:tcPr/>
+                </a:tc>
+              </a:tr>
+              <a:tr h="426720">
+                <a:tc>
+                  <a:txBody>
+                    <a:bodyPr/>
+                    <a:lstStyle/>
+                    <a:p>
+                      <a:pPr>
+                        <a:defRPr sz="1300" b="1">
+                          <a:latin typeface="Calibri"/>
+                        </a:defRPr>
+                      </a:pPr>
+                      <a:r>
+                        <a:t>logFC correlation</a:t>
+                      </a:r>
+                    </a:p>
+                  </a:txBody>
+                  <a:tcPr>
+                    <a:solidFill>
+                      <a:srgbClr val="D6E8F7"/>
+                    </a:solidFill>
+                  </a:tcPr>
+                </a:tc>
+                <a:tc>
+                  <a:txBody>
+                    <a:bodyPr/>
+                    <a:lstStyle/>
+                    <a:p>
+                      <a:pPr>
+                        <a:defRPr sz="1300">
+                          <a:latin typeface="Calibri"/>
+                        </a:defRPr>
+                      </a:pPr>
+                      <a:r>
+                        <a:t>~0.999</a:t>
+                      </a:r>
+                    </a:p>
+                  </a:txBody>
+                  <a:tcPr>
+                    <a:solidFill>
+                      <a:srgbClr val="D6E8F7"/>
+                    </a:solidFill>
+                  </a:tcPr>
+                </a:tc>
+                <a:tc>
+                  <a:txBody>
+                    <a:bodyPr/>
+                    <a:lstStyle/>
+                    <a:p>
+                      <a:pPr>
+                        <a:defRPr sz="1300">
+                          <a:latin typeface="Calibri"/>
+                        </a:defRPr>
+                      </a:pPr>
+                      <a:r>
+                        <a:t>~0.999</a:t>
+                      </a:r>
+                    </a:p>
+                  </a:txBody>
+                  <a:tcPr>
+                    <a:solidFill>
+                      <a:srgbClr val="D6E8F7"/>
+                    </a:solidFill>
+                  </a:tcPr>
+                </a:tc>
+              </a:tr>
+            </a:tbl>
+          </a:graphicData>
+        </a:graphic>
+      </p:graphicFrame>
+      <p:sp>
+        <p:nvSpPr>
+          <p:cNvPr id="5" name="TextBox 4"/>
+          <p:cNvSpPr txBox="1"/>
+          <p:nvPr/>
+        </p:nvSpPr>
+        <p:spPr>
+          <a:xfrm>
+            <a:off x="914400" y="4389120"/>
+            <a:ext cx="10058400" cy="2286000"/>
+          </a:xfrm>
+          <a:prstGeom prst="rect">
+            <a:avLst/>
+          </a:prstGeom>
+          <a:noFill/>
+        </p:spPr>
+        <p:txBody>
+          <a:bodyPr wrap="square">
+            <a:spAutoFit/>
+          </a:bodyPr>
+          <a:lstStyle/>
+          <a:p>
+            <a:pPr algn="l">
+              <a:defRPr sz="1400" b="0">
+                <a:solidFill>
+                  <a:srgbClr val="1B3A5C"/>
+                </a:solidFill>
+                <a:latin typeface="Calibri"/>
+              </a:defRPr>
+            </a:pPr>
+            <a:r>
+              <a:t>At the PER-DEPOT level (n ~ 19), adding Sex gains +14% DEGs in iWAT.</a:t>
+            </a:r>
+            <a:br/>
+            <a:r>
+              <a:t>Each degree of freedom matters more with fewer samples, so the variance absorbed</a:t>
+            </a:r>
+            <a:br/>
+            <a:r>
+              <a:t>by Sex outweighs its DF cost.</a:t>
+            </a:r>
+            <a:br/>
+            <a:br/>
+            <a:r>
+              <a:t>BUT: We use a UNIFIED model (all 38 samples). What happens there?  --&gt; Next slide</a:t>
+            </a:r>
+          </a:p>
+        </p:txBody>
+      </p:sp>
+    </p:spTree>
+  </p:cSld>
+  <p:clrMapOvr>
+    <a:masterClrMapping/>
+  </p:clrMapOvr>
+</p:sld>
+</file>
+
+<file path=ppt/slides/slide19.xml><?xml version="1.0" encoding="utf-8"?>
+<p:sld xmlns:a="http://schemas.openxmlformats.org/drawingml/2006/main" xmlns:p="http://schemas.openxmlformats.org/presentationml/2006/main" xmlns:r="http://schemas.openxmlformats.org/officeDocument/2006/relationships">
+  <p:cSld>
+    <p:bg>
+      <p:bgPr>
+        <a:solidFill>
+          <a:srgbClr val="E8F8F5"/>
+        </a:solidFill>
+        <a:effectLst/>
+      </p:bgPr>
+    </p:bg>
+    <p:spTree>
+      <p:nvGrpSpPr>
+        <p:cNvPr id="1" name=""/>
+        <p:cNvGrpSpPr/>
+        <p:nvPr/>
+      </p:nvGrpSpPr>
+      <p:grpSpPr/>
+      <p:sp>
+        <p:nvSpPr>
+          <p:cNvPr id="2" name="TextBox 1"/>
+          <p:cNvSpPr txBox="1"/>
+          <p:nvPr/>
+        </p:nvSpPr>
+        <p:spPr>
+          <a:xfrm>
+            <a:off x="548640" y="274320"/>
+            <a:ext cx="10972800" cy="548640"/>
+          </a:xfrm>
+          <a:prstGeom prst="rect">
+            <a:avLst/>
+          </a:prstGeom>
+          <a:noFill/>
+        </p:spPr>
+        <p:txBody>
+          <a:bodyPr wrap="square">
+            <a:spAutoFit/>
+          </a:bodyPr>
+          <a:lstStyle/>
+          <a:p>
+            <a:pPr algn="l">
+              <a:defRPr sz="2800" b="1">
+                <a:solidFill>
+                  <a:srgbClr val="1B3A5C"/>
+                </a:solidFill>
+                <a:latin typeface="Calibri"/>
+              </a:defRPr>
+            </a:pPr>
+            <a:r>
+              <a:t>Unified Models: ~ 0 + GroupDepot vs. ~ Sex + GroupDepot</a:t>
+            </a:r>
+          </a:p>
+        </p:txBody>
+      </p:sp>
+      <p:sp>
+        <p:nvSpPr>
+          <p:cNvPr id="3" name="TextBox 2"/>
+          <p:cNvSpPr txBox="1"/>
+          <p:nvPr/>
+        </p:nvSpPr>
+        <p:spPr>
+          <a:xfrm>
+            <a:off x="548640" y="822960"/>
+            <a:ext cx="10972800" cy="365760"/>
+          </a:xfrm>
+          <a:prstGeom prst="rect">
+            <a:avLst/>
+          </a:prstGeom>
+          <a:noFill/>
+        </p:spPr>
+        <p:txBody>
+          <a:bodyPr wrap="square">
+            <a:spAutoFit/>
+          </a:bodyPr>
+          <a:lstStyle/>
+          <a:p>
+            <a:pPr algn="l">
+              <a:defRPr sz="1400" b="0">
+                <a:solidFill>
+                  <a:srgbClr val="666666"/>
+                </a:solidFill>
+                <a:latin typeface="Calibri"/>
+              </a:defRPr>
+            </a:pPr>
+            <a:r>
+              <a:t>Part 7.7 Test 3c: At the unified level (n = 38), adding Sex COSTS power</a:t>
+            </a:r>
+          </a:p>
+        </p:txBody>
+      </p:sp>
+      <p:graphicFrame>
+        <p:nvGraphicFramePr>
+          <p:cNvPr id="4" name="Table 3"/>
+          <p:cNvGraphicFramePr>
+            <a:graphicFrameLocks noGrp="1"/>
+          </p:cNvGraphicFramePr>
+          <p:nvPr/>
+        </p:nvGraphicFramePr>
+        <p:xfrm>
+          <a:off x="914400" y="1371600"/>
+          <a:ext cx="10058400" cy="2286000"/>
+        </p:xfrm>
+        <a:graphic>
+          <a:graphicData uri="http://schemas.openxmlformats.org/drawingml/2006/table">
+            <a:tbl>
+              <a:tblPr firstRow="1" bandRow="1">
+                <a:tableStyleId>{5C22544A-7EE6-4342-B048-85BDC9FD1C3A}</a:tableStyleId>
+              </a:tblPr>
+              <a:tblGrid>
+                <a:gridCol w="3352800"/>
+                <a:gridCol w="3352800"/>
+                <a:gridCol w="3352800"/>
+              </a:tblGrid>
+              <a:tr h="457200">
+                <a:tc>
+                  <a:txBody>
+                    <a:bodyPr/>
+                    <a:lstStyle/>
+                    <a:p>
+                      <a:pPr>
+                        <a:defRPr b="1" sz="1400">
+                          <a:solidFill>
+                            <a:srgbClr val="FFFFFF"/>
+                          </a:solidFill>
+                          <a:latin typeface="Calibri"/>
+                        </a:defRPr>
+                      </a:pPr>
+                      <a:r>
+                        <a:t>Unified Model Comparison</a:t>
+                      </a:r>
+                    </a:p>
+                  </a:txBody>
+                  <a:tcPr>
+                    <a:solidFill>
+                      <a:srgbClr val="1B3A5C"/>
+                    </a:solidFill>
+                  </a:tcPr>
+                </a:tc>
+                <a:tc>
+                  <a:txBody>
+                    <a:bodyPr/>
+                    <a:lstStyle/>
+                    <a:p>
+                      <a:pPr>
+                        <a:defRPr b="1" sz="1400">
+                          <a:solidFill>
+                            <a:srgbClr val="FFFFFF"/>
+                          </a:solidFill>
+                          <a:latin typeface="Calibri"/>
+                        </a:defRPr>
+                      </a:pPr>
+                      <a:r>
+                        <a:t>iWAT contrast</a:t>
+                      </a:r>
+                    </a:p>
+                  </a:txBody>
+                  <a:tcPr>
+                    <a:solidFill>
+                      <a:srgbClr val="1B3A5C"/>
+                    </a:solidFill>
+                  </a:tcPr>
+                </a:tc>
+                <a:tc>
+                  <a:txBody>
+                    <a:bodyPr/>
+                    <a:lstStyle/>
+                    <a:p>
+                      <a:pPr>
+                        <a:defRPr b="1" sz="1400">
+                          <a:solidFill>
+                            <a:srgbClr val="FFFFFF"/>
+                          </a:solidFill>
+                          <a:latin typeface="Calibri"/>
+                        </a:defRPr>
+                      </a:pPr>
+                      <a:r>
+                        <a:t>gWAT contrast</a:t>
+                      </a:r>
+                    </a:p>
+                  </a:txBody>
+                  <a:tcPr>
+                    <a:solidFill>
+                      <a:srgbClr val="1B3A5C"/>
+                    </a:solidFill>
+                  </a:tcPr>
+                </a:tc>
+              </a:tr>
+              <a:tr h="457200">
+                <a:tc>
+                  <a:txBody>
+                    <a:bodyPr/>
+                    <a:lstStyle/>
+                    <a:p>
+                      <a:pPr>
+                        <a:defRPr sz="1300" b="1">
+                          <a:latin typeface="Calibri"/>
+                        </a:defRPr>
+                      </a:pPr>
+                      <a:r>
+                        <a:t>~ 0 + GroupDepot (no Sex)</a:t>
+                      </a:r>
+                    </a:p>
+                  </a:txBody>
+                  <a:tcPr>
+                    <a:solidFill>
+                      <a:srgbClr val="D6E8F7"/>
+                    </a:solidFill>
+                  </a:tcPr>
+                </a:tc>
+                <a:tc>
+                  <a:txBody>
+                    <a:bodyPr/>
+                    <a:lstStyle/>
+                    <a:p>
+                      <a:pPr>
+                        <a:defRPr sz="1300">
+                          <a:latin typeface="Calibri"/>
+                        </a:defRPr>
+                      </a:pPr>
+                      <a:r>
+                        <a:t>3,022 DEGs</a:t>
+                      </a:r>
+                    </a:p>
+                  </a:txBody>
+                  <a:tcPr>
+                    <a:solidFill>
+                      <a:srgbClr val="D6E8F7"/>
+                    </a:solidFill>
+                  </a:tcPr>
+                </a:tc>
+                <a:tc>
+                  <a:txBody>
+                    <a:bodyPr/>
+                    <a:lstStyle/>
+                    <a:p>
+                      <a:pPr>
+                        <a:defRPr sz="1300">
+                          <a:latin typeface="Calibri"/>
+                        </a:defRPr>
+                      </a:pPr>
+                      <a:r>
+                        <a:t>1,159 DEGs</a:t>
+                      </a:r>
+                    </a:p>
+                  </a:txBody>
+                  <a:tcPr>
+                    <a:solidFill>
+                      <a:srgbClr val="D6E8F7"/>
+                    </a:solidFill>
+                  </a:tcPr>
+                </a:tc>
+              </a:tr>
+              <a:tr h="457200">
+                <a:tc>
+                  <a:txBody>
+                    <a:bodyPr/>
+                    <a:lstStyle/>
+                    <a:p>
+                      <a:pPr>
+                        <a:defRPr sz="1300" b="1">
+                          <a:latin typeface="Calibri"/>
+                        </a:defRPr>
+                      </a:pPr>
+                      <a:r>
+                        <a:t>~ Sex + GroupDepot</a:t>
+                      </a:r>
+                    </a:p>
+                  </a:txBody>
+                  <a:tcPr/>
+                </a:tc>
+                <a:tc>
+                  <a:txBody>
+                    <a:bodyPr/>
+                    <a:lstStyle/>
+                    <a:p>
+                      <a:pPr>
+                        <a:defRPr sz="1300">
+                          <a:latin typeface="Calibri"/>
+                        </a:defRPr>
+                      </a:pPr>
+                      <a:r>
+                        <a:t>2,777 DEGs</a:t>
+                      </a:r>
+                    </a:p>
+                  </a:txBody>
+                  <a:tcPr/>
+                </a:tc>
+                <a:tc>
+                  <a:txBody>
+                    <a:bodyPr/>
+                    <a:lstStyle/>
+                    <a:p>
+                      <a:pPr>
+                        <a:defRPr sz="1300">
+                          <a:latin typeface="Calibri"/>
+                        </a:defRPr>
+                      </a:pPr>
+                      <a:r>
+                        <a:t>1,089 DEGs</a:t>
+                      </a:r>
+                    </a:p>
+                  </a:txBody>
+                  <a:tcPr/>
+                </a:tc>
+              </a:tr>
+              <a:tr h="457200">
+                <a:tc>
+                  <a:txBody>
+                    <a:bodyPr/>
+                    <a:lstStyle/>
+                    <a:p>
+                      <a:pPr>
+                        <a:defRPr sz="1300" b="1">
+                          <a:latin typeface="Calibri"/>
+                        </a:defRPr>
+                      </a:pPr>
+                      <a:r>
+                        <a:t>Net DEG change</a:t>
+                      </a:r>
+                    </a:p>
+                  </a:txBody>
+                  <a:tcPr>
+                    <a:solidFill>
+                      <a:srgbClr val="FCF3CF"/>
+                    </a:solidFill>
+                  </a:tcPr>
+                </a:tc>
+                <a:tc>
+                  <a:txBody>
+                    <a:bodyPr/>
+                    <a:lstStyle/>
+                    <a:p>
+                      <a:pPr>
+                        <a:defRPr sz="1300">
+                          <a:latin typeface="Calibri"/>
+                        </a:defRPr>
+                      </a:pPr>
+                      <a:r>
+                        <a:t>-245 (-8.1%)</a:t>
+                      </a:r>
+                    </a:p>
+                  </a:txBody>
+                  <a:tcPr>
+                    <a:solidFill>
+                      <a:srgbClr val="FCF3CF"/>
+                    </a:solidFill>
+                  </a:tcPr>
+                </a:tc>
+                <a:tc>
+                  <a:txBody>
+                    <a:bodyPr/>
+                    <a:lstStyle/>
+                    <a:p>
+                      <a:pPr>
+                        <a:defRPr sz="1300">
+                          <a:latin typeface="Calibri"/>
+                        </a:defRPr>
+                      </a:pPr>
+                      <a:r>
+                        <a:t>-70 (-6.0%)</a:t>
+                      </a:r>
+                    </a:p>
+                  </a:txBody>
+                  <a:tcPr>
+                    <a:solidFill>
+                      <a:srgbClr val="FCF3CF"/>
+                    </a:solidFill>
+                  </a:tcPr>
+                </a:tc>
+              </a:tr>
+              <a:tr h="457200">
+                <a:tc>
+                  <a:txBody>
+                    <a:bodyPr/>
+                    <a:lstStyle/>
+                    <a:p>
+                      <a:pPr>
+                        <a:defRPr sz="1300" b="1">
+                          <a:latin typeface="Calibri"/>
+                        </a:defRPr>
+                      </a:pPr>
+                      <a:r>
+                        <a:t>logFC correlation</a:t>
+                      </a:r>
+                    </a:p>
+                  </a:txBody>
+                  <a:tcPr/>
+                </a:tc>
+                <a:tc>
+                  <a:txBody>
+                    <a:bodyPr/>
+                    <a:lstStyle/>
+                    <a:p>
+                      <a:pPr>
+                        <a:defRPr sz="1300">
+                          <a:latin typeface="Calibri"/>
+                        </a:defRPr>
+                      </a:pPr>
+                      <a:r>
+                        <a:t>0.939</a:t>
+                      </a:r>
+                    </a:p>
+                  </a:txBody>
+                  <a:tcPr/>
+                </a:tc>
+                <a:tc>
+                  <a:txBody>
+                    <a:bodyPr/>
+                    <a:lstStyle/>
+                    <a:p>
+                      <a:pPr>
+                        <a:defRPr sz="1300">
+                          <a:latin typeface="Calibri"/>
+                        </a:defRPr>
+                      </a:pPr>
+                      <a:r>
+                        <a:t>0.967</a:t>
+                      </a:r>
+                    </a:p>
+                  </a:txBody>
+                  <a:tcPr/>
+                </a:tc>
+              </a:tr>
+            </a:tbl>
+          </a:graphicData>
+        </a:graphic>
+      </p:graphicFrame>
+      <p:sp>
+        <p:nvSpPr>
+          <p:cNvPr id="5" name="TextBox 4"/>
+          <p:cNvSpPr txBox="1"/>
+          <p:nvPr/>
+        </p:nvSpPr>
+        <p:spPr>
+          <a:xfrm>
+            <a:off x="914400" y="4114800"/>
+            <a:ext cx="10058400" cy="2560320"/>
+          </a:xfrm>
+          <a:prstGeom prst="rect">
+            <a:avLst/>
+          </a:prstGeom>
+          <a:noFill/>
+        </p:spPr>
+        <p:txBody>
+          <a:bodyPr wrap="square">
+            <a:spAutoFit/>
+          </a:bodyPr>
+          <a:lstStyle/>
+          <a:p>
+            <a:pPr algn="l">
+              <a:defRPr sz="1400" b="0">
+                <a:solidFill>
+                  <a:srgbClr val="1B3A5C"/>
+                </a:solidFill>
+                <a:latin typeface="Calibri"/>
+              </a:defRPr>
+            </a:pPr>
+            <a:r>
+              <a:t>WHY THE REVERSAL?</a:t>
+            </a:r>
+            <a:br/>
+            <a:r>
+              <a:t>At n=19 (per-depot), losing 1 DF to Sex = 5.6% of residual evidence lost, but Sex absorbs enough variance to compensate.</a:t>
+            </a:r>
+            <a:br/>
+            <a:r>
+              <a:t>At n=38 (unified), losing 1 DF = only 2.9% of residual evidence, AND the balanced design already prevents sex from confounding genotype.</a:t>
+            </a:r>
+            <a:br/>
+            <a:r>
+              <a:t>Result: the DF cost now OUTWEIGHS the variance benefit -&gt; fewer DEGs.</a:t>
+            </a:r>
+            <a:br/>
+            <a:br/>
+            <a:r>
+              <a:t>DECISION: Use ~ 0 + GroupDepot (the simpler model with MORE power).</a:t>
+            </a:r>
+            <a:br/>
+            <a:r>
+              <a:t>The two models agree closely (r = 0.94-0.97), so biological conclusions are the same.</a:t>
+            </a:r>
+          </a:p>
+        </p:txBody>
+      </p:sp>
+    </p:spTree>
+  </p:cSld>
+  <p:clrMapOvr>
+    <a:masterClrMapping/>
+  </p:clrMapOvr>
+</p:sld>
+</file>
+
+<file path=ppt/slides/slide2.xml><?xml version="1.0" encoding="utf-8"?>
+<p:sld xmlns:a="http://schemas.openxmlformats.org/drawingml/2006/main" xmlns:p="http://schemas.openxmlformats.org/presentationml/2006/main" xmlns:r="http://schemas.openxmlformats.org/officeDocument/2006/relationships">
+  <p:cSld>
+    <p:spTree>
+      <p:nvGrpSpPr>
+        <p:cNvPr id="1" name=""/>
+        <p:cNvGrpSpPr/>
+        <p:nvPr/>
+      </p:nvGrpSpPr>
+      <p:grpSpPr/>
+      <p:sp>
+        <p:nvSpPr>
+          <p:cNvPr id="2" name="TextBox 1"/>
+          <p:cNvSpPr txBox="1"/>
+          <p:nvPr/>
+        </p:nvSpPr>
+        <p:spPr>
+          <a:xfrm>
+            <a:off x="548640" y="274320"/>
+            <a:ext cx="10972800" cy="548640"/>
+          </a:xfrm>
+          <a:prstGeom prst="rect">
+            <a:avLst/>
+          </a:prstGeom>
+          <a:noFill/>
+        </p:spPr>
+        <p:txBody>
+          <a:bodyPr wrap="square">
+            <a:spAutoFit/>
+          </a:bodyPr>
+          <a:lstStyle/>
+          <a:p>
+            <a:pPr algn="l">
+              <a:defRPr sz="2800" b="1">
+                <a:solidFill>
+                  <a:srgbClr val="1B3A5C"/>
+                </a:solidFill>
+                <a:latin typeface="Calibri"/>
+              </a:defRPr>
+            </a:pPr>
+            <a:r>
+              <a:t>Study Design</a:t>
+            </a:r>
+          </a:p>
+        </p:txBody>
+      </p:sp>
+      <p:sp>
+        <p:nvSpPr>
+          <p:cNvPr id="3" name="TextBox 2"/>
+          <p:cNvSpPr txBox="1"/>
+          <p:nvPr/>
+        </p:nvSpPr>
+        <p:spPr>
+          <a:xfrm>
+            <a:off x="731520" y="1097280"/>
+            <a:ext cx="5486400" cy="4572000"/>
+          </a:xfrm>
+          <a:prstGeom prst="rect">
+            <a:avLst/>
+          </a:prstGeom>
+          <a:noFill/>
+        </p:spPr>
+        <p:txBody>
+          <a:bodyPr wrap="square">
+            <a:spAutoFit/>
+          </a:bodyPr>
+          <a:lstStyle/>
+          <a:p>
+            <a:pPr>
+              <a:spcAft>
+                <a:spcPts val="600"/>
+              </a:spcAft>
+              <a:defRPr sz="1600">
+                <a:solidFill>
+                  <a:srgbClr val="000000"/>
+                </a:solidFill>
+                <a:latin typeface="Calibri"/>
+              </a:defRPr>
+            </a:pPr>
+            <a:r>
+              <a:t>2 x 2 factorial design: Sex (F, M) x Genotype (CTL, KAT8-KD)</a:t>
+            </a:r>
+          </a:p>
+          <a:p>
+            <a:pPr>
+              <a:spcAft>
+                <a:spcPts val="600"/>
+              </a:spcAft>
+              <a:defRPr sz="1600">
+                <a:solidFill>
+                  <a:srgbClr val="000000"/>
+                </a:solidFill>
+                <a:latin typeface="Calibri"/>
+              </a:defRPr>
+            </a:pPr>
+            <a:r>
+              <a:t>Two adipose depots analyzed separately: iWAT and gWAT</a:t>
+            </a:r>
+          </a:p>
+          <a:p>
+            <a:pPr>
+              <a:spcAft>
+                <a:spcPts val="600"/>
+              </a:spcAft>
+              <a:defRPr sz="1600">
+                <a:solidFill>
+                  <a:srgbClr val="000000"/>
+                </a:solidFill>
+                <a:latin typeface="Calibri"/>
+              </a:defRPr>
+            </a:pPr>
+            <a:r>
+              <a:t>40 samples total, 2 outliers removed (JS_08, JS_28) -&gt; 38 samples</a:t>
+            </a:r>
+          </a:p>
+          <a:p>
+            <a:pPr>
+              <a:spcAft>
+                <a:spcPts val="600"/>
+              </a:spcAft>
+              <a:defRPr sz="1600">
+                <a:solidFill>
+                  <a:srgbClr val="000000"/>
+                </a:solidFill>
+                <a:latin typeface="Calibri"/>
+              </a:defRPr>
+            </a:pPr>
+            <a:r>
+              <a:t>Per depot: 19 samples (after outlier removal)</a:t>
+            </a:r>
+          </a:p>
+          <a:p>
+            <a:pPr>
+              <a:spcAft>
+                <a:spcPts val="600"/>
+              </a:spcAft>
+              <a:defRPr sz="1600">
+                <a:solidFill>
+                  <a:srgbClr val="000000"/>
+                </a:solidFill>
+                <a:latin typeface="Calibri"/>
+              </a:defRPr>
+            </a:pPr>
+          </a:p>
+          <a:p>
+            <a:pPr>
+              <a:spcAft>
+                <a:spcPts val="600"/>
+              </a:spcAft>
+              <a:defRPr sz="1600">
+                <a:solidFill>
+                  <a:srgbClr val="000000"/>
+                </a:solidFill>
+                <a:latin typeface="Calibri"/>
+              </a:defRPr>
+            </a:pPr>
+            <a:r>
+              <a:t>Group sizes per depot:</a:t>
+            </a:r>
+          </a:p>
+          <a:p>
+            <a:pPr>
+              <a:spcAft>
+                <a:spcPts val="600"/>
+              </a:spcAft>
+              <a:defRPr sz="1600">
+                <a:solidFill>
+                  <a:srgbClr val="000000"/>
+                </a:solidFill>
+                <a:latin typeface="Calibri"/>
+              </a:defRPr>
+            </a:pPr>
+            <a:r>
+              <a:t>   CTL Female:  5     |  KAT8-KD Female:  4</a:t>
+            </a:r>
+          </a:p>
+          <a:p>
+            <a:pPr>
+              <a:spcAft>
+                <a:spcPts val="600"/>
+              </a:spcAft>
+              <a:defRPr sz="1600">
+                <a:solidFill>
+                  <a:srgbClr val="000000"/>
+                </a:solidFill>
+                <a:latin typeface="Calibri"/>
+              </a:defRPr>
+            </a:pPr>
+            <a:r>
+              <a:t>   CTL Male:    5     |  KAT8-KD Male:    5</a:t>
+            </a:r>
+          </a:p>
+          <a:p>
+            <a:pPr>
+              <a:spcAft>
+                <a:spcPts val="600"/>
+              </a:spcAft>
+              <a:defRPr sz="1600">
+                <a:solidFill>
+                  <a:srgbClr val="000000"/>
+                </a:solidFill>
+                <a:latin typeface="Calibri"/>
+              </a:defRPr>
+            </a:pPr>
+          </a:p>
+          <a:p>
+            <a:pPr>
+              <a:spcAft>
+                <a:spcPts val="600"/>
+              </a:spcAft>
+              <a:defRPr sz="1600">
+                <a:solidFill>
+                  <a:srgbClr val="000000"/>
+                </a:solidFill>
+                <a:latin typeface="Calibri"/>
+              </a:defRPr>
+            </a:pPr>
+            <a:r>
+              <a:t>KEY: We have BOTH sexes in every group.</a:t>
+            </a:r>
+          </a:p>
+          <a:p>
+            <a:pPr>
+              <a:spcAft>
+                <a:spcPts val="600"/>
+              </a:spcAft>
+              <a:defRPr sz="1600">
+                <a:solidFill>
+                  <a:srgbClr val="000000"/>
+                </a:solidFill>
+                <a:latin typeface="Calibri"/>
+              </a:defRPr>
+            </a:pPr>
+            <a:r>
+              <a:t>Question: should we account for sex in our statistical model?</a:t>
+            </a:r>
+          </a:p>
+        </p:txBody>
+      </p:sp>
+    </p:spTree>
+  </p:cSld>
+  <p:clrMapOvr>
+    <a:masterClrMapping/>
+  </p:clrMapOvr>
+</p:sld>
+</file>
+
+<file path=ppt/slides/slide20.xml><?xml version="1.0" encoding="utf-8"?>
+<p:sld xmlns:a="http://schemas.openxmlformats.org/drawingml/2006/main" xmlns:p="http://schemas.openxmlformats.org/presentationml/2006/main" xmlns:r="http://schemas.openxmlformats.org/officeDocument/2006/relationships">
+  <p:cSld>
+    <p:spTree>
+      <p:nvGrpSpPr>
+        <p:cNvPr id="1" name=""/>
+        <p:cNvGrpSpPr/>
+        <p:nvPr/>
+      </p:nvGrpSpPr>
+      <p:grpSpPr/>
+      <p:sp>
+        <p:nvSpPr>
+          <p:cNvPr id="2" name="TextBox 1"/>
+          <p:cNvSpPr txBox="1"/>
+          <p:nvPr/>
+        </p:nvSpPr>
+        <p:spPr>
+          <a:xfrm>
+            <a:off x="548640" y="274320"/>
+            <a:ext cx="10972800" cy="548640"/>
+          </a:xfrm>
+          <a:prstGeom prst="rect">
+            <a:avLst/>
+          </a:prstGeom>
+          <a:noFill/>
+        </p:spPr>
+        <p:txBody>
+          <a:bodyPr wrap="square">
+            <a:spAutoFit/>
+          </a:bodyPr>
+          <a:lstStyle/>
+          <a:p>
+            <a:pPr algn="l">
+              <a:defRPr sz="2800" b="1">
+                <a:solidFill>
+                  <a:srgbClr val="1B3A5C"/>
+                </a:solidFill>
+                <a:latin typeface="Calibri"/>
+              </a:defRPr>
+            </a:pPr>
+            <a:r>
+              <a:t>Summary: All Evidence at a Glance</a:t>
+            </a:r>
+          </a:p>
+        </p:txBody>
+      </p:sp>
+      <p:graphicFrame>
+        <p:nvGraphicFramePr>
+          <p:cNvPr id="3" name="Table 2"/>
+          <p:cNvGraphicFramePr>
+            <a:graphicFrameLocks noGrp="1"/>
+          </p:cNvGraphicFramePr>
+          <p:nvPr/>
+        </p:nvGraphicFramePr>
+        <p:xfrm>
+          <a:off x="914400" y="1188720"/>
+          <a:ext cx="10058400" cy="4389120"/>
+        </p:xfrm>
+        <a:graphic>
+          <a:graphicData uri="http://schemas.openxmlformats.org/drawingml/2006/table">
+            <a:tbl>
+              <a:tblPr firstRow="1" bandRow="1">
+                <a:tableStyleId>{5C22544A-7EE6-4342-B048-85BDC9FD1C3A}</a:tableStyleId>
+              </a:tblPr>
+              <a:tblGrid>
+                <a:gridCol w="3352800"/>
+                <a:gridCol w="3352800"/>
+                <a:gridCol w="3352800"/>
+              </a:tblGrid>
+              <a:tr h="438912">
                 <a:tc>
                   <a:txBody>
                     <a:bodyPr/>
@@ -4814,14 +7944,14 @@
                   </a:tcPr>
                 </a:tc>
               </a:tr>
-              <a:tr h="514350">
+              <a:tr h="438912">
                 <a:tc>
                   <a:txBody>
                     <a:bodyPr/>
                     <a:lstStyle/>
                     <a:p>
                       <a:pPr>
-                        <a:defRPr sz="1300" b="1">
+                        <a:defRPr sz="1200" b="1">
                           <a:latin typeface="Calibri"/>
                         </a:defRPr>
                       </a:pPr>
@@ -4842,7 +7972,7 @@
                     <a:lstStyle/>
                     <a:p>
                       <a:pPr>
-                        <a:defRPr sz="1300">
+                        <a:defRPr sz="1200">
                           <a:latin typeface="Calibri"/>
                         </a:defRPr>
                       </a:pPr>
@@ -4863,7 +7993,7 @@
                     <a:lstStyle/>
                     <a:p>
                       <a:pPr>
-                        <a:defRPr sz="1300">
+                        <a:defRPr sz="1200">
                           <a:latin typeface="Calibri"/>
                         </a:defRPr>
                       </a:pPr>
@@ -4879,19 +8009,19 @@
                   </a:tcPr>
                 </a:tc>
               </a:tr>
-              <a:tr h="514350">
+              <a:tr h="438912">
                 <a:tc>
                   <a:txBody>
                     <a:bodyPr/>
                     <a:lstStyle/>
                     <a:p>
                       <a:pPr>
-                        <a:defRPr sz="1300" b="1">
+                        <a:defRPr sz="1200" b="1">
                           <a:latin typeface="Calibri"/>
                         </a:defRPr>
                       </a:pPr>
                       <a:r>
-                        <a:t>Significant interactions</a:t>
+                        <a:t>Significant interactions (LRT)</a:t>
                       </a:r>
                     </a:p>
                   </a:txBody>
@@ -4903,7 +8033,7 @@
                     <a:lstStyle/>
                     <a:p>
                       <a:pPr>
-                        <a:defRPr sz="1300">
+                        <a:defRPr sz="1200">
                           <a:latin typeface="Calibri"/>
                         </a:defRPr>
                       </a:pPr>
@@ -4920,7 +8050,7 @@
                     <a:lstStyle/>
                     <a:p>
                       <a:pPr>
-                        <a:defRPr sz="1300">
+                        <a:defRPr sz="1200">
                           <a:latin typeface="Calibri"/>
                         </a:defRPr>
                       </a:pPr>
@@ -4932,14 +8062,14 @@
                   <a:tcPr/>
                 </a:tc>
               </a:tr>
-              <a:tr h="514350">
+              <a:tr h="438912">
                 <a:tc>
                   <a:txBody>
                     <a:bodyPr/>
                     <a:lstStyle/>
                     <a:p>
                       <a:pPr>
-                        <a:defRPr sz="1300" b="1">
+                        <a:defRPr sz="1200" b="1">
                           <a:latin typeface="Calibri"/>
                         </a:defRPr>
                       </a:pPr>
@@ -4960,7 +8090,7 @@
                     <a:lstStyle/>
                     <a:p>
                       <a:pPr>
-                        <a:defRPr sz="1300">
+                        <a:defRPr sz="1200">
                           <a:latin typeface="Calibri"/>
                         </a:defRPr>
                       </a:pPr>
@@ -4981,7 +8111,7 @@
                     <a:lstStyle/>
                     <a:p>
                       <a:pPr>
-                        <a:defRPr sz="1300">
+                        <a:defRPr sz="1200">
                           <a:latin typeface="Calibri"/>
                         </a:defRPr>
                       </a:pPr>
@@ -4997,19 +8127,19 @@
                   </a:tcPr>
                 </a:tc>
               </a:tr>
-              <a:tr h="514350">
+              <a:tr h="438912">
                 <a:tc>
                   <a:txBody>
                     <a:bodyPr/>
                     <a:lstStyle/>
                     <a:p>
                       <a:pPr>
-                        <a:defRPr sz="1300" b="1">
+                        <a:defRPr sz="1200" b="1">
                           <a:latin typeface="Calibri"/>
                         </a:defRPr>
                       </a:pPr>
                       <a:r>
-                        <a:t>Genotype DEGs</a:t>
+                        <a:t>Median variance: Sex x Genotype</a:t>
                       </a:r>
                     </a:p>
                   </a:txBody>
@@ -5021,125 +8151,7 @@
                     <a:lstStyle/>
                     <a:p>
                       <a:pPr>
-                        <a:defRPr sz="1300">
-                          <a:latin typeface="Calibri"/>
-                        </a:defRPr>
-                      </a:pPr>
-                      <a:r>
-                        <a:t>2,691</a:t>
-                      </a:r>
-                    </a:p>
-                  </a:txBody>
-                  <a:tcPr/>
-                </a:tc>
-                <a:tc>
-                  <a:txBody>
-                    <a:bodyPr/>
-                    <a:lstStyle/>
-                    <a:p>
-                      <a:pPr>
-                        <a:defRPr sz="1300">
-                          <a:latin typeface="Calibri"/>
-                        </a:defRPr>
-                      </a:pPr>
-                      <a:r>
-                        <a:t>1,054</a:t>
-                      </a:r>
-                    </a:p>
-                  </a:txBody>
-                  <a:tcPr/>
-                </a:tc>
-              </a:tr>
-              <a:tr h="514350">
-                <a:tc>
-                  <a:txBody>
-                    <a:bodyPr/>
-                    <a:lstStyle/>
-                    <a:p>
-                      <a:pPr>
-                        <a:defRPr sz="1300" b="1">
-                          <a:latin typeface="Calibri"/>
-                        </a:defRPr>
-                      </a:pPr>
-                      <a:r>
-                        <a:t>Interaction/Genotype ratio</a:t>
-                      </a:r>
-                    </a:p>
-                  </a:txBody>
-                  <a:tcPr>
-                    <a:solidFill>
-                      <a:srgbClr val="D6E8F7"/>
-                    </a:solidFill>
-                  </a:tcPr>
-                </a:tc>
-                <a:tc>
-                  <a:txBody>
-                    <a:bodyPr/>
-                    <a:lstStyle/>
-                    <a:p>
-                      <a:pPr>
-                        <a:defRPr sz="1300">
-                          <a:latin typeface="Calibri"/>
-                        </a:defRPr>
-                      </a:pPr>
-                      <a:r>
-                        <a:t>0.234</a:t>
-                      </a:r>
-                    </a:p>
-                  </a:txBody>
-                  <a:tcPr>
-                    <a:solidFill>
-                      <a:srgbClr val="D6E8F7"/>
-                    </a:solidFill>
-                  </a:tcPr>
-                </a:tc>
-                <a:tc>
-                  <a:txBody>
-                    <a:bodyPr/>
-                    <a:lstStyle/>
-                    <a:p>
-                      <a:pPr>
-                        <a:defRPr sz="1300">
-                          <a:latin typeface="Calibri"/>
-                        </a:defRPr>
-                      </a:pPr>
-                      <a:r>
-                        <a:t>0.355</a:t>
-                      </a:r>
-                    </a:p>
-                  </a:txBody>
-                  <a:tcPr>
-                    <a:solidFill>
-                      <a:srgbClr val="D6E8F7"/>
-                    </a:solidFill>
-                  </a:tcPr>
-                </a:tc>
-              </a:tr>
-              <a:tr h="514350">
-                <a:tc>
-                  <a:txBody>
-                    <a:bodyPr/>
-                    <a:lstStyle/>
-                    <a:p>
-                      <a:pPr>
-                        <a:defRPr sz="1300" b="1">
-                          <a:latin typeface="Calibri"/>
-                        </a:defRPr>
-                      </a:pPr>
-                      <a:r>
-                        <a:t>Median variance: interaction</a:t>
-                      </a:r>
-                    </a:p>
-                  </a:txBody>
-                  <a:tcPr/>
-                </a:tc>
-                <a:tc>
-                  <a:txBody>
-                    <a:bodyPr/>
-                    <a:lstStyle/>
-                    <a:p>
-                      <a:pPr>
-                        <a:defRPr sz="1300">
+                        <a:defRPr sz="1200">
                           <a:latin typeface="Calibri"/>
                         </a:defRPr>
                       </a:pPr>
@@ -5156,7 +8168,7 @@
                     <a:lstStyle/>
                     <a:p>
                       <a:pPr>
-                        <a:defRPr sz="1300">
+                        <a:defRPr sz="1200">
                           <a:latin typeface="Calibri"/>
                         </a:defRPr>
                       </a:pPr>
@@ -5168,14 +8180,14 @@
                   <a:tcPr/>
                 </a:tc>
               </a:tr>
-              <a:tr h="514350">
+              <a:tr h="438912">
                 <a:tc>
                   <a:txBody>
                     <a:bodyPr/>
                     <a:lstStyle/>
                     <a:p>
                       <a:pPr>
-                        <a:defRPr sz="1300" b="1">
+                        <a:defRPr sz="1200" b="1">
                           <a:latin typeface="Calibri"/>
                         </a:defRPr>
                       </a:pPr>
@@ -5196,7 +8208,7 @@
                     <a:lstStyle/>
                     <a:p>
                       <a:pPr>
-                        <a:defRPr sz="1300">
+                        <a:defRPr sz="1200">
                           <a:latin typeface="Calibri"/>
                         </a:defRPr>
                       </a:pPr>
@@ -5217,7 +8229,7 @@
                     <a:lstStyle/>
                     <a:p>
                       <a:pPr>
-                        <a:defRPr sz="1300">
+                        <a:defRPr sz="1200">
                           <a:latin typeface="Calibri"/>
                         </a:defRPr>
                       </a:pPr>
@@ -5233,6 +8245,242 @@
                   </a:tcPr>
                 </a:tc>
               </a:tr>
+              <a:tr h="438912">
+                <a:tc>
+                  <a:txBody>
+                    <a:bodyPr/>
+                    <a:lstStyle/>
+                    <a:p>
+                      <a:pPr>
+                        <a:defRPr sz="1200" b="1">
+                          <a:latin typeface="Calibri"/>
+                        </a:defRPr>
+                      </a:pPr>
+                      <a:r>
+                        <a:t>Directional concordance</a:t>
+                      </a:r>
+                    </a:p>
+                  </a:txBody>
+                  <a:tcPr/>
+                </a:tc>
+                <a:tc>
+                  <a:txBody>
+                    <a:bodyPr/>
+                    <a:lstStyle/>
+                    <a:p>
+                      <a:pPr>
+                        <a:defRPr sz="1200">
+                          <a:latin typeface="Calibri"/>
+                        </a:defRPr>
+                      </a:pPr>
+                      <a:r>
+                        <a:t>99.0%</a:t>
+                      </a:r>
+                    </a:p>
+                  </a:txBody>
+                  <a:tcPr/>
+                </a:tc>
+                <a:tc>
+                  <a:txBody>
+                    <a:bodyPr/>
+                    <a:lstStyle/>
+                    <a:p>
+                      <a:pPr>
+                        <a:defRPr sz="1200">
+                          <a:latin typeface="Calibri"/>
+                        </a:defRPr>
+                      </a:pPr>
+                      <a:r>
+                        <a:t>99.5%</a:t>
+                      </a:r>
+                    </a:p>
+                  </a:txBody>
+                  <a:tcPr/>
+                </a:tc>
+              </a:tr>
+              <a:tr h="438912">
+                <a:tc>
+                  <a:txBody>
+                    <a:bodyPr/>
+                    <a:lstStyle/>
+                    <a:p>
+                      <a:pPr>
+                        <a:defRPr sz="1200" b="1">
+                          <a:latin typeface="Calibri"/>
+                        </a:defRPr>
+                      </a:pPr>
+                      <a:r>
+                        <a:t>Unified DEGs: ~ 0 + GroupDepot</a:t>
+                      </a:r>
+                    </a:p>
+                  </a:txBody>
+                  <a:tcPr>
+                    <a:solidFill>
+                      <a:srgbClr val="D6E8F7"/>
+                    </a:solidFill>
+                  </a:tcPr>
+                </a:tc>
+                <a:tc>
+                  <a:txBody>
+                    <a:bodyPr/>
+                    <a:lstStyle/>
+                    <a:p>
+                      <a:pPr>
+                        <a:defRPr sz="1200">
+                          <a:latin typeface="Calibri"/>
+                        </a:defRPr>
+                      </a:pPr>
+                      <a:r>
+                        <a:t>3,022</a:t>
+                      </a:r>
+                    </a:p>
+                  </a:txBody>
+                  <a:tcPr>
+                    <a:solidFill>
+                      <a:srgbClr val="D6E8F7"/>
+                    </a:solidFill>
+                  </a:tcPr>
+                </a:tc>
+                <a:tc>
+                  <a:txBody>
+                    <a:bodyPr/>
+                    <a:lstStyle/>
+                    <a:p>
+                      <a:pPr>
+                        <a:defRPr sz="1200">
+                          <a:latin typeface="Calibri"/>
+                        </a:defRPr>
+                      </a:pPr>
+                      <a:r>
+                        <a:t>1,159</a:t>
+                      </a:r>
+                    </a:p>
+                  </a:txBody>
+                  <a:tcPr>
+                    <a:solidFill>
+                      <a:srgbClr val="D6E8F7"/>
+                    </a:solidFill>
+                  </a:tcPr>
+                </a:tc>
+              </a:tr>
+              <a:tr h="438912">
+                <a:tc>
+                  <a:txBody>
+                    <a:bodyPr/>
+                    <a:lstStyle/>
+                    <a:p>
+                      <a:pPr>
+                        <a:defRPr sz="1200" b="1">
+                          <a:latin typeface="Calibri"/>
+                        </a:defRPr>
+                      </a:pPr>
+                      <a:r>
+                        <a:t>Unified DEGs: ~ Sex + GroupDepot</a:t>
+                      </a:r>
+                    </a:p>
+                  </a:txBody>
+                  <a:tcPr/>
+                </a:tc>
+                <a:tc>
+                  <a:txBody>
+                    <a:bodyPr/>
+                    <a:lstStyle/>
+                    <a:p>
+                      <a:pPr>
+                        <a:defRPr sz="1200">
+                          <a:latin typeface="Calibri"/>
+                        </a:defRPr>
+                      </a:pPr>
+                      <a:r>
+                        <a:t>2,777</a:t>
+                      </a:r>
+                    </a:p>
+                  </a:txBody>
+                  <a:tcPr/>
+                </a:tc>
+                <a:tc>
+                  <a:txBody>
+                    <a:bodyPr/>
+                    <a:lstStyle/>
+                    <a:p>
+                      <a:pPr>
+                        <a:defRPr sz="1200">
+                          <a:latin typeface="Calibri"/>
+                        </a:defRPr>
+                      </a:pPr>
+                      <a:r>
+                        <a:t>1,089</a:t>
+                      </a:r>
+                    </a:p>
+                  </a:txBody>
+                  <a:tcPr/>
+                </a:tc>
+              </a:tr>
+              <a:tr h="438912">
+                <a:tc>
+                  <a:txBody>
+                    <a:bodyPr/>
+                    <a:lstStyle/>
+                    <a:p>
+                      <a:pPr>
+                        <a:defRPr sz="1200" b="1">
+                          <a:latin typeface="Calibri"/>
+                        </a:defRPr>
+                      </a:pPr>
+                      <a:r>
+                        <a:t>Net change (unified)</a:t>
+                      </a:r>
+                    </a:p>
+                  </a:txBody>
+                  <a:tcPr>
+                    <a:solidFill>
+                      <a:srgbClr val="FCF3CF"/>
+                    </a:solidFill>
+                  </a:tcPr>
+                </a:tc>
+                <a:tc>
+                  <a:txBody>
+                    <a:bodyPr/>
+                    <a:lstStyle/>
+                    <a:p>
+                      <a:pPr>
+                        <a:defRPr sz="1200">
+                          <a:latin typeface="Calibri"/>
+                        </a:defRPr>
+                      </a:pPr>
+                      <a:r>
+                        <a:t>-245 (-8.1%)</a:t>
+                      </a:r>
+                    </a:p>
+                  </a:txBody>
+                  <a:tcPr>
+                    <a:solidFill>
+                      <a:srgbClr val="FCF3CF"/>
+                    </a:solidFill>
+                  </a:tcPr>
+                </a:tc>
+                <a:tc>
+                  <a:txBody>
+                    <a:bodyPr/>
+                    <a:lstStyle/>
+                    <a:p>
+                      <a:pPr>
+                        <a:defRPr sz="1200">
+                          <a:latin typeface="Calibri"/>
+                        </a:defRPr>
+                      </a:pPr>
+                      <a:r>
+                        <a:t>-70 (-6.0%)</a:t>
+                      </a:r>
+                    </a:p>
+                  </a:txBody>
+                  <a:tcPr>
+                    <a:solidFill>
+                      <a:srgbClr val="FCF3CF"/>
+                    </a:solidFill>
+                  </a:tcPr>
+                </a:tc>
+              </a:tr>
             </a:tbl>
           </a:graphicData>
         </a:graphic>
@@ -5245,7 +8493,7 @@
         </p:nvSpPr>
         <p:spPr>
           <a:xfrm>
-            <a:off x="914400" y="5486400"/>
+            <a:off x="914400" y="5760720"/>
             <a:ext cx="10058400" cy="731520"/>
           </a:xfrm>
           <a:prstGeom prst="rect">
@@ -5268,7 +8516,7 @@
               </a:defRPr>
             </a:pPr>
             <a:r>
-              <a:t>All metrics converge: the KAT8-KD transcriptional response is overwhelmingly sex-independent in both depots.</a:t>
+              <a:t>All metrics converge: the KAT8-KD response is overwhelmingly sex-independent. With a balanced design and n=38, the simpler model (~ 0 + GroupDepot) maximizes power.</a:t>
             </a:r>
           </a:p>
         </p:txBody>
@@ -5281,7 +8529,7 @@
 </p:sld>
 </file>
 
-<file path=ppt/slides/slide15.xml><?xml version="1.0" encoding="utf-8"?>
+<file path=ppt/slides/slide21.xml><?xml version="1.0" encoding="utf-8"?>
 <p:sld xmlns:a="http://schemas.openxmlformats.org/drawingml/2006/main" xmlns:p="http://schemas.openxmlformats.org/presentationml/2006/main" xmlns:r="http://schemas.openxmlformats.org/officeDocument/2006/relationships">
   <p:cSld>
     <p:bg>
@@ -5307,7 +8555,7 @@
         </p:nvSpPr>
         <p:spPr>
           <a:xfrm>
-            <a:off x="914400" y="914400"/>
+            <a:off x="914400" y="457200"/>
             <a:ext cx="10058400" cy="914400"/>
           </a:xfrm>
           <a:prstGeom prst="rect">
@@ -5330,7 +8578,7 @@
               </a:defRPr>
             </a:pPr>
             <a:r>
-              <a:t>Conclusion</a:t>
+              <a:t>Conclusion &amp; Analysis Decision</a:t>
             </a:r>
           </a:p>
         </p:txBody>
@@ -5343,8 +8591,8 @@
         </p:nvSpPr>
         <p:spPr>
           <a:xfrm>
-            <a:off x="1371600" y="2011680"/>
-            <a:ext cx="9144000" cy="4114800"/>
+            <a:off x="914400" y="1645920"/>
+            <a:ext cx="10058400" cy="4754880"/>
           </a:xfrm>
           <a:prstGeom prst="rect">
             <a:avLst/>
@@ -5361,7 +8609,7 @@
               <a:spcAft>
                 <a:spcPts val="600"/>
               </a:spcAft>
-              <a:defRPr sz="1600">
+              <a:defRPr sz="1400">
                 <a:solidFill>
                   <a:srgbClr val="FFFFFF"/>
                 </a:solidFill>
@@ -5369,31 +8617,28 @@
               </a:defRPr>
             </a:pPr>
             <a:r>
-              <a:t>Only 2-4% of genes show significant Sex x Genotype interaction</a:t>
-            </a:r>
-          </a:p>
-          <a:p>
-            <a:pPr>
-              <a:spcAft>
-                <a:spcPts val="600"/>
-              </a:spcAft>
-              <a:defRPr sz="1600">
+              <a:t>CAN WE POOL SEXES?    YES</a:t>
+            </a:r>
+          </a:p>
+          <a:p>
+            <a:pPr>
+              <a:spcAft>
+                <a:spcPts val="600"/>
+              </a:spcAft>
+              <a:defRPr sz="1400">
                 <a:solidFill>
                   <a:srgbClr val="FFFFFF"/>
                 </a:solidFill>
                 <a:latin typeface="Calibri"/>
               </a:defRPr>
             </a:pPr>
-            <a:r>
-              <a:t>Pi0 estimates confirm 85-87% of genes are true nulls (no interaction)</a:t>
-            </a:r>
-          </a:p>
-          <a:p>
-            <a:pPr>
-              <a:spcAft>
-                <a:spcPts val="600"/>
-              </a:spcAft>
-              <a:defRPr sz="1600">
+          </a:p>
+          <a:p>
+            <a:pPr>
+              <a:spcAft>
+                <a:spcPts val="600"/>
+              </a:spcAft>
+              <a:defRPr sz="1400">
                 <a:solidFill>
                   <a:srgbClr val="FFFFFF"/>
                 </a:solidFill>
@@ -5401,15 +8646,15 @@
               </a:defRPr>
             </a:pPr>
             <a:r>
-              <a:t>The interaction term explains only ~2% of per-gene variance vs. 17-33% for Genotype</a:t>
-            </a:r>
-          </a:p>
-          <a:p>
-            <a:pPr>
-              <a:spcAft>
-                <a:spcPts val="600"/>
-              </a:spcAft>
-              <a:defRPr sz="1600">
+              <a:t>EVIDENCE:</a:t>
+            </a:r>
+          </a:p>
+          <a:p>
+            <a:pPr>
+              <a:spcAft>
+                <a:spcPts val="600"/>
+              </a:spcAft>
+              <a:defRPr sz="1400">
                 <a:solidFill>
                   <a:srgbClr val="FFFFFF"/>
                 </a:solidFill>
@@ -5417,28 +8662,31 @@
               </a:defRPr>
             </a:pPr>
             <a:r>
-              <a:t>Sex-stratified KD effects are positively correlated (r = 0.61-0.73)</a:t>
-            </a:r>
-          </a:p>
-          <a:p>
-            <a:pPr>
-              <a:spcAft>
-                <a:spcPts val="600"/>
-              </a:spcAft>
-              <a:defRPr sz="1600">
+              <a:t>  - Only 2-4% of genes show significant Sex x Genotype interaction</a:t>
+            </a:r>
+          </a:p>
+          <a:p>
+            <a:pPr>
+              <a:spcAft>
+                <a:spcPts val="600"/>
+              </a:spcAft>
+              <a:defRPr sz="1400">
                 <a:solidFill>
                   <a:srgbClr val="FFFFFF"/>
                 </a:solidFill>
                 <a:latin typeface="Calibri"/>
               </a:defRPr>
             </a:pPr>
-          </a:p>
-          <a:p>
-            <a:pPr>
-              <a:spcAft>
-                <a:spcPts val="600"/>
-              </a:spcAft>
-              <a:defRPr sz="1600">
+            <a:r>
+              <a:t>  - Pi0 = 0.85-0.87: 85-87% of genes are true nulls (no interaction)</a:t>
+            </a:r>
+          </a:p>
+          <a:p>
+            <a:pPr>
+              <a:spcAft>
+                <a:spcPts val="600"/>
+              </a:spcAft>
+              <a:defRPr sz="1400">
                 <a:solidFill>
                   <a:srgbClr val="FFFFFF"/>
                 </a:solidFill>
@@ -5446,15 +8694,15 @@
               </a:defRPr>
             </a:pPr>
             <a:r>
-              <a:t>JUSTIFICATION: Male and female adipose tissue respond similarly</a:t>
-            </a:r>
-          </a:p>
-          <a:p>
-            <a:pPr>
-              <a:spcAft>
-                <a:spcPts val="600"/>
-              </a:spcAft>
-              <a:defRPr sz="1600">
+              <a:t>  - The interaction term explains only ~2% of variance vs. 17-33% for Genotype</a:t>
+            </a:r>
+          </a:p>
+          <a:p>
+            <a:pPr>
+              <a:spcAft>
+                <a:spcPts val="600"/>
+              </a:spcAft>
+              <a:defRPr sz="1400">
                 <a:solidFill>
                   <a:srgbClr val="FFFFFF"/>
                 </a:solidFill>
@@ -5462,44 +8710,44 @@
               </a:defRPr>
             </a:pPr>
             <a:r>
-              <a:t>to KAT8 knockdown. Pooling sexes for the primary DEG analysis is appropriate.</a:t>
-            </a:r>
-          </a:p>
-          <a:p>
-            <a:pPr>
-              <a:spcAft>
-                <a:spcPts val="600"/>
-              </a:spcAft>
-              <a:defRPr sz="1600">
+              <a:t>  - Sex-stratified concordance: 99%+ directional agreement</a:t>
+            </a:r>
+          </a:p>
+          <a:p>
+            <a:pPr>
+              <a:spcAft>
+                <a:spcPts val="600"/>
+              </a:spcAft>
+              <a:defRPr sz="1400">
                 <a:solidFill>
                   <a:srgbClr val="FFFFFF"/>
                 </a:solidFill>
                 <a:latin typeface="Calibri"/>
               </a:defRPr>
             </a:pPr>
-          </a:p>
-          <a:p>
-            <a:pPr>
-              <a:spcAft>
-                <a:spcPts val="600"/>
-              </a:spcAft>
-              <a:defRPr sz="1600">
+            <a:r>
+              <a:t>  - Balanced design: sex CANNOT confound genotype effect</a:t>
+            </a:r>
+          </a:p>
+          <a:p>
+            <a:pPr>
+              <a:spcAft>
+                <a:spcPts val="600"/>
+              </a:spcAft>
+              <a:defRPr sz="1400">
                 <a:solidFill>
                   <a:srgbClr val="FFFFFF"/>
                 </a:solidFill>
                 <a:latin typeface="Calibri"/>
               </a:defRPr>
             </a:pPr>
-            <a:r>
-              <a:t>CAVEAT: With n = 4-5 per group, subtle sex-dependent effects</a:t>
-            </a:r>
-          </a:p>
-          <a:p>
-            <a:pPr>
-              <a:spcAft>
-                <a:spcPts val="600"/>
-              </a:spcAft>
-              <a:defRPr sz="1600">
+          </a:p>
+          <a:p>
+            <a:pPr>
+              <a:spcAft>
+                <a:spcPts val="600"/>
+              </a:spcAft>
+              <a:defRPr sz="1400">
                 <a:solidFill>
                   <a:srgbClr val="FFFFFF"/>
                 </a:solidFill>
@@ -5507,15 +8755,15 @@
               </a:defRPr>
             </a:pPr>
             <a:r>
-              <a:t>may be undetected. The 630 (iWAT) / 374 (gWAT) interaction genes</a:t>
-            </a:r>
-          </a:p>
-          <a:p>
-            <a:pPr>
-              <a:spcAft>
-                <a:spcPts val="600"/>
-              </a:spcAft>
-              <a:defRPr sz="1600">
+              <a:t>DECISION:  Design = ~ 0 + GroupDepot  (unified, no Sex covariate)</a:t>
+            </a:r>
+          </a:p>
+          <a:p>
+            <a:pPr>
+              <a:spcAft>
+                <a:spcPts val="600"/>
+              </a:spcAft>
+              <a:defRPr sz="1400">
                 <a:solidFill>
                   <a:srgbClr val="FFFFFF"/>
                 </a:solidFill>
@@ -5523,209 +8771,148 @@
               </a:defRPr>
             </a:pPr>
             <a:r>
-              <a:t>warrant further exploration for sex-specific biology.</a:t>
-            </a:r>
-          </a:p>
-        </p:txBody>
-      </p:sp>
-    </p:spTree>
-  </p:cSld>
-  <p:clrMapOvr>
-    <a:masterClrMapping/>
-  </p:clrMapOvr>
-</p:sld>
-</file>
-
-<file path=ppt/slides/slide2.xml><?xml version="1.0" encoding="utf-8"?>
-<p:sld xmlns:a="http://schemas.openxmlformats.org/drawingml/2006/main" xmlns:p="http://schemas.openxmlformats.org/presentationml/2006/main" xmlns:r="http://schemas.openxmlformats.org/officeDocument/2006/relationships">
-  <p:cSld>
-    <p:spTree>
-      <p:nvGrpSpPr>
-        <p:cNvPr id="1" name=""/>
-        <p:cNvGrpSpPr/>
-        <p:nvPr/>
-      </p:nvGrpSpPr>
-      <p:grpSpPr/>
-      <p:sp>
-        <p:nvSpPr>
-          <p:cNvPr id="2" name="TextBox 1"/>
-          <p:cNvSpPr txBox="1"/>
-          <p:nvPr/>
-        </p:nvSpPr>
-        <p:spPr>
-          <a:xfrm>
-            <a:off x="548640" y="274320"/>
-            <a:ext cx="10972800" cy="548640"/>
-          </a:xfrm>
-          <a:prstGeom prst="rect">
-            <a:avLst/>
-          </a:prstGeom>
-          <a:noFill/>
-        </p:spPr>
-        <p:txBody>
-          <a:bodyPr wrap="square">
-            <a:spAutoFit/>
-          </a:bodyPr>
-          <a:lstStyle/>
-          <a:p>
-            <a:pPr algn="l">
-              <a:defRPr sz="2800" b="1">
-                <a:solidFill>
-                  <a:srgbClr val="1B3A5C"/>
-                </a:solidFill>
-                <a:latin typeface="Calibri"/>
-              </a:defRPr>
-            </a:pPr>
-            <a:r>
-              <a:t>Study Design</a:t>
-            </a:r>
-          </a:p>
-        </p:txBody>
-      </p:sp>
-      <p:sp>
-        <p:nvSpPr>
-          <p:cNvPr id="3" name="TextBox 2"/>
-          <p:cNvSpPr txBox="1"/>
-          <p:nvPr/>
-        </p:nvSpPr>
-        <p:spPr>
-          <a:xfrm>
-            <a:off x="731520" y="1097280"/>
-            <a:ext cx="5486400" cy="4572000"/>
-          </a:xfrm>
-          <a:prstGeom prst="rect">
-            <a:avLst/>
-          </a:prstGeom>
-          <a:noFill/>
-        </p:spPr>
-        <p:txBody>
-          <a:bodyPr wrap="square">
-            <a:spAutoFit/>
-          </a:bodyPr>
-          <a:lstStyle/>
-          <a:p>
-            <a:pPr>
-              <a:spcAft>
-                <a:spcPts val="600"/>
-              </a:spcAft>
-              <a:defRPr sz="1600">
-                <a:solidFill>
-                  <a:srgbClr val="000000"/>
-                </a:solidFill>
-                <a:latin typeface="Calibri"/>
-              </a:defRPr>
-            </a:pPr>
-            <a:r>
-              <a:t>2 x 2 factorial design: Sex (F, M) x Genotype (CTL, KAT8-KD)</a:t>
-            </a:r>
-          </a:p>
-          <a:p>
-            <a:pPr>
-              <a:spcAft>
-                <a:spcPts val="600"/>
-              </a:spcAft>
-              <a:defRPr sz="1600">
-                <a:solidFill>
-                  <a:srgbClr val="000000"/>
-                </a:solidFill>
-                <a:latin typeface="Calibri"/>
-              </a:defRPr>
-            </a:pPr>
-            <a:r>
-              <a:t>Two adipose depots analyzed separately: iWAT and gWAT</a:t>
-            </a:r>
-          </a:p>
-          <a:p>
-            <a:pPr>
-              <a:spcAft>
-                <a:spcPts val="600"/>
-              </a:spcAft>
-              <a:defRPr sz="1600">
-                <a:solidFill>
-                  <a:srgbClr val="000000"/>
-                </a:solidFill>
-                <a:latin typeface="Calibri"/>
-              </a:defRPr>
-            </a:pPr>
-            <a:r>
-              <a:t>40 samples total, 2 outliers removed (JS_08, JS_28) -&gt; 38 samples</a:t>
-            </a:r>
-          </a:p>
-          <a:p>
-            <a:pPr>
-              <a:spcAft>
-                <a:spcPts val="600"/>
-              </a:spcAft>
-              <a:defRPr sz="1600">
-                <a:solidFill>
-                  <a:srgbClr val="000000"/>
-                </a:solidFill>
-                <a:latin typeface="Calibri"/>
-              </a:defRPr>
-            </a:pPr>
-            <a:r>
-              <a:t>Per depot: 19 samples (after outlier removal)</a:t>
-            </a:r>
-          </a:p>
-          <a:p>
-            <a:pPr>
-              <a:spcAft>
-                <a:spcPts val="600"/>
-              </a:spcAft>
-              <a:defRPr sz="1600">
-                <a:solidFill>
-                  <a:srgbClr val="000000"/>
-                </a:solidFill>
-                <a:latin typeface="Calibri"/>
-              </a:defRPr>
-            </a:pPr>
-          </a:p>
-          <a:p>
-            <a:pPr>
-              <a:spcAft>
-                <a:spcPts val="600"/>
-              </a:spcAft>
-              <a:defRPr sz="1600">
-                <a:solidFill>
-                  <a:srgbClr val="000000"/>
-                </a:solidFill>
-                <a:latin typeface="Calibri"/>
-              </a:defRPr>
-            </a:pPr>
-            <a:r>
-              <a:t>Group sizes per depot:</a:t>
-            </a:r>
-          </a:p>
-          <a:p>
-            <a:pPr>
-              <a:spcAft>
-                <a:spcPts val="600"/>
-              </a:spcAft>
-              <a:defRPr sz="1600">
-                <a:solidFill>
-                  <a:srgbClr val="000000"/>
-                </a:solidFill>
-                <a:latin typeface="Calibri"/>
-              </a:defRPr>
-            </a:pPr>
-            <a:r>
-              <a:t>   CTL Female:  5     |  KAT8-KD Female:  4</a:t>
-            </a:r>
-          </a:p>
-          <a:p>
-            <a:pPr>
-              <a:spcAft>
-                <a:spcPts val="600"/>
-              </a:spcAft>
-              <a:defRPr sz="1600">
-                <a:solidFill>
-                  <a:srgbClr val="000000"/>
-                </a:solidFill>
-                <a:latin typeface="Calibri"/>
-              </a:defRPr>
-            </a:pPr>
-            <a:r>
-              <a:t>   CTL Male:    5     |  KAT8-KD Male:    5</a:t>
+              <a:t>  - All 38 samples in one model, depot-specific KAT8 contrasts extracted</a:t>
+            </a:r>
+          </a:p>
+          <a:p>
+            <a:pPr>
+              <a:spcAft>
+                <a:spcPts val="600"/>
+              </a:spcAft>
+              <a:defRPr sz="1400">
+                <a:solidFill>
+                  <a:srgbClr val="FFFFFF"/>
+                </a:solidFill>
+                <a:latin typeface="Calibri"/>
+              </a:defRPr>
+            </a:pPr>
+            <a:r>
+              <a:t>  - No Sex covariate needed: balanced design eliminates confounding</a:t>
+            </a:r>
+          </a:p>
+          <a:p>
+            <a:pPr>
+              <a:spcAft>
+                <a:spcPts val="600"/>
+              </a:spcAft>
+              <a:defRPr sz="1400">
+                <a:solidFill>
+                  <a:srgbClr val="FFFFFF"/>
+                </a:solidFill>
+                <a:latin typeface="Calibri"/>
+              </a:defRPr>
+            </a:pPr>
+            <a:r>
+              <a:t>  - Adding Sex to the unified model COSTS power (-8% iWAT, -6% gWAT DEGs)</a:t>
+            </a:r>
+          </a:p>
+          <a:p>
+            <a:pPr>
+              <a:spcAft>
+                <a:spcPts val="600"/>
+              </a:spcAft>
+              <a:defRPr sz="1400">
+                <a:solidFill>
+                  <a:srgbClr val="FFFFFF"/>
+                </a:solidFill>
+                <a:latin typeface="Calibri"/>
+              </a:defRPr>
+            </a:pPr>
+            <a:r>
+              <a:t>  - logFC correlation r &gt; 0.94 between +/- Sex models -&gt; same biology</a:t>
+            </a:r>
+          </a:p>
+          <a:p>
+            <a:pPr>
+              <a:spcAft>
+                <a:spcPts val="600"/>
+              </a:spcAft>
+              <a:defRPr sz="1400">
+                <a:solidFill>
+                  <a:srgbClr val="FFFFFF"/>
+                </a:solidFill>
+                <a:latin typeface="Calibri"/>
+              </a:defRPr>
+            </a:pPr>
+          </a:p>
+          <a:p>
+            <a:pPr>
+              <a:spcAft>
+                <a:spcPts val="600"/>
+              </a:spcAft>
+              <a:defRPr sz="1400">
+                <a:solidFill>
+                  <a:srgbClr val="FFFFFF"/>
+                </a:solidFill>
+                <a:latin typeface="Calibri"/>
+              </a:defRPr>
+            </a:pPr>
+            <a:r>
+              <a:t>CAVEAT (mention in Discussion if reviewers ask):</a:t>
+            </a:r>
+          </a:p>
+          <a:p>
+            <a:pPr>
+              <a:spcAft>
+                <a:spcPts val="600"/>
+              </a:spcAft>
+              <a:defRPr sz="1400">
+                <a:solidFill>
+                  <a:srgbClr val="FFFFFF"/>
+                </a:solidFill>
+                <a:latin typeface="Calibri"/>
+              </a:defRPr>
+            </a:pPr>
+            <a:r>
+              <a:t>  - 630 (iWAT) / 374 (gWAT) genes DO show sex-dependent KD responses</a:t>
+            </a:r>
+          </a:p>
+          <a:p>
+            <a:pPr>
+              <a:spcAft>
+                <a:spcPts val="600"/>
+              </a:spcAft>
+              <a:defRPr sz="1400">
+                <a:solidFill>
+                  <a:srgbClr val="FFFFFF"/>
+                </a:solidFill>
+                <a:latin typeface="Calibri"/>
+              </a:defRPr>
+            </a:pPr>
+            <a:r>
+              <a:t>  - Male KD samples appear more extreme in PCA (especially iWAT)</a:t>
+            </a:r>
+          </a:p>
+          <a:p>
+            <a:pPr>
+              <a:spcAft>
+                <a:spcPts val="600"/>
+              </a:spcAft>
+              <a:defRPr sz="1400">
+                <a:solidFill>
+                  <a:srgbClr val="FFFFFF"/>
+                </a:solidFill>
+                <a:latin typeface="Calibri"/>
+              </a:defRPr>
+            </a:pPr>
+            <a:r>
+              <a:t>  - gWAT sex-stratified correlation is moderate (r = 0.61)</a:t>
+            </a:r>
+          </a:p>
+          <a:p>
+            <a:pPr>
+              <a:spcAft>
+                <a:spcPts val="600"/>
+              </a:spcAft>
+              <a:defRPr sz="1400">
+                <a:solidFill>
+                  <a:srgbClr val="FFFFFF"/>
+                </a:solidFill>
+                <a:latin typeface="Calibri"/>
+              </a:defRPr>
+            </a:pPr>
+            <a:r>
+              <a:t>  - These observations warrant follow-up investigation</a:t>
             </a:r>
           </a:p>
         </p:txBody>
@@ -5764,7 +8951,7 @@
         </p:nvSpPr>
         <p:spPr>
           <a:xfrm>
-            <a:off x="914400" y="1371600"/>
+            <a:off x="914400" y="914400"/>
             <a:ext cx="10058400" cy="914400"/>
           </a:xfrm>
           <a:prstGeom prst="rect">
@@ -5800,7 +8987,7 @@
         </p:nvSpPr>
         <p:spPr>
           <a:xfrm>
-            <a:off x="1371600" y="2743200"/>
+            <a:off x="1371600" y="2011680"/>
             <a:ext cx="9144000" cy="1097280"/>
           </a:xfrm>
           <a:prstGeom prst="rect">
@@ -5840,8 +9027,8 @@
         </p:nvSpPr>
         <p:spPr>
           <a:xfrm>
-            <a:off x="1371600" y="4389120"/>
-            <a:ext cx="9144000" cy="914400"/>
+            <a:off x="914400" y="3657600"/>
+            <a:ext cx="10058400" cy="2743200"/>
           </a:xfrm>
           <a:prstGeom prst="rect">
             <a:avLst/>
@@ -5854,7 +9041,7 @@
           </a:bodyPr>
           <a:lstStyle/>
           <a:p>
-            <a:pPr algn="ctr">
+            <a:pPr algn="l">
               <a:defRPr sz="1600" b="0">
                 <a:solidFill>
                   <a:srgbClr val="666666"/>
@@ -5863,11 +9050,30 @@
               </a:defRPr>
             </a:pPr>
             <a:r>
-              <a:t>If the answer is NO (for most genes), we can justify pooling sexes</a:t>
+              <a:t>Why this matters:</a:t>
             </a:r>
             <a:br/>
-            <a:r>
-              <a:t>in the primary DEG analysis, increasing statistical power.</a:t>
+            <a:br/>
+            <a:r>
+              <a:t>1. If YES for most genes: We must analyze males and females separately</a:t>
+            </a:r>
+            <a:br/>
+            <a:r>
+              <a:t>   (splitting would halve our sample size -&gt; less power to detect effects)</a:t>
+            </a:r>
+            <a:br/>
+            <a:br/>
+            <a:r>
+              <a:t>2. If NO for most genes: We can include sex as a COVARIATE</a:t>
+            </a:r>
+            <a:br/>
+            <a:r>
+              <a:t>   (this absorbs sex-related noise -&gt; MORE power to detect KD effects)</a:t>
+            </a:r>
+            <a:br/>
+            <a:br/>
+            <a:r>
+              <a:t>3. NIH and most journals now require addressing sex as a biological variable (SABV)</a:t>
             </a:r>
           </a:p>
         </p:txBody>
@@ -5883,6 +9089,14 @@
 <file path=ppt/slides/slide4.xml><?xml version="1.0" encoding="utf-8"?>
 <p:sld xmlns:a="http://schemas.openxmlformats.org/drawingml/2006/main" xmlns:p="http://schemas.openxmlformats.org/presentationml/2006/main" xmlns:r="http://schemas.openxmlformats.org/officeDocument/2006/relationships">
   <p:cSld>
+    <p:bg>
+      <p:bgPr>
+        <a:solidFill>
+          <a:srgbClr val="FDF2E9"/>
+        </a:solidFill>
+        <a:effectLst/>
+      </p:bgPr>
+    </p:bg>
     <p:spTree>
       <p:nvGrpSpPr>
         <p:cNvPr id="1" name=""/>
@@ -5921,7 +9135,7 @@
               </a:defRPr>
             </a:pPr>
             <a:r>
-              <a:t>Method: Likelihood Ratio Test (LRT)</a:t>
+              <a:t>Background: What is a Covariate?</a:t>
             </a:r>
           </a:p>
         </p:txBody>
@@ -5934,8 +9148,8 @@
         </p:nvSpPr>
         <p:spPr>
           <a:xfrm>
-            <a:off x="731520" y="1188720"/>
-            <a:ext cx="10515600" cy="5029200"/>
+            <a:off x="548640" y="1097280"/>
+            <a:ext cx="10972800" cy="5486400"/>
           </a:xfrm>
           <a:prstGeom prst="rect">
             <a:avLst/>
@@ -5952,179 +9166,246 @@
               <a:spcAft>
                 <a:spcPts val="600"/>
               </a:spcAft>
-              <a:defRPr sz="1500">
-                <a:solidFill>
-                  <a:srgbClr val="000000"/>
-                </a:solidFill>
-                <a:latin typeface="Calibri"/>
-              </a:defRPr>
-            </a:pPr>
-            <a:r>
-              <a:t>Tool: DESeq2 (Bioconductor), run separately per depot</a:t>
-            </a:r>
-          </a:p>
-          <a:p>
-            <a:pPr>
-              <a:spcAft>
-                <a:spcPts val="600"/>
-              </a:spcAft>
-              <a:defRPr sz="1500">
-                <a:solidFill>
-                  <a:srgbClr val="000000"/>
-                </a:solidFill>
-                <a:latin typeface="Calibri"/>
-              </a:defRPr>
-            </a:pPr>
-          </a:p>
-          <a:p>
-            <a:pPr>
-              <a:spcAft>
-                <a:spcPts val="600"/>
-              </a:spcAft>
-              <a:defRPr sz="1500">
-                <a:solidFill>
-                  <a:srgbClr val="000000"/>
-                </a:solidFill>
-                <a:latin typeface="Calibri"/>
-              </a:defRPr>
-            </a:pPr>
-            <a:r>
-              <a:t>Full model:      ~ Sex + Genotype + Sex:Genotype</a:t>
-            </a:r>
-          </a:p>
-          <a:p>
-            <a:pPr>
-              <a:spcAft>
-                <a:spcPts val="600"/>
-              </a:spcAft>
-              <a:defRPr sz="1500">
-                <a:solidFill>
-                  <a:srgbClr val="000000"/>
-                </a:solidFill>
-                <a:latin typeface="Calibri"/>
-              </a:defRPr>
-            </a:pPr>
-            <a:r>
-              <a:t>Reduced model:  ~ Sex + Genotype</a:t>
-            </a:r>
-          </a:p>
-          <a:p>
-            <a:pPr>
-              <a:spcAft>
-                <a:spcPts val="600"/>
-              </a:spcAft>
-              <a:defRPr sz="1500">
-                <a:solidFill>
-                  <a:srgbClr val="000000"/>
-                </a:solidFill>
-                <a:latin typeface="Calibri"/>
-              </a:defRPr>
-            </a:pPr>
-          </a:p>
-          <a:p>
-            <a:pPr>
-              <a:spcAft>
-                <a:spcPts val="600"/>
-              </a:spcAft>
-              <a:defRPr sz="1500">
-                <a:solidFill>
-                  <a:srgbClr val="000000"/>
-                </a:solidFill>
-                <a:latin typeface="Calibri"/>
-              </a:defRPr>
-            </a:pPr>
-            <a:r>
-              <a:t>The LRT asks: does adding the interaction term (Sex:Genotype) significantly improve the model fit for each gene?</a:t>
-            </a:r>
-          </a:p>
-          <a:p>
-            <a:pPr>
-              <a:spcAft>
-                <a:spcPts val="600"/>
-              </a:spcAft>
-              <a:defRPr sz="1500">
-                <a:solidFill>
-                  <a:srgbClr val="000000"/>
-                </a:solidFill>
-                <a:latin typeface="Calibri"/>
-              </a:defRPr>
-            </a:pPr>
-          </a:p>
-          <a:p>
-            <a:pPr>
-              <a:spcAft>
-                <a:spcPts val="600"/>
-              </a:spcAft>
-              <a:defRPr sz="1500">
-                <a:solidFill>
-                  <a:srgbClr val="000000"/>
-                </a:solidFill>
-                <a:latin typeface="Calibri"/>
-              </a:defRPr>
-            </a:pPr>
-            <a:r>
-              <a:t>If YES -&gt; that gene's KD response differs between M and F</a:t>
-            </a:r>
-          </a:p>
-          <a:p>
-            <a:pPr>
-              <a:spcAft>
-                <a:spcPts val="600"/>
-              </a:spcAft>
-              <a:defRPr sz="1500">
-                <a:solidFill>
-                  <a:srgbClr val="000000"/>
-                </a:solidFill>
-                <a:latin typeface="Calibri"/>
-              </a:defRPr>
-            </a:pPr>
-            <a:r>
-              <a:t>If NO  -&gt; the KD effect is the same in both sexes</a:t>
-            </a:r>
-          </a:p>
-          <a:p>
-            <a:pPr>
-              <a:spcAft>
-                <a:spcPts val="600"/>
-              </a:spcAft>
-              <a:defRPr sz="1500">
-                <a:solidFill>
-                  <a:srgbClr val="000000"/>
-                </a:solidFill>
-                <a:latin typeface="Calibri"/>
-              </a:defRPr>
-            </a:pPr>
-          </a:p>
-          <a:p>
-            <a:pPr>
-              <a:spcAft>
-                <a:spcPts val="600"/>
-              </a:spcAft>
-              <a:defRPr sz="1500">
-                <a:solidFill>
-                  <a:srgbClr val="000000"/>
-                </a:solidFill>
-                <a:latin typeface="Calibri"/>
-              </a:defRPr>
-            </a:pPr>
-            <a:r>
-              <a:t>We also run 4 complementary analyses to strengthen the conclusion:</a:t>
-            </a:r>
-          </a:p>
-          <a:p>
-            <a:pPr>
-              <a:spcAft>
-                <a:spcPts val="600"/>
-              </a:spcAft>
-              <a:defRPr sz="1500">
-                <a:solidFill>
-                  <a:srgbClr val="000000"/>
-                </a:solidFill>
-                <a:latin typeface="Calibri"/>
-              </a:defRPr>
-            </a:pPr>
-            <a:r>
-              <a:t>  (1) Pi0 estimation  (2) Variance attribution  (3) Sex-stratified concordance  (4) PCA</a:t>
+              <a:defRPr sz="1400">
+                <a:solidFill>
+                  <a:srgbClr val="000000"/>
+                </a:solidFill>
+                <a:latin typeface="Calibri"/>
+              </a:defRPr>
+            </a:pPr>
+            <a:r>
+              <a:t>A covariate is a variable you ACCOUNT FOR in your statistical model</a:t>
+            </a:r>
+          </a:p>
+          <a:p>
+            <a:pPr>
+              <a:spcAft>
+                <a:spcPts val="600"/>
+              </a:spcAft>
+              <a:defRPr sz="1400">
+                <a:solidFill>
+                  <a:srgbClr val="000000"/>
+                </a:solidFill>
+                <a:latin typeface="Calibri"/>
+              </a:defRPr>
+            </a:pPr>
+            <a:r>
+              <a:t>but are NOT directly interested in testing.</a:t>
+            </a:r>
+          </a:p>
+          <a:p>
+            <a:pPr>
+              <a:spcAft>
+                <a:spcPts val="600"/>
+              </a:spcAft>
+              <a:defRPr sz="1400">
+                <a:solidFill>
+                  <a:srgbClr val="000000"/>
+                </a:solidFill>
+                <a:latin typeface="Calibri"/>
+              </a:defRPr>
+            </a:pPr>
+          </a:p>
+          <a:p>
+            <a:pPr>
+              <a:spcAft>
+                <a:spcPts val="600"/>
+              </a:spcAft>
+              <a:defRPr sz="1400">
+                <a:solidFill>
+                  <a:srgbClr val="000000"/>
+                </a:solidFill>
+                <a:latin typeface="Calibri"/>
+              </a:defRPr>
+            </a:pPr>
+            <a:r>
+              <a:t>ANALOGY: Imagine measuring the effect of a drug on blood pressure.</a:t>
+            </a:r>
+          </a:p>
+          <a:p>
+            <a:pPr>
+              <a:spcAft>
+                <a:spcPts val="600"/>
+              </a:spcAft>
+              <a:defRPr sz="1400">
+                <a:solidFill>
+                  <a:srgbClr val="000000"/>
+                </a:solidFill>
+                <a:latin typeface="Calibri"/>
+              </a:defRPr>
+            </a:pPr>
+            <a:r>
+              <a:t>  - Your variable of interest: Drug vs. Placebo</a:t>
+            </a:r>
+          </a:p>
+          <a:p>
+            <a:pPr>
+              <a:spcAft>
+                <a:spcPts val="600"/>
+              </a:spcAft>
+              <a:defRPr sz="1400">
+                <a:solidFill>
+                  <a:srgbClr val="000000"/>
+                </a:solidFill>
+                <a:latin typeface="Calibri"/>
+              </a:defRPr>
+            </a:pPr>
+            <a:r>
+              <a:t>  - A covariate: Patient age (affects blood pressure but isn't what you're testing)</a:t>
+            </a:r>
+          </a:p>
+          <a:p>
+            <a:pPr>
+              <a:spcAft>
+                <a:spcPts val="600"/>
+              </a:spcAft>
+              <a:defRPr sz="1400">
+                <a:solidFill>
+                  <a:srgbClr val="000000"/>
+                </a:solidFill>
+                <a:latin typeface="Calibri"/>
+              </a:defRPr>
+            </a:pPr>
+            <a:r>
+              <a:t>  - By accounting for age, you REMOVE age-related noise from the measurement</a:t>
+            </a:r>
+          </a:p>
+          <a:p>
+            <a:pPr>
+              <a:spcAft>
+                <a:spcPts val="600"/>
+              </a:spcAft>
+              <a:defRPr sz="1400">
+                <a:solidFill>
+                  <a:srgbClr val="000000"/>
+                </a:solidFill>
+                <a:latin typeface="Calibri"/>
+              </a:defRPr>
+            </a:pPr>
+            <a:r>
+              <a:t>  - This makes it easier to see the true drug effect</a:t>
+            </a:r>
+          </a:p>
+          <a:p>
+            <a:pPr>
+              <a:spcAft>
+                <a:spcPts val="600"/>
+              </a:spcAft>
+              <a:defRPr sz="1400">
+                <a:solidFill>
+                  <a:srgbClr val="000000"/>
+                </a:solidFill>
+                <a:latin typeface="Calibri"/>
+              </a:defRPr>
+            </a:pPr>
+          </a:p>
+          <a:p>
+            <a:pPr>
+              <a:spcAft>
+                <a:spcPts val="600"/>
+              </a:spcAft>
+              <a:defRPr sz="1400">
+                <a:solidFill>
+                  <a:srgbClr val="000000"/>
+                </a:solidFill>
+                <a:latin typeface="Calibri"/>
+              </a:defRPr>
+            </a:pPr>
+            <a:r>
+              <a:t>In our experiment:</a:t>
+            </a:r>
+          </a:p>
+          <a:p>
+            <a:pPr>
+              <a:spcAft>
+                <a:spcPts val="600"/>
+              </a:spcAft>
+              <a:defRPr sz="1400">
+                <a:solidFill>
+                  <a:srgbClr val="000000"/>
+                </a:solidFill>
+                <a:latin typeface="Calibri"/>
+              </a:defRPr>
+            </a:pPr>
+            <a:r>
+              <a:t>  - Variable of interest: KAT8 knockdown effect (Genotype: CTL vs KAT8-KD)</a:t>
+            </a:r>
+          </a:p>
+          <a:p>
+            <a:pPr>
+              <a:spcAft>
+                <a:spcPts val="600"/>
+              </a:spcAft>
+              <a:defRPr sz="1400">
+                <a:solidFill>
+                  <a:srgbClr val="000000"/>
+                </a:solidFill>
+                <a:latin typeface="Calibri"/>
+              </a:defRPr>
+            </a:pPr>
+            <a:r>
+              <a:t>  - Covariate: Sex (F vs M) -- affects gene expression but isn't our focus</a:t>
+            </a:r>
+          </a:p>
+          <a:p>
+            <a:pPr>
+              <a:spcAft>
+                <a:spcPts val="600"/>
+              </a:spcAft>
+              <a:defRPr sz="1400">
+                <a:solidFill>
+                  <a:srgbClr val="000000"/>
+                </a:solidFill>
+                <a:latin typeface="Calibri"/>
+              </a:defRPr>
+            </a:pPr>
+            <a:r>
+              <a:t>  - By telling the model 'some variance is due to sex,' it can SUBTRACT</a:t>
+            </a:r>
+          </a:p>
+          <a:p>
+            <a:pPr>
+              <a:spcAft>
+                <a:spcPts val="600"/>
+              </a:spcAft>
+              <a:defRPr sz="1400">
+                <a:solidFill>
+                  <a:srgbClr val="000000"/>
+                </a:solidFill>
+                <a:latin typeface="Calibri"/>
+              </a:defRPr>
+            </a:pPr>
+            <a:r>
+              <a:t>    that variance and see the genotype effect more clearly</a:t>
+            </a:r>
+          </a:p>
+          <a:p>
+            <a:pPr>
+              <a:spcAft>
+                <a:spcPts val="600"/>
+              </a:spcAft>
+              <a:defRPr sz="1400">
+                <a:solidFill>
+                  <a:srgbClr val="000000"/>
+                </a:solidFill>
+                <a:latin typeface="Calibri"/>
+              </a:defRPr>
+            </a:pPr>
+          </a:p>
+          <a:p>
+            <a:pPr>
+              <a:spcAft>
+                <a:spcPts val="600"/>
+              </a:spcAft>
+              <a:defRPr sz="1400">
+                <a:solidFill>
+                  <a:srgbClr val="000000"/>
+                </a:solidFill>
+                <a:latin typeface="Calibri"/>
+              </a:defRPr>
+            </a:pPr>
+            <a:r>
+              <a:t>Result: MORE statistical power to detect true KAT8 knockdown effects</a:t>
             </a:r>
           </a:p>
         </p:txBody>
@@ -6140,6 +9421,14 @@
 <file path=ppt/slides/slide5.xml><?xml version="1.0" encoding="utf-8"?>
 <p:sld xmlns:a="http://schemas.openxmlformats.org/drawingml/2006/main" xmlns:p="http://schemas.openxmlformats.org/presentationml/2006/main" xmlns:r="http://schemas.openxmlformats.org/officeDocument/2006/relationships">
   <p:cSld>
+    <p:bg>
+      <p:bgPr>
+        <a:solidFill>
+          <a:srgbClr val="FDF2E9"/>
+        </a:solidFill>
+        <a:effectLst/>
+      </p:bgPr>
+    </p:bg>
     <p:spTree>
       <p:nvGrpSpPr>
         <p:cNvPr id="1" name=""/>
@@ -6178,6 +9467,1109 @@
               </a:defRPr>
             </a:pPr>
             <a:r>
+              <a:t>Background: Two Possible DESeq2 Models</a:t>
+            </a:r>
+          </a:p>
+        </p:txBody>
+      </p:sp>
+      <p:sp>
+        <p:nvSpPr>
+          <p:cNvPr id="3" name="TextBox 2"/>
+          <p:cNvSpPr txBox="1"/>
+          <p:nvPr/>
+        </p:nvSpPr>
+        <p:spPr>
+          <a:xfrm>
+            <a:off x="548640" y="1188720"/>
+            <a:ext cx="10972800" cy="5029200"/>
+          </a:xfrm>
+          <a:prstGeom prst="rect">
+            <a:avLst/>
+          </a:prstGeom>
+          <a:noFill/>
+        </p:spPr>
+        <p:txBody>
+          <a:bodyPr wrap="square">
+            <a:spAutoFit/>
+          </a:bodyPr>
+          <a:lstStyle/>
+          <a:p>
+            <a:pPr>
+              <a:spcAft>
+                <a:spcPts val="600"/>
+              </a:spcAft>
+              <a:defRPr sz="1400">
+                <a:solidFill>
+                  <a:srgbClr val="000000"/>
+                </a:solidFill>
+                <a:latin typeface="Calibri"/>
+              </a:defRPr>
+            </a:pPr>
+            <a:r>
+              <a:t>MODEL A:   ~ Genotype                  (what we had before)</a:t>
+            </a:r>
+          </a:p>
+          <a:p>
+            <a:pPr>
+              <a:spcAft>
+                <a:spcPts val="600"/>
+              </a:spcAft>
+              <a:defRPr sz="1400">
+                <a:solidFill>
+                  <a:srgbClr val="000000"/>
+                </a:solidFill>
+                <a:latin typeface="Calibri"/>
+              </a:defRPr>
+            </a:pPr>
+            <a:r>
+              <a:t>  - Compares KAT8-KD vs CTL, ignoring sex entirely</a:t>
+            </a:r>
+          </a:p>
+          <a:p>
+            <a:pPr>
+              <a:spcAft>
+                <a:spcPts val="600"/>
+              </a:spcAft>
+              <a:defRPr sz="1400">
+                <a:solidFill>
+                  <a:srgbClr val="000000"/>
+                </a:solidFill>
+                <a:latin typeface="Calibri"/>
+              </a:defRPr>
+            </a:pPr>
+            <a:r>
+              <a:t>  - Any gene expression difference between M and F becomes 'noise'</a:t>
+            </a:r>
+          </a:p>
+          <a:p>
+            <a:pPr>
+              <a:spcAft>
+                <a:spcPts val="600"/>
+              </a:spcAft>
+              <a:defRPr sz="1400">
+                <a:solidFill>
+                  <a:srgbClr val="000000"/>
+                </a:solidFill>
+                <a:latin typeface="Calibri"/>
+              </a:defRPr>
+            </a:pPr>
+            <a:r>
+              <a:t>  - The model has to 'see through' this noise to find KD effects</a:t>
+            </a:r>
+          </a:p>
+          <a:p>
+            <a:pPr>
+              <a:spcAft>
+                <a:spcPts val="600"/>
+              </a:spcAft>
+              <a:defRPr sz="1400">
+                <a:solidFill>
+                  <a:srgbClr val="000000"/>
+                </a:solidFill>
+                <a:latin typeface="Calibri"/>
+              </a:defRPr>
+            </a:pPr>
+          </a:p>
+          <a:p>
+            <a:pPr>
+              <a:spcAft>
+                <a:spcPts val="600"/>
+              </a:spcAft>
+              <a:defRPr sz="1400">
+                <a:solidFill>
+                  <a:srgbClr val="000000"/>
+                </a:solidFill>
+                <a:latin typeface="Calibri"/>
+              </a:defRPr>
+            </a:pPr>
+            <a:r>
+              <a:t>MODEL B:   ~ Sex + Genotype            (the new model)</a:t>
+            </a:r>
+          </a:p>
+          <a:p>
+            <a:pPr>
+              <a:spcAft>
+                <a:spcPts val="600"/>
+              </a:spcAft>
+              <a:defRPr sz="1400">
+                <a:solidFill>
+                  <a:srgbClr val="000000"/>
+                </a:solidFill>
+                <a:latin typeface="Calibri"/>
+              </a:defRPr>
+            </a:pPr>
+            <a:r>
+              <a:t>  - First accounts for M vs F baseline differences (the covariate)</a:t>
+            </a:r>
+          </a:p>
+          <a:p>
+            <a:pPr>
+              <a:spcAft>
+                <a:spcPts val="600"/>
+              </a:spcAft>
+              <a:defRPr sz="1400">
+                <a:solidFill>
+                  <a:srgbClr val="000000"/>
+                </a:solidFill>
+                <a:latin typeface="Calibri"/>
+              </a:defRPr>
+            </a:pPr>
+            <a:r>
+              <a:t>  - THEN tests KAT8-KD vs CTL on the sex-adjusted expression</a:t>
+            </a:r>
+          </a:p>
+          <a:p>
+            <a:pPr>
+              <a:spcAft>
+                <a:spcPts val="600"/>
+              </a:spcAft>
+              <a:defRPr sz="1400">
+                <a:solidFill>
+                  <a:srgbClr val="000000"/>
+                </a:solidFill>
+                <a:latin typeface="Calibri"/>
+              </a:defRPr>
+            </a:pPr>
+            <a:r>
+              <a:t>  - Less noise -&gt; more statistical power -&gt; more DEGs detected</a:t>
+            </a:r>
+          </a:p>
+          <a:p>
+            <a:pPr>
+              <a:spcAft>
+                <a:spcPts val="600"/>
+              </a:spcAft>
+              <a:defRPr sz="1400">
+                <a:solidFill>
+                  <a:srgbClr val="000000"/>
+                </a:solidFill>
+                <a:latin typeface="Calibri"/>
+              </a:defRPr>
+            </a:pPr>
+          </a:p>
+          <a:p>
+            <a:pPr>
+              <a:spcAft>
+                <a:spcPts val="600"/>
+              </a:spcAft>
+              <a:defRPr sz="1400">
+                <a:solidFill>
+                  <a:srgbClr val="000000"/>
+                </a:solidFill>
+                <a:latin typeface="Calibri"/>
+              </a:defRPr>
+            </a:pPr>
+            <a:r>
+              <a:t>IMPORTANT: Model B does NOT mean 'analyze males and females separately'</a:t>
+            </a:r>
+          </a:p>
+          <a:p>
+            <a:pPr>
+              <a:spcAft>
+                <a:spcPts val="600"/>
+              </a:spcAft>
+              <a:defRPr sz="1400">
+                <a:solidFill>
+                  <a:srgbClr val="000000"/>
+                </a:solidFill>
+                <a:latin typeface="Calibri"/>
+              </a:defRPr>
+            </a:pPr>
+            <a:r>
+              <a:t>  - All samples stay in ONE analysis (maximum sample size)</a:t>
+            </a:r>
+          </a:p>
+          <a:p>
+            <a:pPr>
+              <a:spcAft>
+                <a:spcPts val="600"/>
+              </a:spcAft>
+              <a:defRPr sz="1400">
+                <a:solidFill>
+                  <a:srgbClr val="000000"/>
+                </a:solidFill>
+                <a:latin typeface="Calibri"/>
+              </a:defRPr>
+            </a:pPr>
+            <a:r>
+              <a:t>  - Sex is just 'controlled for,' like adjusting for age in clinical studies</a:t>
+            </a:r>
+          </a:p>
+          <a:p>
+            <a:pPr>
+              <a:spcAft>
+                <a:spcPts val="600"/>
+              </a:spcAft>
+              <a:defRPr sz="1400">
+                <a:solidFill>
+                  <a:srgbClr val="000000"/>
+                </a:solidFill>
+                <a:latin typeface="Calibri"/>
+              </a:defRPr>
+            </a:pPr>
+          </a:p>
+          <a:p>
+            <a:pPr>
+              <a:spcAft>
+                <a:spcPts val="600"/>
+              </a:spcAft>
+              <a:defRPr sz="1400">
+                <a:solidFill>
+                  <a:srgbClr val="000000"/>
+                </a:solidFill>
+                <a:latin typeface="Calibri"/>
+              </a:defRPr>
+            </a:pPr>
+            <a:r>
+              <a:t>BUT: Model B is only valid IF the KD effect is similar in M and F.</a:t>
+            </a:r>
+          </a:p>
+          <a:p>
+            <a:pPr>
+              <a:spcAft>
+                <a:spcPts val="600"/>
+              </a:spcAft>
+              <a:defRPr sz="1400">
+                <a:solidFill>
+                  <a:srgbClr val="000000"/>
+                </a:solidFill>
+                <a:latin typeface="Calibri"/>
+              </a:defRPr>
+            </a:pPr>
+            <a:r>
+              <a:t>  If males and females respond completely differently to KD,</a:t>
+            </a:r>
+          </a:p>
+          <a:p>
+            <a:pPr>
+              <a:spcAft>
+                <a:spcPts val="600"/>
+              </a:spcAft>
+              <a:defRPr sz="1400">
+                <a:solidFill>
+                  <a:srgbClr val="000000"/>
+                </a:solidFill>
+                <a:latin typeface="Calibri"/>
+              </a:defRPr>
+            </a:pPr>
+            <a:r>
+              <a:t>  we would need to split them. That's what we test next.</a:t>
+            </a:r>
+          </a:p>
+        </p:txBody>
+      </p:sp>
+    </p:spTree>
+  </p:cSld>
+  <p:clrMapOvr>
+    <a:masterClrMapping/>
+  </p:clrMapOvr>
+</p:sld>
+</file>
+
+<file path=ppt/slides/slide6.xml><?xml version="1.0" encoding="utf-8"?>
+<p:sld xmlns:a="http://schemas.openxmlformats.org/drawingml/2006/main" xmlns:p="http://schemas.openxmlformats.org/presentationml/2006/main" xmlns:r="http://schemas.openxmlformats.org/officeDocument/2006/relationships">
+  <p:cSld>
+    <p:spTree>
+      <p:nvGrpSpPr>
+        <p:cNvPr id="1" name=""/>
+        <p:cNvGrpSpPr/>
+        <p:nvPr/>
+      </p:nvGrpSpPr>
+      <p:grpSpPr/>
+      <p:sp>
+        <p:nvSpPr>
+          <p:cNvPr id="2" name="TextBox 1"/>
+          <p:cNvSpPr txBox="1"/>
+          <p:nvPr/>
+        </p:nvSpPr>
+        <p:spPr>
+          <a:xfrm>
+            <a:off x="548640" y="274320"/>
+            <a:ext cx="10972800" cy="548640"/>
+          </a:xfrm>
+          <a:prstGeom prst="rect">
+            <a:avLst/>
+          </a:prstGeom>
+          <a:noFill/>
+        </p:spPr>
+        <p:txBody>
+          <a:bodyPr wrap="square">
+            <a:spAutoFit/>
+          </a:bodyPr>
+          <a:lstStyle/>
+          <a:p>
+            <a:pPr algn="l">
+              <a:defRPr sz="2800" b="1">
+                <a:solidFill>
+                  <a:srgbClr val="1B3A5C"/>
+                </a:solidFill>
+                <a:latin typeface="Calibri"/>
+              </a:defRPr>
+            </a:pPr>
+            <a:r>
+              <a:t>Method: Likelihood Ratio Test (LRT)</a:t>
+            </a:r>
+          </a:p>
+        </p:txBody>
+      </p:sp>
+      <p:sp>
+        <p:nvSpPr>
+          <p:cNvPr id="3" name="TextBox 2"/>
+          <p:cNvSpPr txBox="1"/>
+          <p:nvPr/>
+        </p:nvSpPr>
+        <p:spPr>
+          <a:xfrm>
+            <a:off x="548640" y="822960"/>
+            <a:ext cx="10972800" cy="365760"/>
+          </a:xfrm>
+          <a:prstGeom prst="rect">
+            <a:avLst/>
+          </a:prstGeom>
+          <a:noFill/>
+        </p:spPr>
+        <p:txBody>
+          <a:bodyPr wrap="square">
+            <a:spAutoFit/>
+          </a:bodyPr>
+          <a:lstStyle/>
+          <a:p>
+            <a:pPr algn="l">
+              <a:defRPr sz="1400" b="0">
+                <a:solidFill>
+                  <a:srgbClr val="666666"/>
+                </a:solidFill>
+                <a:latin typeface="Calibri"/>
+              </a:defRPr>
+            </a:pPr>
+            <a:r>
+              <a:t>Testing whether the KD effect depends on sex</a:t>
+            </a:r>
+          </a:p>
+        </p:txBody>
+      </p:sp>
+      <p:sp>
+        <p:nvSpPr>
+          <p:cNvPr id="4" name="TextBox 3"/>
+          <p:cNvSpPr txBox="1"/>
+          <p:nvPr/>
+        </p:nvSpPr>
+        <p:spPr>
+          <a:xfrm>
+            <a:off x="548640" y="1280160"/>
+            <a:ext cx="10972800" cy="5029200"/>
+          </a:xfrm>
+          <a:prstGeom prst="rect">
+            <a:avLst/>
+          </a:prstGeom>
+          <a:noFill/>
+        </p:spPr>
+        <p:txBody>
+          <a:bodyPr wrap="square">
+            <a:spAutoFit/>
+          </a:bodyPr>
+          <a:lstStyle/>
+          <a:p>
+            <a:pPr>
+              <a:spcAft>
+                <a:spcPts val="600"/>
+              </a:spcAft>
+              <a:defRPr sz="1300">
+                <a:solidFill>
+                  <a:srgbClr val="000000"/>
+                </a:solidFill>
+                <a:latin typeface="Calibri"/>
+              </a:defRPr>
+            </a:pPr>
+            <a:r>
+              <a:t>Tool: DESeq2 (Bioconductor), run separately per depot</a:t>
+            </a:r>
+          </a:p>
+          <a:p>
+            <a:pPr>
+              <a:spcAft>
+                <a:spcPts val="600"/>
+              </a:spcAft>
+              <a:defRPr sz="1300">
+                <a:solidFill>
+                  <a:srgbClr val="000000"/>
+                </a:solidFill>
+                <a:latin typeface="Calibri"/>
+              </a:defRPr>
+            </a:pPr>
+          </a:p>
+          <a:p>
+            <a:pPr>
+              <a:spcAft>
+                <a:spcPts val="600"/>
+              </a:spcAft>
+              <a:defRPr sz="1300">
+                <a:solidFill>
+                  <a:srgbClr val="000000"/>
+                </a:solidFill>
+                <a:latin typeface="Calibri"/>
+              </a:defRPr>
+            </a:pPr>
+            <a:r>
+              <a:t>Full model:      ~ Sex + Genotype + Sex:Genotype</a:t>
+            </a:r>
+          </a:p>
+          <a:p>
+            <a:pPr>
+              <a:spcAft>
+                <a:spcPts val="600"/>
+              </a:spcAft>
+              <a:defRPr sz="1300">
+                <a:solidFill>
+                  <a:srgbClr val="000000"/>
+                </a:solidFill>
+                <a:latin typeface="Calibri"/>
+              </a:defRPr>
+            </a:pPr>
+            <a:r>
+              <a:t>Reduced model:  ~ Sex + Genotype</a:t>
+            </a:r>
+          </a:p>
+          <a:p>
+            <a:pPr>
+              <a:spcAft>
+                <a:spcPts val="600"/>
+              </a:spcAft>
+              <a:defRPr sz="1300">
+                <a:solidFill>
+                  <a:srgbClr val="000000"/>
+                </a:solidFill>
+                <a:latin typeface="Calibri"/>
+              </a:defRPr>
+            </a:pPr>
+          </a:p>
+          <a:p>
+            <a:pPr>
+              <a:spcAft>
+                <a:spcPts val="600"/>
+              </a:spcAft>
+              <a:defRPr sz="1300">
+                <a:solidFill>
+                  <a:srgbClr val="000000"/>
+                </a:solidFill>
+                <a:latin typeface="Calibri"/>
+              </a:defRPr>
+            </a:pPr>
+            <a:r>
+              <a:t>What is Sex:Genotype (the 'interaction term')?</a:t>
+            </a:r>
+          </a:p>
+          <a:p>
+            <a:pPr>
+              <a:spcAft>
+                <a:spcPts val="600"/>
+              </a:spcAft>
+              <a:defRPr sz="1300">
+                <a:solidFill>
+                  <a:srgbClr val="000000"/>
+                </a:solidFill>
+                <a:latin typeface="Calibri"/>
+              </a:defRPr>
+            </a:pPr>
+            <a:r>
+              <a:t>  It captures genes where the KD effect DIFFERS between males and females.</a:t>
+            </a:r>
+          </a:p>
+          <a:p>
+            <a:pPr>
+              <a:spcAft>
+                <a:spcPts val="600"/>
+              </a:spcAft>
+              <a:defRPr sz="1300">
+                <a:solidFill>
+                  <a:srgbClr val="000000"/>
+                </a:solidFill>
+                <a:latin typeface="Calibri"/>
+              </a:defRPr>
+            </a:pPr>
+            <a:r>
+              <a:t>  Example: Gene X goes UP in female KD but DOWN in male KD -&gt; strong interaction</a:t>
+            </a:r>
+          </a:p>
+          <a:p>
+            <a:pPr>
+              <a:spcAft>
+                <a:spcPts val="600"/>
+              </a:spcAft>
+              <a:defRPr sz="1300">
+                <a:solidFill>
+                  <a:srgbClr val="000000"/>
+                </a:solidFill>
+                <a:latin typeface="Calibri"/>
+              </a:defRPr>
+            </a:pPr>
+            <a:r>
+              <a:t>  Example: Gene Y goes UP equally in both sexes -&gt; NO interaction</a:t>
+            </a:r>
+          </a:p>
+          <a:p>
+            <a:pPr>
+              <a:spcAft>
+                <a:spcPts val="600"/>
+              </a:spcAft>
+              <a:defRPr sz="1300">
+                <a:solidFill>
+                  <a:srgbClr val="000000"/>
+                </a:solidFill>
+                <a:latin typeface="Calibri"/>
+              </a:defRPr>
+            </a:pPr>
+          </a:p>
+          <a:p>
+            <a:pPr>
+              <a:spcAft>
+                <a:spcPts val="600"/>
+              </a:spcAft>
+              <a:defRPr sz="1300">
+                <a:solidFill>
+                  <a:srgbClr val="000000"/>
+                </a:solidFill>
+                <a:latin typeface="Calibri"/>
+              </a:defRPr>
+            </a:pPr>
+            <a:r>
+              <a:t>The LRT asks: for each gene, does adding the interaction term</a:t>
+            </a:r>
+          </a:p>
+          <a:p>
+            <a:pPr>
+              <a:spcAft>
+                <a:spcPts val="600"/>
+              </a:spcAft>
+              <a:defRPr sz="1300">
+                <a:solidFill>
+                  <a:srgbClr val="000000"/>
+                </a:solidFill>
+                <a:latin typeface="Calibri"/>
+              </a:defRPr>
+            </a:pPr>
+            <a:r>
+              <a:t>significantly improve how well the model fits the data?</a:t>
+            </a:r>
+          </a:p>
+          <a:p>
+            <a:pPr>
+              <a:spcAft>
+                <a:spcPts val="600"/>
+              </a:spcAft>
+              <a:defRPr sz="1300">
+                <a:solidFill>
+                  <a:srgbClr val="000000"/>
+                </a:solidFill>
+                <a:latin typeface="Calibri"/>
+              </a:defRPr>
+            </a:pPr>
+          </a:p>
+          <a:p>
+            <a:pPr>
+              <a:spcAft>
+                <a:spcPts val="600"/>
+              </a:spcAft>
+              <a:defRPr sz="1300">
+                <a:solidFill>
+                  <a:srgbClr val="000000"/>
+                </a:solidFill>
+                <a:latin typeface="Calibri"/>
+              </a:defRPr>
+            </a:pPr>
+            <a:r>
+              <a:t>  If p &lt; 0.05 -&gt; that gene's KD response truly differs between M and F</a:t>
+            </a:r>
+          </a:p>
+          <a:p>
+            <a:pPr>
+              <a:spcAft>
+                <a:spcPts val="600"/>
+              </a:spcAft>
+              <a:defRPr sz="1300">
+                <a:solidFill>
+                  <a:srgbClr val="000000"/>
+                </a:solidFill>
+                <a:latin typeface="Calibri"/>
+              </a:defRPr>
+            </a:pPr>
+            <a:r>
+              <a:t>  If p &gt;= 0.05 -&gt; the KD effect is the same in both sexes (what we want!)</a:t>
+            </a:r>
+          </a:p>
+          <a:p>
+            <a:pPr>
+              <a:spcAft>
+                <a:spcPts val="600"/>
+              </a:spcAft>
+              <a:defRPr sz="1300">
+                <a:solidFill>
+                  <a:srgbClr val="000000"/>
+                </a:solidFill>
+                <a:latin typeface="Calibri"/>
+              </a:defRPr>
+            </a:pPr>
+          </a:p>
+          <a:p>
+            <a:pPr>
+              <a:spcAft>
+                <a:spcPts val="600"/>
+              </a:spcAft>
+              <a:defRPr sz="1300">
+                <a:solidFill>
+                  <a:srgbClr val="000000"/>
+                </a:solidFill>
+                <a:latin typeface="Calibri"/>
+              </a:defRPr>
+            </a:pPr>
+            <a:r>
+              <a:t>We also run 4 complementary analyses to build the full picture:</a:t>
+            </a:r>
+          </a:p>
+          <a:p>
+            <a:pPr>
+              <a:spcAft>
+                <a:spcPts val="600"/>
+              </a:spcAft>
+              <a:defRPr sz="1300">
+                <a:solidFill>
+                  <a:srgbClr val="000000"/>
+                </a:solidFill>
+                <a:latin typeface="Calibri"/>
+              </a:defRPr>
+            </a:pPr>
+            <a:r>
+              <a:t>  (1) Pi0 estimation  (2) Variance decomposition  (3) Sex-stratified concordance  (4) Model comparison (Part 7.7)</a:t>
+            </a:r>
+          </a:p>
+        </p:txBody>
+      </p:sp>
+    </p:spTree>
+  </p:cSld>
+  <p:clrMapOvr>
+    <a:masterClrMapping/>
+  </p:clrMapOvr>
+</p:sld>
+</file>
+
+<file path=ppt/slides/slide7.xml><?xml version="1.0" encoding="utf-8"?>
+<p:sld xmlns:a="http://schemas.openxmlformats.org/drawingml/2006/main" xmlns:p="http://schemas.openxmlformats.org/presentationml/2006/main" xmlns:r="http://schemas.openxmlformats.org/officeDocument/2006/relationships">
+  <p:cSld>
+    <p:bg>
+      <p:bgPr>
+        <a:solidFill>
+          <a:srgbClr val="FDF2E9"/>
+        </a:solidFill>
+        <a:effectLst/>
+      </p:bgPr>
+    </p:bg>
+    <p:spTree>
+      <p:nvGrpSpPr>
+        <p:cNvPr id="1" name=""/>
+        <p:cNvGrpSpPr/>
+        <p:nvPr/>
+      </p:nvGrpSpPr>
+      <p:grpSpPr/>
+      <p:sp>
+        <p:nvSpPr>
+          <p:cNvPr id="2" name="TextBox 1"/>
+          <p:cNvSpPr txBox="1"/>
+          <p:nvPr/>
+        </p:nvSpPr>
+        <p:spPr>
+          <a:xfrm>
+            <a:off x="548640" y="274320"/>
+            <a:ext cx="10972800" cy="548640"/>
+          </a:xfrm>
+          <a:prstGeom prst="rect">
+            <a:avLst/>
+          </a:prstGeom>
+          <a:noFill/>
+        </p:spPr>
+        <p:txBody>
+          <a:bodyPr wrap="square">
+            <a:spAutoFit/>
+          </a:bodyPr>
+          <a:lstStyle/>
+          <a:p>
+            <a:pPr algn="l">
+              <a:defRPr sz="2800" b="1">
+                <a:solidFill>
+                  <a:srgbClr val="1B3A5C"/>
+                </a:solidFill>
+                <a:latin typeface="Calibri"/>
+              </a:defRPr>
+            </a:pPr>
+            <a:r>
+              <a:t>Background: How to Read a P-value Histogram</a:t>
+            </a:r>
+          </a:p>
+        </p:txBody>
+      </p:sp>
+      <p:sp>
+        <p:nvSpPr>
+          <p:cNvPr id="3" name="TextBox 2"/>
+          <p:cNvSpPr txBox="1"/>
+          <p:nvPr/>
+        </p:nvSpPr>
+        <p:spPr>
+          <a:xfrm>
+            <a:off x="548640" y="1188720"/>
+            <a:ext cx="10972800" cy="5029200"/>
+          </a:xfrm>
+          <a:prstGeom prst="rect">
+            <a:avLst/>
+          </a:prstGeom>
+          <a:noFill/>
+        </p:spPr>
+        <p:txBody>
+          <a:bodyPr wrap="square">
+            <a:spAutoFit/>
+          </a:bodyPr>
+          <a:lstStyle/>
+          <a:p>
+            <a:pPr>
+              <a:spcAft>
+                <a:spcPts val="600"/>
+              </a:spcAft>
+              <a:defRPr sz="1300">
+                <a:solidFill>
+                  <a:srgbClr val="000000"/>
+                </a:solidFill>
+                <a:latin typeface="Calibri"/>
+              </a:defRPr>
+            </a:pPr>
+            <a:r>
+              <a:t>When we test thousands of genes, we get one p-value per gene.</a:t>
+            </a:r>
+          </a:p>
+          <a:p>
+            <a:pPr>
+              <a:spcAft>
+                <a:spcPts val="600"/>
+              </a:spcAft>
+              <a:defRPr sz="1300">
+                <a:solidFill>
+                  <a:srgbClr val="000000"/>
+                </a:solidFill>
+                <a:latin typeface="Calibri"/>
+              </a:defRPr>
+            </a:pPr>
+            <a:r>
+              <a:t>Plotting these p-values as a histogram reveals the big picture:</a:t>
+            </a:r>
+          </a:p>
+          <a:p>
+            <a:pPr>
+              <a:spcAft>
+                <a:spcPts val="600"/>
+              </a:spcAft>
+              <a:defRPr sz="1300">
+                <a:solidFill>
+                  <a:srgbClr val="000000"/>
+                </a:solidFill>
+                <a:latin typeface="Calibri"/>
+              </a:defRPr>
+            </a:pPr>
+          </a:p>
+          <a:p>
+            <a:pPr>
+              <a:spcAft>
+                <a:spcPts val="600"/>
+              </a:spcAft>
+              <a:defRPr sz="1300">
+                <a:solidFill>
+                  <a:srgbClr val="000000"/>
+                </a:solidFill>
+                <a:latin typeface="Calibri"/>
+              </a:defRPr>
+            </a:pPr>
+            <a:r>
+              <a:t>SCENARIO 1: All genes are truly null (no real interaction anywhere)</a:t>
+            </a:r>
+          </a:p>
+          <a:p>
+            <a:pPr>
+              <a:spcAft>
+                <a:spcPts val="600"/>
+              </a:spcAft>
+              <a:defRPr sz="1300">
+                <a:solidFill>
+                  <a:srgbClr val="000000"/>
+                </a:solidFill>
+                <a:latin typeface="Calibri"/>
+              </a:defRPr>
+            </a:pPr>
+            <a:r>
+              <a:t>  -&gt; P-values are UNIFORMLY distributed (flat histogram, like a table)</a:t>
+            </a:r>
+          </a:p>
+          <a:p>
+            <a:pPr>
+              <a:spcAft>
+                <a:spcPts val="600"/>
+              </a:spcAft>
+              <a:defRPr sz="1300">
+                <a:solidFill>
+                  <a:srgbClr val="000000"/>
+                </a:solidFill>
+                <a:latin typeface="Calibri"/>
+              </a:defRPr>
+            </a:pPr>
+            <a:r>
+              <a:t>  -&gt; Each bar has roughly the same height</a:t>
+            </a:r>
+          </a:p>
+          <a:p>
+            <a:pPr>
+              <a:spcAft>
+                <a:spcPts val="600"/>
+              </a:spcAft>
+              <a:defRPr sz="1300">
+                <a:solidFill>
+                  <a:srgbClr val="000000"/>
+                </a:solidFill>
+                <a:latin typeface="Calibri"/>
+              </a:defRPr>
+            </a:pPr>
+          </a:p>
+          <a:p>
+            <a:pPr>
+              <a:spcAft>
+                <a:spcPts val="600"/>
+              </a:spcAft>
+              <a:defRPr sz="1300">
+                <a:solidFill>
+                  <a:srgbClr val="000000"/>
+                </a:solidFill>
+                <a:latin typeface="Calibri"/>
+              </a:defRPr>
+            </a:pPr>
+            <a:r>
+              <a:t>SCENARIO 2: Some genes have real interactions</a:t>
+            </a:r>
+          </a:p>
+          <a:p>
+            <a:pPr>
+              <a:spcAft>
+                <a:spcPts val="600"/>
+              </a:spcAft>
+              <a:defRPr sz="1300">
+                <a:solidFill>
+                  <a:srgbClr val="000000"/>
+                </a:solidFill>
+                <a:latin typeface="Calibri"/>
+              </a:defRPr>
+            </a:pPr>
+            <a:r>
+              <a:t>  -&gt; There's a SPIKE near p = 0 (real signal produces small p-values)</a:t>
+            </a:r>
+          </a:p>
+          <a:p>
+            <a:pPr>
+              <a:spcAft>
+                <a:spcPts val="600"/>
+              </a:spcAft>
+              <a:defRPr sz="1300">
+                <a:solidFill>
+                  <a:srgbClr val="000000"/>
+                </a:solidFill>
+                <a:latin typeface="Calibri"/>
+              </a:defRPr>
+            </a:pPr>
+            <a:r>
+              <a:t>  -&gt; The rest of the histogram stays flat (the true nulls)</a:t>
+            </a:r>
+          </a:p>
+          <a:p>
+            <a:pPr>
+              <a:spcAft>
+                <a:spcPts val="600"/>
+              </a:spcAft>
+              <a:defRPr sz="1300">
+                <a:solidFill>
+                  <a:srgbClr val="000000"/>
+                </a:solidFill>
+                <a:latin typeface="Calibri"/>
+              </a:defRPr>
+            </a:pPr>
+          </a:p>
+          <a:p>
+            <a:pPr>
+              <a:spcAft>
+                <a:spcPts val="600"/>
+              </a:spcAft>
+              <a:defRPr sz="1300">
+                <a:solidFill>
+                  <a:srgbClr val="000000"/>
+                </a:solidFill>
+                <a:latin typeface="Calibri"/>
+              </a:defRPr>
+            </a:pPr>
+            <a:r>
+              <a:t>What you'll see in our data:</a:t>
+            </a:r>
+          </a:p>
+          <a:p>
+            <a:pPr>
+              <a:spcAft>
+                <a:spcPts val="600"/>
+              </a:spcAft>
+              <a:defRPr sz="1300">
+                <a:solidFill>
+                  <a:srgbClr val="000000"/>
+                </a:solidFill>
+                <a:latin typeface="Calibri"/>
+              </a:defRPr>
+            </a:pPr>
+            <a:r>
+              <a:t>  -&gt; Mostly FLAT (most genes have no sex-dependent KD response)</a:t>
+            </a:r>
+          </a:p>
+          <a:p>
+            <a:pPr>
+              <a:spcAft>
+                <a:spcPts val="600"/>
+              </a:spcAft>
+              <a:defRPr sz="1300">
+                <a:solidFill>
+                  <a:srgbClr val="000000"/>
+                </a:solidFill>
+                <a:latin typeface="Calibri"/>
+              </a:defRPr>
+            </a:pPr>
+            <a:r>
+              <a:t>  -&gt; Small spike near p = 0 (a few genes do differ between sexes)</a:t>
+            </a:r>
+          </a:p>
+          <a:p>
+            <a:pPr>
+              <a:spcAft>
+                <a:spcPts val="600"/>
+              </a:spcAft>
+              <a:defRPr sz="1300">
+                <a:solidFill>
+                  <a:srgbClr val="000000"/>
+                </a:solidFill>
+                <a:latin typeface="Calibri"/>
+              </a:defRPr>
+            </a:pPr>
+            <a:r>
+              <a:t>  -&gt; Red dashed line = expected height if ALL genes were null</a:t>
+            </a:r>
+          </a:p>
+          <a:p>
+            <a:pPr>
+              <a:spcAft>
+                <a:spcPts val="600"/>
+              </a:spcAft>
+              <a:defRPr sz="1300">
+                <a:solidFill>
+                  <a:srgbClr val="000000"/>
+                </a:solidFill>
+                <a:latin typeface="Calibri"/>
+              </a:defRPr>
+            </a:pPr>
+            <a:r>
+              <a:t>  -&gt; Bars above the red line near p = 0 = genes with real interaction signal</a:t>
+            </a:r>
+          </a:p>
+          <a:p>
+            <a:pPr>
+              <a:spcAft>
+                <a:spcPts val="600"/>
+              </a:spcAft>
+              <a:defRPr sz="1300">
+                <a:solidFill>
+                  <a:srgbClr val="000000"/>
+                </a:solidFill>
+                <a:latin typeface="Calibri"/>
+              </a:defRPr>
+            </a:pPr>
+          </a:p>
+          <a:p>
+            <a:pPr>
+              <a:spcAft>
+                <a:spcPts val="600"/>
+              </a:spcAft>
+              <a:defRPr sz="1300">
+                <a:solidFill>
+                  <a:srgbClr val="000000"/>
+                </a:solidFill>
+                <a:latin typeface="Calibri"/>
+              </a:defRPr>
+            </a:pPr>
+            <a:r>
+              <a:t>The flatter the histogram, the more we can trust that</a:t>
+            </a:r>
+          </a:p>
+          <a:p>
+            <a:pPr>
+              <a:spcAft>
+                <a:spcPts val="600"/>
+              </a:spcAft>
+              <a:defRPr sz="1300">
+                <a:solidFill>
+                  <a:srgbClr val="000000"/>
+                </a:solidFill>
+                <a:latin typeface="Calibri"/>
+              </a:defRPr>
+            </a:pPr>
+            <a:r>
+              <a:t>males and females respond similarly to KAT8 knockdown.</a:t>
+            </a:r>
+          </a:p>
+        </p:txBody>
+      </p:sp>
+    </p:spTree>
+  </p:cSld>
+  <p:clrMapOvr>
+    <a:masterClrMapping/>
+  </p:clrMapOvr>
+</p:sld>
+</file>
+
+<file path=ppt/slides/slide8.xml><?xml version="1.0" encoding="utf-8"?>
+<p:sld xmlns:a="http://schemas.openxmlformats.org/drawingml/2006/main" xmlns:p="http://schemas.openxmlformats.org/presentationml/2006/main" xmlns:r="http://schemas.openxmlformats.org/officeDocument/2006/relationships">
+  <p:cSld>
+    <p:spTree>
+      <p:nvGrpSpPr>
+        <p:cNvPr id="1" name=""/>
+        <p:cNvGrpSpPr/>
+        <p:nvPr/>
+      </p:nvGrpSpPr>
+      <p:grpSpPr/>
+      <p:sp>
+        <p:nvSpPr>
+          <p:cNvPr id="2" name="TextBox 1"/>
+          <p:cNvSpPr txBox="1"/>
+          <p:nvPr/>
+        </p:nvSpPr>
+        <p:spPr>
+          <a:xfrm>
+            <a:off x="548640" y="274320"/>
+            <a:ext cx="10972800" cy="548640"/>
+          </a:xfrm>
+          <a:prstGeom prst="rect">
+            <a:avLst/>
+          </a:prstGeom>
+          <a:noFill/>
+        </p:spPr>
+        <p:txBody>
+          <a:bodyPr wrap="square">
+            <a:spAutoFit/>
+          </a:bodyPr>
+          <a:lstStyle/>
+          <a:p>
+            <a:pPr algn="l">
+              <a:defRPr sz="2800" b="1">
+                <a:solidFill>
+                  <a:srgbClr val="1B3A5C"/>
+                </a:solidFill>
+                <a:latin typeface="Calibri"/>
+              </a:defRPr>
+            </a:pPr>
+            <a:r>
               <a:t>iWAT: LRT Interaction Results</a:t>
             </a:r>
           </a:p>
@@ -6209,7 +10601,7 @@
               <a:spcAft>
                 <a:spcPts val="600"/>
               </a:spcAft>
-              <a:defRPr sz="1400">
+              <a:defRPr sz="1300">
                 <a:solidFill>
                   <a:srgbClr val="000000"/>
                 </a:solidFill>
@@ -6225,7 +10617,7 @@
               <a:spcAft>
                 <a:spcPts val="600"/>
               </a:spcAft>
-              <a:defRPr sz="1400">
+              <a:defRPr sz="1300">
                 <a:solidFill>
                   <a:srgbClr val="000000"/>
                 </a:solidFill>
@@ -6241,7 +10633,7 @@
               <a:spcAft>
                 <a:spcPts val="600"/>
               </a:spcAft>
-              <a:defRPr sz="1400">
+              <a:defRPr sz="1300">
                 <a:solidFill>
                   <a:srgbClr val="000000"/>
                 </a:solidFill>
@@ -6257,36 +10649,36 @@
               <a:spcAft>
                 <a:spcPts val="600"/>
               </a:spcAft>
-              <a:defRPr sz="1400">
-                <a:solidFill>
-                  <a:srgbClr val="000000"/>
-                </a:solidFill>
-                <a:latin typeface="Calibri"/>
-              </a:defRPr>
-            </a:pPr>
-          </a:p>
-          <a:p>
-            <a:pPr>
-              <a:spcAft>
-                <a:spcPts val="600"/>
-              </a:spcAft>
-              <a:defRPr sz="1400">
-                <a:solidFill>
-                  <a:srgbClr val="000000"/>
-                </a:solidFill>
-                <a:latin typeface="Calibri"/>
-              </a:defRPr>
-            </a:pPr>
-            <a:r>
-              <a:t>How to read the histogram:</a:t>
-            </a:r>
-          </a:p>
-          <a:p>
-            <a:pPr>
-              <a:spcAft>
-                <a:spcPts val="600"/>
-              </a:spcAft>
-              <a:defRPr sz="1400">
+              <a:defRPr sz="1300">
+                <a:solidFill>
+                  <a:srgbClr val="000000"/>
+                </a:solidFill>
+                <a:latin typeface="Calibri"/>
+              </a:defRPr>
+            </a:pPr>
+          </a:p>
+          <a:p>
+            <a:pPr>
+              <a:spcAft>
+                <a:spcPts val="600"/>
+              </a:spcAft>
+              <a:defRPr sz="1300">
+                <a:solidFill>
+                  <a:srgbClr val="000000"/>
+                </a:solidFill>
+                <a:latin typeface="Calibri"/>
+              </a:defRPr>
+            </a:pPr>
+            <a:r>
+              <a:t>How to read the histogram (right):</a:t>
+            </a:r>
+          </a:p>
+          <a:p>
+            <a:pPr>
+              <a:spcAft>
+                <a:spcPts val="600"/>
+              </a:spcAft>
+              <a:defRPr sz="1300">
                 <a:solidFill>
                   <a:srgbClr val="000000"/>
                 </a:solidFill>
@@ -6302,7 +10694,7 @@
               <a:spcAft>
                 <a:spcPts val="600"/>
               </a:spcAft>
-              <a:defRPr sz="1400">
+              <a:defRPr sz="1300">
                 <a:solidFill>
                   <a:srgbClr val="000000"/>
                 </a:solidFill>
@@ -6318,7 +10710,7 @@
               <a:spcAft>
                 <a:spcPts val="600"/>
               </a:spcAft>
-              <a:defRPr sz="1400">
+              <a:defRPr sz="1300">
                 <a:solidFill>
                   <a:srgbClr val="000000"/>
                 </a:solidFill>
@@ -6334,7 +10726,7 @@
               <a:spcAft>
                 <a:spcPts val="600"/>
               </a:spcAft>
-              <a:defRPr sz="1400">
+              <a:defRPr sz="1300">
                 <a:solidFill>
                   <a:srgbClr val="000000"/>
                 </a:solidFill>
@@ -6343,6 +10735,83 @@
             </a:pPr>
             <a:r>
               <a:t>  - The histogram is mostly flat -&gt; most genes are null</a:t>
+            </a:r>
+          </a:p>
+          <a:p>
+            <a:pPr>
+              <a:spcAft>
+                <a:spcPts val="600"/>
+              </a:spcAft>
+              <a:defRPr sz="1300">
+                <a:solidFill>
+                  <a:srgbClr val="000000"/>
+                </a:solidFill>
+                <a:latin typeface="Calibri"/>
+              </a:defRPr>
+            </a:pPr>
+          </a:p>
+          <a:p>
+            <a:pPr>
+              <a:spcAft>
+                <a:spcPts val="600"/>
+              </a:spcAft>
+              <a:defRPr sz="1300">
+                <a:solidFill>
+                  <a:srgbClr val="000000"/>
+                </a:solidFill>
+                <a:latin typeface="Calibri"/>
+              </a:defRPr>
+            </a:pPr>
+            <a:r>
+              <a:t>3.83% is a low interaction rate. For context:</a:t>
+            </a:r>
+          </a:p>
+          <a:p>
+            <a:pPr>
+              <a:spcAft>
+                <a:spcPts val="600"/>
+              </a:spcAft>
+              <a:defRPr sz="1300">
+                <a:solidFill>
+                  <a:srgbClr val="000000"/>
+                </a:solidFill>
+                <a:latin typeface="Calibri"/>
+              </a:defRPr>
+            </a:pPr>
+            <a:r>
+              <a:t>  - At FDR &lt; 0.05, we expect ~5% false positives</a:t>
+            </a:r>
+          </a:p>
+          <a:p>
+            <a:pPr>
+              <a:spcAft>
+                <a:spcPts val="600"/>
+              </a:spcAft>
+              <a:defRPr sz="1300">
+                <a:solidFill>
+                  <a:srgbClr val="000000"/>
+                </a:solidFill>
+                <a:latin typeface="Calibri"/>
+              </a:defRPr>
+            </a:pPr>
+            <a:r>
+              <a:t>  - So some of these 630 genes are likely false positives</a:t>
+            </a:r>
+          </a:p>
+          <a:p>
+            <a:pPr>
+              <a:spcAft>
+                <a:spcPts val="600"/>
+              </a:spcAft>
+              <a:defRPr sz="1300">
+                <a:solidFill>
+                  <a:srgbClr val="000000"/>
+                </a:solidFill>
+                <a:latin typeface="Calibri"/>
+              </a:defRPr>
+            </a:pPr>
+            <a:r>
+              <a:t>  - The true interaction rate is even lower (see pi0 next)</a:t>
             </a:r>
           </a:p>
         </p:txBody>
@@ -6422,7 +10891,7 @@
 </p:sld>
 </file>
 
-<file path=ppt/slides/slide6.xml><?xml version="1.0" encoding="utf-8"?>
+<file path=ppt/slides/slide9.xml><?xml version="1.0" encoding="utf-8"?>
 <p:sld xmlns:a="http://schemas.openxmlformats.org/drawingml/2006/main" xmlns:p="http://schemas.openxmlformats.org/presentationml/2006/main" xmlns:r="http://schemas.openxmlformats.org/officeDocument/2006/relationships">
   <p:cSld>
     <p:spTree>
@@ -6494,7 +10963,7 @@
               <a:spcAft>
                 <a:spcPts val="600"/>
               </a:spcAft>
-              <a:defRPr sz="1400">
+              <a:defRPr sz="1300">
                 <a:solidFill>
                   <a:srgbClr val="000000"/>
                 </a:solidFill>
@@ -6510,7 +10979,7 @@
               <a:spcAft>
                 <a:spcPts val="600"/>
               </a:spcAft>
-              <a:defRPr sz="1400">
+              <a:defRPr sz="1300">
                 <a:solidFill>
                   <a:srgbClr val="000000"/>
                 </a:solidFill>
@@ -6526,7 +10995,7 @@
               <a:spcAft>
                 <a:spcPts val="600"/>
               </a:spcAft>
-              <a:defRPr sz="1400">
+              <a:defRPr sz="1300">
                 <a:solidFill>
                   <a:srgbClr val="000000"/>
                 </a:solidFill>
@@ -6542,44 +11011,153 @@
               <a:spcAft>
                 <a:spcPts val="600"/>
               </a:spcAft>
-              <a:defRPr sz="1400">
-                <a:solidFill>
-                  <a:srgbClr val="000000"/>
-                </a:solidFill>
-                <a:latin typeface="Calibri"/>
-              </a:defRPr>
-            </a:pPr>
-          </a:p>
-          <a:p>
-            <a:pPr>
-              <a:spcAft>
-                <a:spcPts val="600"/>
-              </a:spcAft>
-              <a:defRPr sz="1400">
-                <a:solidFill>
-                  <a:srgbClr val="000000"/>
-                </a:solidFill>
-                <a:latin typeface="Calibri"/>
-              </a:defRPr>
-            </a:pPr>
-            <a:r>
-              <a:t>Even fewer interaction genes than iWAT,</a:t>
-            </a:r>
-          </a:p>
-          <a:p>
-            <a:pPr>
-              <a:spcAft>
-                <a:spcPts val="600"/>
-              </a:spcAft>
-              <a:defRPr sz="1400">
-                <a:solidFill>
-                  <a:srgbClr val="000000"/>
-                </a:solidFill>
-                <a:latin typeface="Calibri"/>
-              </a:defRPr>
-            </a:pPr>
-            <a:r>
-              <a:t>supporting sex-independent KD effects in gWAT as well.</a:t>
+              <a:defRPr sz="1300">
+                <a:solidFill>
+                  <a:srgbClr val="000000"/>
+                </a:solidFill>
+                <a:latin typeface="Calibri"/>
+              </a:defRPr>
+            </a:pPr>
+          </a:p>
+          <a:p>
+            <a:pPr>
+              <a:spcAft>
+                <a:spcPts val="600"/>
+              </a:spcAft>
+              <a:defRPr sz="1300">
+                <a:solidFill>
+                  <a:srgbClr val="000000"/>
+                </a:solidFill>
+                <a:latin typeface="Calibri"/>
+              </a:defRPr>
+            </a:pPr>
+            <a:r>
+              <a:t>Even fewer interaction genes than iWAT (2.2% vs 3.8%),</a:t>
+            </a:r>
+          </a:p>
+          <a:p>
+            <a:pPr>
+              <a:spcAft>
+                <a:spcPts val="600"/>
+              </a:spcAft>
+              <a:defRPr sz="1300">
+                <a:solidFill>
+                  <a:srgbClr val="000000"/>
+                </a:solidFill>
+                <a:latin typeface="Calibri"/>
+              </a:defRPr>
+            </a:pPr>
+            <a:r>
+              <a:t>further supporting sex-independent KD effects.</a:t>
+            </a:r>
+          </a:p>
+          <a:p>
+            <a:pPr>
+              <a:spcAft>
+                <a:spcPts val="600"/>
+              </a:spcAft>
+              <a:defRPr sz="1300">
+                <a:solidFill>
+                  <a:srgbClr val="000000"/>
+                </a:solidFill>
+                <a:latin typeface="Calibri"/>
+              </a:defRPr>
+            </a:pPr>
+          </a:p>
+          <a:p>
+            <a:pPr>
+              <a:spcAft>
+                <a:spcPts val="600"/>
+              </a:spcAft>
+              <a:defRPr sz="1300">
+                <a:solidFill>
+                  <a:srgbClr val="000000"/>
+                </a:solidFill>
+                <a:latin typeface="Calibri"/>
+              </a:defRPr>
+            </a:pPr>
+            <a:r>
+              <a:t>Why might gWAT have fewer interactions?</a:t>
+            </a:r>
+          </a:p>
+          <a:p>
+            <a:pPr>
+              <a:spcAft>
+                <a:spcPts val="600"/>
+              </a:spcAft>
+              <a:defRPr sz="1300">
+                <a:solidFill>
+                  <a:srgbClr val="000000"/>
+                </a:solidFill>
+                <a:latin typeface="Calibri"/>
+              </a:defRPr>
+            </a:pPr>
+            <a:r>
+              <a:t>  - The KD effect is weaker in gWAT overall (fewer DEGs)</a:t>
+            </a:r>
+          </a:p>
+          <a:p>
+            <a:pPr>
+              <a:spcAft>
+                <a:spcPts val="600"/>
+              </a:spcAft>
+              <a:defRPr sz="1300">
+                <a:solidFill>
+                  <a:srgbClr val="000000"/>
+                </a:solidFill>
+                <a:latin typeface="Calibri"/>
+              </a:defRPr>
+            </a:pPr>
+            <a:r>
+              <a:t>  - With a weaker main signal, there's less room for</a:t>
+            </a:r>
+          </a:p>
+          <a:p>
+            <a:pPr>
+              <a:spcAft>
+                <a:spcPts val="600"/>
+              </a:spcAft>
+              <a:defRPr sz="1300">
+                <a:solidFill>
+                  <a:srgbClr val="000000"/>
+                </a:solidFill>
+                <a:latin typeface="Calibri"/>
+              </a:defRPr>
+            </a:pPr>
+            <a:r>
+              <a:t>    sex-dependent variation to be detected</a:t>
+            </a:r>
+          </a:p>
+          <a:p>
+            <a:pPr>
+              <a:spcAft>
+                <a:spcPts val="600"/>
+              </a:spcAft>
+              <a:defRPr sz="1300">
+                <a:solidFill>
+                  <a:srgbClr val="000000"/>
+                </a:solidFill>
+                <a:latin typeface="Calibri"/>
+              </a:defRPr>
+            </a:pPr>
+            <a:r>
+              <a:t>  - This is consistent with what we see in the main analysis:</a:t>
+            </a:r>
+          </a:p>
+          <a:p>
+            <a:pPr>
+              <a:spcAft>
+                <a:spcPts val="600"/>
+              </a:spcAft>
+              <a:defRPr sz="1300">
+                <a:solidFill>
+                  <a:srgbClr val="000000"/>
+                </a:solidFill>
+                <a:latin typeface="Calibri"/>
+              </a:defRPr>
+            </a:pPr>
+            <a:r>
+              <a:t>    iWAT shows a stronger KAT8 KD response than gWAT</a:t>
             </a:r>
           </a:p>
         </p:txBody>
@@ -6647,1024 +11225,6 @@
             </a:pPr>
             <a:r>
               <a:t>pvalue_hist_interaction_gWAT_&lt;run_tag&gt;.png</a:t>
-            </a:r>
-          </a:p>
-        </p:txBody>
-      </p:sp>
-    </p:spTree>
-  </p:cSld>
-  <p:clrMapOvr>
-    <a:masterClrMapping/>
-  </p:clrMapOvr>
-</p:sld>
-</file>
-
-<file path=ppt/slides/slide7.xml><?xml version="1.0" encoding="utf-8"?>
-<p:sld xmlns:a="http://schemas.openxmlformats.org/drawingml/2006/main" xmlns:p="http://schemas.openxmlformats.org/presentationml/2006/main" xmlns:r="http://schemas.openxmlformats.org/officeDocument/2006/relationships">
-  <p:cSld>
-    <p:spTree>
-      <p:nvGrpSpPr>
-        <p:cNvPr id="1" name=""/>
-        <p:cNvGrpSpPr/>
-        <p:nvPr/>
-      </p:nvGrpSpPr>
-      <p:grpSpPr/>
-      <p:sp>
-        <p:nvSpPr>
-          <p:cNvPr id="2" name="TextBox 1"/>
-          <p:cNvSpPr txBox="1"/>
-          <p:nvPr/>
-        </p:nvSpPr>
-        <p:spPr>
-          <a:xfrm>
-            <a:off x="548640" y="274320"/>
-            <a:ext cx="10972800" cy="548640"/>
-          </a:xfrm>
-          <a:prstGeom prst="rect">
-            <a:avLst/>
-          </a:prstGeom>
-          <a:noFill/>
-        </p:spPr>
-        <p:txBody>
-          <a:bodyPr wrap="square">
-            <a:spAutoFit/>
-          </a:bodyPr>
-          <a:lstStyle/>
-          <a:p>
-            <a:pPr algn="l">
-              <a:defRPr sz="2800" b="1">
-                <a:solidFill>
-                  <a:srgbClr val="1B3A5C"/>
-                </a:solidFill>
-                <a:latin typeface="Calibri"/>
-              </a:defRPr>
-            </a:pPr>
-            <a:r>
-              <a:t>Pi0: Estimating the True Null Proportion</a:t>
-            </a:r>
-          </a:p>
-        </p:txBody>
-      </p:sp>
-      <p:sp>
-        <p:nvSpPr>
-          <p:cNvPr id="3" name="TextBox 2"/>
-          <p:cNvSpPr txBox="1"/>
-          <p:nvPr/>
-        </p:nvSpPr>
-        <p:spPr>
-          <a:xfrm>
-            <a:off x="548640" y="1188720"/>
-            <a:ext cx="10972800" cy="5029200"/>
-          </a:xfrm>
-          <a:prstGeom prst="rect">
-            <a:avLst/>
-          </a:prstGeom>
-          <a:noFill/>
-        </p:spPr>
-        <p:txBody>
-          <a:bodyPr wrap="square">
-            <a:spAutoFit/>
-          </a:bodyPr>
-          <a:lstStyle/>
-          <a:p>
-            <a:pPr>
-              <a:spcAft>
-                <a:spcPts val="600"/>
-              </a:spcAft>
-              <a:defRPr sz="1400">
-                <a:solidFill>
-                  <a:srgbClr val="000000"/>
-                </a:solidFill>
-                <a:latin typeface="Calibri"/>
-              </a:defRPr>
-            </a:pPr>
-            <a:r>
-              <a:t>What is pi0?</a:t>
-            </a:r>
-          </a:p>
-          <a:p>
-            <a:pPr>
-              <a:spcAft>
-                <a:spcPts val="600"/>
-              </a:spcAft>
-              <a:defRPr sz="1400">
-                <a:solidFill>
-                  <a:srgbClr val="000000"/>
-                </a:solidFill>
-                <a:latin typeface="Calibri"/>
-              </a:defRPr>
-            </a:pPr>
-            <a:r>
-              <a:t>  Pi0 = the fraction of genes where the null hypothesis (no interaction) is truly correct</a:t>
-            </a:r>
-          </a:p>
-          <a:p>
-            <a:pPr>
-              <a:spcAft>
-                <a:spcPts val="600"/>
-              </a:spcAft>
-              <a:defRPr sz="1400">
-                <a:solidFill>
-                  <a:srgbClr val="000000"/>
-                </a:solidFill>
-                <a:latin typeface="Calibri"/>
-              </a:defRPr>
-            </a:pPr>
-            <a:r>
-              <a:t>  Not just 'failed to reject' -- this estimates the actual proportion of true nulls</a:t>
-            </a:r>
-          </a:p>
-          <a:p>
-            <a:pPr>
-              <a:spcAft>
-                <a:spcPts val="600"/>
-              </a:spcAft>
-              <a:defRPr sz="1400">
-                <a:solidFill>
-                  <a:srgbClr val="000000"/>
-                </a:solidFill>
-                <a:latin typeface="Calibri"/>
-              </a:defRPr>
-            </a:pPr>
-            <a:r>
-              <a:t>  Method: Storey &amp; Tibshirani (qvalue package), uses shape of p-value distribution</a:t>
-            </a:r>
-          </a:p>
-          <a:p>
-            <a:pPr>
-              <a:spcAft>
-                <a:spcPts val="600"/>
-              </a:spcAft>
-              <a:defRPr sz="1400">
-                <a:solidFill>
-                  <a:srgbClr val="000000"/>
-                </a:solidFill>
-                <a:latin typeface="Calibri"/>
-              </a:defRPr>
-            </a:pPr>
-          </a:p>
-          <a:p>
-            <a:pPr>
-              <a:spcAft>
-                <a:spcPts val="600"/>
-              </a:spcAft>
-              <a:defRPr sz="1400">
-                <a:solidFill>
-                  <a:srgbClr val="000000"/>
-                </a:solidFill>
-                <a:latin typeface="Calibri"/>
-              </a:defRPr>
-            </a:pPr>
-            <a:r>
-              <a:t>Results:</a:t>
-            </a:r>
-          </a:p>
-          <a:p>
-            <a:pPr>
-              <a:spcAft>
-                <a:spcPts val="600"/>
-              </a:spcAft>
-              <a:defRPr sz="1400">
-                <a:solidFill>
-                  <a:srgbClr val="000000"/>
-                </a:solidFill>
-                <a:latin typeface="Calibri"/>
-              </a:defRPr>
-            </a:pPr>
-            <a:r>
-              <a:t>  iWAT:  pi0 = 0.87  -&gt;  87% of genes genuinely have NO sex-dependent KD response</a:t>
-            </a:r>
-          </a:p>
-          <a:p>
-            <a:pPr>
-              <a:spcAft>
-                <a:spcPts val="600"/>
-              </a:spcAft>
-              <a:defRPr sz="1400">
-                <a:solidFill>
-                  <a:srgbClr val="000000"/>
-                </a:solidFill>
-                <a:latin typeface="Calibri"/>
-              </a:defRPr>
-            </a:pPr>
-            <a:r>
-              <a:t>  gWAT:  pi0 = 0.85  -&gt;  85% of genes genuinely have NO sex-dependent KD response</a:t>
-            </a:r>
-          </a:p>
-          <a:p>
-            <a:pPr>
-              <a:spcAft>
-                <a:spcPts val="600"/>
-              </a:spcAft>
-              <a:defRPr sz="1400">
-                <a:solidFill>
-                  <a:srgbClr val="000000"/>
-                </a:solidFill>
-                <a:latin typeface="Calibri"/>
-              </a:defRPr>
-            </a:pPr>
-          </a:p>
-          <a:p>
-            <a:pPr>
-              <a:spcAft>
-                <a:spcPts val="600"/>
-              </a:spcAft>
-              <a:defRPr sz="1400">
-                <a:solidFill>
-                  <a:srgbClr val="000000"/>
-                </a:solidFill>
-                <a:latin typeface="Calibri"/>
-              </a:defRPr>
-            </a:pPr>
-            <a:r>
-              <a:t>Interpretation:</a:t>
-            </a:r>
-          </a:p>
-          <a:p>
-            <a:pPr>
-              <a:spcAft>
-                <a:spcPts val="600"/>
-              </a:spcAft>
-              <a:defRPr sz="1400">
-                <a:solidFill>
-                  <a:srgbClr val="000000"/>
-                </a:solidFill>
-                <a:latin typeface="Calibri"/>
-              </a:defRPr>
-            </a:pPr>
-            <a:r>
-              <a:t>  The vast majority of genes respond identically to KAT8-KD in both sexes</a:t>
-            </a:r>
-          </a:p>
-          <a:p>
-            <a:pPr>
-              <a:spcAft>
-                <a:spcPts val="600"/>
-              </a:spcAft>
-              <a:defRPr sz="1400">
-                <a:solidFill>
-                  <a:srgbClr val="000000"/>
-                </a:solidFill>
-                <a:latin typeface="Calibri"/>
-              </a:defRPr>
-            </a:pPr>
-            <a:r>
-              <a:t>  The remaining ~13-15% includes both true interactions AND residual noise</a:t>
-            </a:r>
-          </a:p>
-          <a:p>
-            <a:pPr>
-              <a:spcAft>
-                <a:spcPts val="600"/>
-              </a:spcAft>
-              <a:defRPr sz="1400">
-                <a:solidFill>
-                  <a:srgbClr val="000000"/>
-                </a:solidFill>
-                <a:latin typeface="Calibri"/>
-              </a:defRPr>
-            </a:pPr>
-            <a:r>
-              <a:t>  This strongly supports pooling sexes for the primary analysis</a:t>
-            </a:r>
-          </a:p>
-        </p:txBody>
-      </p:sp>
-    </p:spTree>
-  </p:cSld>
-  <p:clrMapOvr>
-    <a:masterClrMapping/>
-  </p:clrMapOvr>
-</p:sld>
-</file>
-
-<file path=ppt/slides/slide8.xml><?xml version="1.0" encoding="utf-8"?>
-<p:sld xmlns:a="http://schemas.openxmlformats.org/drawingml/2006/main" xmlns:p="http://schemas.openxmlformats.org/presentationml/2006/main" xmlns:r="http://schemas.openxmlformats.org/officeDocument/2006/relationships">
-  <p:cSld>
-    <p:spTree>
-      <p:nvGrpSpPr>
-        <p:cNvPr id="1" name=""/>
-        <p:cNvGrpSpPr/>
-        <p:nvPr/>
-      </p:nvGrpSpPr>
-      <p:grpSpPr/>
-      <p:sp>
-        <p:nvSpPr>
-          <p:cNvPr id="2" name="TextBox 1"/>
-          <p:cNvSpPr txBox="1"/>
-          <p:nvPr/>
-        </p:nvSpPr>
-        <p:spPr>
-          <a:xfrm>
-            <a:off x="548640" y="274320"/>
-            <a:ext cx="10972800" cy="548640"/>
-          </a:xfrm>
-          <a:prstGeom prst="rect">
-            <a:avLst/>
-          </a:prstGeom>
-          <a:noFill/>
-        </p:spPr>
-        <p:txBody>
-          <a:bodyPr wrap="square">
-            <a:spAutoFit/>
-          </a:bodyPr>
-          <a:lstStyle/>
-          <a:p>
-            <a:pPr algn="l">
-              <a:defRPr sz="2800" b="1">
-                <a:solidFill>
-                  <a:srgbClr val="1B3A5C"/>
-                </a:solidFill>
-                <a:latin typeface="Calibri"/>
-              </a:defRPr>
-            </a:pPr>
-            <a:r>
-              <a:t>Variance Attribution: What Drives Gene Expression?</a:t>
-            </a:r>
-          </a:p>
-        </p:txBody>
-      </p:sp>
-      <p:sp>
-        <p:nvSpPr>
-          <p:cNvPr id="3" name="TextBox 2"/>
-          <p:cNvSpPr txBox="1"/>
-          <p:nvPr/>
-        </p:nvSpPr>
-        <p:spPr>
-          <a:xfrm>
-            <a:off x="548640" y="822960"/>
-            <a:ext cx="10972800" cy="365760"/>
-          </a:xfrm>
-          <a:prstGeom prst="rect">
-            <a:avLst/>
-          </a:prstGeom>
-          <a:noFill/>
-        </p:spPr>
-        <p:txBody>
-          <a:bodyPr wrap="square">
-            <a:spAutoFit/>
-          </a:bodyPr>
-          <a:lstStyle/>
-          <a:p>
-            <a:pPr algn="l">
-              <a:defRPr sz="1400" b="0">
-                <a:solidFill>
-                  <a:srgbClr val="666666"/>
-                </a:solidFill>
-                <a:latin typeface="Calibri"/>
-              </a:defRPr>
-            </a:pPr>
-            <a:r>
-              <a:t>ANOVA decomposition on VST-transformed counts: lm(expression ~ Sex + Genotype + Sex:Genotype)</a:t>
-            </a:r>
-          </a:p>
-        </p:txBody>
-      </p:sp>
-      <p:sp>
-        <p:nvSpPr>
-          <p:cNvPr id="4" name="TextBox 3"/>
-          <p:cNvSpPr txBox="1"/>
-          <p:nvPr/>
-        </p:nvSpPr>
-        <p:spPr>
-          <a:xfrm>
-            <a:off x="548640" y="1463040"/>
-            <a:ext cx="5029200" cy="2286000"/>
-          </a:xfrm>
-          <a:prstGeom prst="rect">
-            <a:avLst/>
-          </a:prstGeom>
-          <a:noFill/>
-        </p:spPr>
-        <p:txBody>
-          <a:bodyPr wrap="square">
-            <a:spAutoFit/>
-          </a:bodyPr>
-          <a:lstStyle/>
-          <a:p>
-            <a:pPr>
-              <a:spcAft>
-                <a:spcPts val="600"/>
-              </a:spcAft>
-              <a:defRPr sz="1400">
-                <a:solidFill>
-                  <a:srgbClr val="000000"/>
-                </a:solidFill>
-                <a:latin typeface="Calibri"/>
-              </a:defRPr>
-            </a:pPr>
-            <a:r>
-              <a:t>For each gene, how much variance is explained by each factor?</a:t>
-            </a:r>
-          </a:p>
-          <a:p>
-            <a:pPr>
-              <a:spcAft>
-                <a:spcPts val="600"/>
-              </a:spcAft>
-              <a:defRPr sz="1400">
-                <a:solidFill>
-                  <a:srgbClr val="000000"/>
-                </a:solidFill>
-                <a:latin typeface="Calibri"/>
-              </a:defRPr>
-            </a:pPr>
-          </a:p>
-          <a:p>
-            <a:pPr>
-              <a:spcAft>
-                <a:spcPts val="600"/>
-              </a:spcAft>
-              <a:defRPr sz="1400">
-                <a:solidFill>
-                  <a:srgbClr val="000000"/>
-                </a:solidFill>
-                <a:latin typeface="Calibri"/>
-              </a:defRPr>
-            </a:pPr>
-            <a:r>
-              <a:t>         Term          iWAT (median)   gWAT (median)</a:t>
-            </a:r>
-          </a:p>
-          <a:p>
-            <a:pPr>
-              <a:spcAft>
-                <a:spcPts val="600"/>
-              </a:spcAft>
-              <a:defRPr sz="1400">
-                <a:solidFill>
-                  <a:srgbClr val="000000"/>
-                </a:solidFill>
-                <a:latin typeface="Calibri"/>
-              </a:defRPr>
-            </a:pPr>
-            <a:r>
-              <a:t>  Sex                       6.5%            11.5%</a:t>
-            </a:r>
-          </a:p>
-          <a:p>
-            <a:pPr>
-              <a:spcAft>
-                <a:spcPts val="600"/>
-              </a:spcAft>
-              <a:defRPr sz="1400">
-                <a:solidFill>
-                  <a:srgbClr val="000000"/>
-                </a:solidFill>
-                <a:latin typeface="Calibri"/>
-              </a:defRPr>
-            </a:pPr>
-            <a:r>
-              <a:t>  Genotype (KD effect)    33.2%            16.7%</a:t>
-            </a:r>
-          </a:p>
-          <a:p>
-            <a:pPr>
-              <a:spcAft>
-                <a:spcPts val="600"/>
-              </a:spcAft>
-              <a:defRPr sz="1400">
-                <a:solidFill>
-                  <a:srgbClr val="000000"/>
-                </a:solidFill>
-                <a:latin typeface="Calibri"/>
-              </a:defRPr>
-            </a:pPr>
-            <a:r>
-              <a:t>  Sex x Genotype            2.1%              2.4%</a:t>
-            </a:r>
-          </a:p>
-          <a:p>
-            <a:pPr>
-              <a:spcAft>
-                <a:spcPts val="600"/>
-              </a:spcAft>
-              <a:defRPr sz="1400">
-                <a:solidFill>
-                  <a:srgbClr val="000000"/>
-                </a:solidFill>
-                <a:latin typeface="Calibri"/>
-              </a:defRPr>
-            </a:pPr>
-            <a:r>
-              <a:t>  Residual                  46.3%            50.1%</a:t>
-            </a:r>
-          </a:p>
-        </p:txBody>
-      </p:sp>
-      <p:sp>
-        <p:nvSpPr>
-          <p:cNvPr id="5" name="TextBox 4"/>
-          <p:cNvSpPr txBox="1"/>
-          <p:nvPr/>
-        </p:nvSpPr>
-        <p:spPr>
-          <a:xfrm>
-            <a:off x="548640" y="4114800"/>
-            <a:ext cx="5029200" cy="1828800"/>
-          </a:xfrm>
-          <a:prstGeom prst="rect">
-            <a:avLst/>
-          </a:prstGeom>
-          <a:noFill/>
-        </p:spPr>
-        <p:txBody>
-          <a:bodyPr wrap="square">
-            <a:spAutoFit/>
-          </a:bodyPr>
-          <a:lstStyle/>
-          <a:p>
-            <a:pPr>
-              <a:spcAft>
-                <a:spcPts val="600"/>
-              </a:spcAft>
-              <a:defRPr sz="1400">
-                <a:solidFill>
-                  <a:srgbClr val="1B3A5C"/>
-                </a:solidFill>
-                <a:latin typeface="Calibri"/>
-              </a:defRPr>
-            </a:pPr>
-            <a:r>
-              <a:t>Key takeaway: The interaction term explains only ~2% of variance</a:t>
-            </a:r>
-          </a:p>
-          <a:p>
-            <a:pPr>
-              <a:spcAft>
-                <a:spcPts val="600"/>
-              </a:spcAft>
-              <a:defRPr sz="1400">
-                <a:solidFill>
-                  <a:srgbClr val="1B3A5C"/>
-                </a:solidFill>
-                <a:latin typeface="Calibri"/>
-              </a:defRPr>
-            </a:pPr>
-            <a:r>
-              <a:t>  vs. 17-33% for the Genotype main effect (8-16x more)</a:t>
-            </a:r>
-          </a:p>
-          <a:p>
-            <a:pPr>
-              <a:spcAft>
-                <a:spcPts val="600"/>
-              </a:spcAft>
-              <a:defRPr sz="1400">
-                <a:solidFill>
-                  <a:srgbClr val="1B3A5C"/>
-                </a:solidFill>
-                <a:latin typeface="Calibri"/>
-              </a:defRPr>
-            </a:pPr>
-            <a:r>
-              <a:t>The KD signal dominates; sex-dependent effects are minimal</a:t>
-            </a:r>
-          </a:p>
-        </p:txBody>
-      </p:sp>
-      <p:sp>
-        <p:nvSpPr>
-          <p:cNvPr id="6" name="Rectangle 5"/>
-          <p:cNvSpPr/>
-          <p:nvPr/>
-        </p:nvSpPr>
-        <p:spPr>
-          <a:xfrm>
-            <a:off x="5943600" y="1371600"/>
-            <a:ext cx="5486400" cy="4572000"/>
-          </a:xfrm>
-          <a:prstGeom prst="rect">
-            <a:avLst/>
-          </a:prstGeom>
-          <a:solidFill>
-            <a:srgbClr val="F2F2F2"/>
-          </a:solidFill>
-          <a:ln w="19050">
-            <a:solidFill>
-              <a:srgbClr val="999999"/>
-            </a:solidFill>
-            <a:prstDash val="sysDash"/>
-          </a:ln>
-        </p:spPr>
-        <p:style>
-          <a:lnRef idx="1">
-            <a:schemeClr val="accent1"/>
-          </a:lnRef>
-          <a:fillRef idx="3">
-            <a:schemeClr val="accent1"/>
-          </a:fillRef>
-          <a:effectRef idx="2">
-            <a:schemeClr val="accent1"/>
-          </a:effectRef>
-          <a:fontRef idx="minor">
-            <a:schemeClr val="lt1"/>
-          </a:fontRef>
-        </p:style>
-        <p:txBody>
-          <a:bodyPr rtlCol="0" anchor="ctr" wrap="square"/>
-          <a:lstStyle/>
-          <a:p>
-            <a:pPr algn="ctr">
-              <a:defRPr sz="1400" b="1">
-                <a:solidFill>
-                  <a:srgbClr val="666666"/>
-                </a:solidFill>
-              </a:defRPr>
-            </a:pPr>
-            <a:r>
-              <a:t>INSERT PLOT</a:t>
-            </a:r>
-          </a:p>
-          <a:p>
-            <a:pPr algn="ctr">
-              <a:defRPr sz="1100" i="1">
-                <a:solidFill>
-                  <a:srgbClr val="666666"/>
-                </a:solidFill>
-              </a:defRPr>
-            </a:pPr>
-            <a:r>
-              <a:t>variance_explained_&lt;depot&gt;_&lt;run_tag&gt;.png</a:t>
-            </a:r>
-          </a:p>
-        </p:txBody>
-      </p:sp>
-    </p:spTree>
-  </p:cSld>
-  <p:clrMapOvr>
-    <a:masterClrMapping/>
-  </p:clrMapOvr>
-</p:sld>
-</file>
-
-<file path=ppt/slides/slide9.xml><?xml version="1.0" encoding="utf-8"?>
-<p:sld xmlns:a="http://schemas.openxmlformats.org/drawingml/2006/main" xmlns:p="http://schemas.openxmlformats.org/presentationml/2006/main" xmlns:r="http://schemas.openxmlformats.org/officeDocument/2006/relationships">
-  <p:cSld>
-    <p:spTree>
-      <p:nvGrpSpPr>
-        <p:cNvPr id="1" name=""/>
-        <p:cNvGrpSpPr/>
-        <p:nvPr/>
-      </p:nvGrpSpPr>
-      <p:grpSpPr/>
-      <p:sp>
-        <p:nvSpPr>
-          <p:cNvPr id="2" name="TextBox 1"/>
-          <p:cNvSpPr txBox="1"/>
-          <p:nvPr/>
-        </p:nvSpPr>
-        <p:spPr>
-          <a:xfrm>
-            <a:off x="548640" y="274320"/>
-            <a:ext cx="10972800" cy="548640"/>
-          </a:xfrm>
-          <a:prstGeom prst="rect">
-            <a:avLst/>
-          </a:prstGeom>
-          <a:noFill/>
-        </p:spPr>
-        <p:txBody>
-          <a:bodyPr wrap="square">
-            <a:spAutoFit/>
-          </a:bodyPr>
-          <a:lstStyle/>
-          <a:p>
-            <a:pPr algn="l">
-              <a:defRPr sz="2800" b="1">
-                <a:solidFill>
-                  <a:srgbClr val="1B3A5C"/>
-                </a:solidFill>
-                <a:latin typeface="Calibri"/>
-              </a:defRPr>
-            </a:pPr>
-            <a:r>
-              <a:t>Sex-Stratified Concordance: iWAT</a:t>
-            </a:r>
-          </a:p>
-        </p:txBody>
-      </p:sp>
-      <p:sp>
-        <p:nvSpPr>
-          <p:cNvPr id="3" name="TextBox 2"/>
-          <p:cNvSpPr txBox="1"/>
-          <p:nvPr/>
-        </p:nvSpPr>
-        <p:spPr>
-          <a:xfrm>
-            <a:off x="548640" y="822960"/>
-            <a:ext cx="10972800" cy="365760"/>
-          </a:xfrm>
-          <a:prstGeom prst="rect">
-            <a:avLst/>
-          </a:prstGeom>
-          <a:noFill/>
-        </p:spPr>
-        <p:txBody>
-          <a:bodyPr wrap="square">
-            <a:spAutoFit/>
-          </a:bodyPr>
-          <a:lstStyle/>
-          <a:p>
-            <a:pPr algn="l">
-              <a:defRPr sz="1400" b="0">
-                <a:solidFill>
-                  <a:srgbClr val="666666"/>
-                </a:solidFill>
-                <a:latin typeface="Calibri"/>
-              </a:defRPr>
-            </a:pPr>
-            <a:r>
-              <a:t>Run DESeq2 separately for F-only and M-only, then correlate KD log2FCs</a:t>
-            </a:r>
-          </a:p>
-        </p:txBody>
-      </p:sp>
-      <p:sp>
-        <p:nvSpPr>
-          <p:cNvPr id="4" name="TextBox 3"/>
-          <p:cNvSpPr txBox="1"/>
-          <p:nvPr/>
-        </p:nvSpPr>
-        <p:spPr>
-          <a:xfrm>
-            <a:off x="548640" y="1463040"/>
-            <a:ext cx="5029200" cy="4114800"/>
-          </a:xfrm>
-          <a:prstGeom prst="rect">
-            <a:avLst/>
-          </a:prstGeom>
-          <a:noFill/>
-        </p:spPr>
-        <p:txBody>
-          <a:bodyPr wrap="square">
-            <a:spAutoFit/>
-          </a:bodyPr>
-          <a:lstStyle/>
-          <a:p>
-            <a:pPr>
-              <a:spcAft>
-                <a:spcPts val="600"/>
-              </a:spcAft>
-              <a:defRPr sz="1300">
-                <a:solidFill>
-                  <a:srgbClr val="000000"/>
-                </a:solidFill>
-                <a:latin typeface="Calibri"/>
-              </a:defRPr>
-            </a:pPr>
-            <a:r>
-              <a:t>Pearson r = 0.727 (moderate-to-strong concordance)</a:t>
-            </a:r>
-          </a:p>
-          <a:p>
-            <a:pPr>
-              <a:spcAft>
-                <a:spcPts val="600"/>
-              </a:spcAft>
-              <a:defRPr sz="1300">
-                <a:solidFill>
-                  <a:srgbClr val="000000"/>
-                </a:solidFill>
-                <a:latin typeface="Calibri"/>
-              </a:defRPr>
-            </a:pPr>
-          </a:p>
-          <a:p>
-            <a:pPr>
-              <a:spcAft>
-                <a:spcPts val="600"/>
-              </a:spcAft>
-              <a:defRPr sz="1300">
-                <a:solidFill>
-                  <a:srgbClr val="000000"/>
-                </a:solidFill>
-                <a:latin typeface="Calibri"/>
-              </a:defRPr>
-            </a:pPr>
-            <a:r>
-              <a:t>How to read this scatter plot:</a:t>
-            </a:r>
-          </a:p>
-          <a:p>
-            <a:pPr>
-              <a:spcAft>
-                <a:spcPts val="600"/>
-              </a:spcAft>
-              <a:defRPr sz="1300">
-                <a:solidFill>
-                  <a:srgbClr val="000000"/>
-                </a:solidFill>
-                <a:latin typeface="Calibri"/>
-              </a:defRPr>
-            </a:pPr>
-            <a:r>
-              <a:t>  X-axis = Female KD log2FC   Y-axis = Male KD log2FC</a:t>
-            </a:r>
-          </a:p>
-          <a:p>
-            <a:pPr>
-              <a:spcAft>
-                <a:spcPts val="600"/>
-              </a:spcAft>
-              <a:defRPr sz="1300">
-                <a:solidFill>
-                  <a:srgbClr val="000000"/>
-                </a:solidFill>
-                <a:latin typeface="Calibri"/>
-              </a:defRPr>
-            </a:pPr>
-            <a:r>
-              <a:t>  Diagonal line = perfect concordance (M = F)</a:t>
-            </a:r>
-          </a:p>
-          <a:p>
-            <a:pPr>
-              <a:spcAft>
-                <a:spcPts val="600"/>
-              </a:spcAft>
-              <a:defRPr sz="1300">
-                <a:solidFill>
-                  <a:srgbClr val="000000"/>
-                </a:solidFill>
-                <a:latin typeface="Calibri"/>
-              </a:defRPr>
-            </a:pPr>
-          </a:p>
-          <a:p>
-            <a:pPr>
-              <a:spcAft>
-                <a:spcPts val="600"/>
-              </a:spcAft>
-              <a:defRPr sz="1300">
-                <a:solidFill>
-                  <a:srgbClr val="000000"/>
-                </a:solidFill>
-                <a:latin typeface="Calibri"/>
-              </a:defRPr>
-            </a:pPr>
-            <a:r>
-              <a:t>  Purple dots: significant in BOTH sexes (strongest evidence)</a:t>
-            </a:r>
-          </a:p>
-          <a:p>
-            <a:pPr>
-              <a:spcAft>
-                <a:spcPts val="600"/>
-              </a:spcAft>
-              <a:defRPr sz="1300">
-                <a:solidFill>
-                  <a:srgbClr val="000000"/>
-                </a:solidFill>
-                <a:latin typeface="Calibri"/>
-              </a:defRPr>
-            </a:pPr>
-            <a:r>
-              <a:t>  Red dots: significant in F only</a:t>
-            </a:r>
-          </a:p>
-          <a:p>
-            <a:pPr>
-              <a:spcAft>
-                <a:spcPts val="600"/>
-              </a:spcAft>
-              <a:defRPr sz="1300">
-                <a:solidFill>
-                  <a:srgbClr val="000000"/>
-                </a:solidFill>
-                <a:latin typeface="Calibri"/>
-              </a:defRPr>
-            </a:pPr>
-            <a:r>
-              <a:t>  Blue dots: significant in M only</a:t>
-            </a:r>
-          </a:p>
-          <a:p>
-            <a:pPr>
-              <a:spcAft>
-                <a:spcPts val="600"/>
-              </a:spcAft>
-              <a:defRPr sz="1300">
-                <a:solidFill>
-                  <a:srgbClr val="000000"/>
-                </a:solidFill>
-                <a:latin typeface="Calibri"/>
-              </a:defRPr>
-            </a:pPr>
-            <a:r>
-              <a:t>  Grey dots: not significant in either</a:t>
-            </a:r>
-          </a:p>
-          <a:p>
-            <a:pPr>
-              <a:spcAft>
-                <a:spcPts val="600"/>
-              </a:spcAft>
-              <a:defRPr sz="1300">
-                <a:solidFill>
-                  <a:srgbClr val="000000"/>
-                </a:solidFill>
-                <a:latin typeface="Calibri"/>
-              </a:defRPr>
-            </a:pPr>
-          </a:p>
-          <a:p>
-            <a:pPr>
-              <a:spcAft>
-                <a:spcPts val="600"/>
-              </a:spcAft>
-              <a:defRPr sz="1300">
-                <a:solidFill>
-                  <a:srgbClr val="000000"/>
-                </a:solidFill>
-                <a:latin typeface="Calibri"/>
-              </a:defRPr>
-            </a:pPr>
-            <a:r>
-              <a:t>Points along the diagonal = same response in both sexes</a:t>
-            </a:r>
-          </a:p>
-          <a:p>
-            <a:pPr>
-              <a:spcAft>
-                <a:spcPts val="600"/>
-              </a:spcAft>
-              <a:defRPr sz="1300">
-                <a:solidFill>
-                  <a:srgbClr val="000000"/>
-                </a:solidFill>
-                <a:latin typeface="Calibri"/>
-              </a:defRPr>
-            </a:pPr>
-            <a:r>
-              <a:t>r = 0.73 indicates good concordance -- both sexes largely agree</a:t>
-            </a:r>
-          </a:p>
-        </p:txBody>
-      </p:sp>
-      <p:sp>
-        <p:nvSpPr>
-          <p:cNvPr id="5" name="Rectangle 4"/>
-          <p:cNvSpPr/>
-          <p:nvPr/>
-        </p:nvSpPr>
-        <p:spPr>
-          <a:xfrm>
-            <a:off x="5943600" y="1371600"/>
-            <a:ext cx="5486400" cy="4572000"/>
-          </a:xfrm>
-          <a:prstGeom prst="rect">
-            <a:avLst/>
-          </a:prstGeom>
-          <a:solidFill>
-            <a:srgbClr val="F2F2F2"/>
-          </a:solidFill>
-          <a:ln w="19050">
-            <a:solidFill>
-              <a:srgbClr val="999999"/>
-            </a:solidFill>
-            <a:prstDash val="sysDash"/>
-          </a:ln>
-        </p:spPr>
-        <p:style>
-          <a:lnRef idx="1">
-            <a:schemeClr val="accent1"/>
-          </a:lnRef>
-          <a:fillRef idx="3">
-            <a:schemeClr val="accent1"/>
-          </a:fillRef>
-          <a:effectRef idx="2">
-            <a:schemeClr val="accent1"/>
-          </a:effectRef>
-          <a:fontRef idx="minor">
-            <a:schemeClr val="lt1"/>
-          </a:fontRef>
-        </p:style>
-        <p:txBody>
-          <a:bodyPr rtlCol="0" anchor="ctr" wrap="square"/>
-          <a:lstStyle/>
-          <a:p>
-            <a:pPr algn="ctr">
-              <a:defRPr sz="1400" b="1">
-                <a:solidFill>
-                  <a:srgbClr val="666666"/>
-                </a:solidFill>
-              </a:defRPr>
-            </a:pPr>
-            <a:r>
-              <a:t>INSERT PLOT</a:t>
-            </a:r>
-          </a:p>
-          <a:p>
-            <a:pPr algn="ctr">
-              <a:defRPr sz="1100" i="1">
-                <a:solidFill>
-                  <a:srgbClr val="666666"/>
-                </a:solidFill>
-              </a:defRPr>
-            </a:pPr>
-            <a:r>
-              <a:t>sex_concordance_scatter_iWAT_&lt;run_tag&gt;.png</a:t>
             </a:r>
           </a:p>
         </p:txBody>

--- a/Results/KAT8_sex_interaction_presentation.pptx
+++ b/Results/KAT8_sex_interaction_presentation.pptx
@@ -26,6 +26,7 @@
     <p:sldId id="274" r:id="rId25"/>
     <p:sldId id="275" r:id="rId26"/>
     <p:sldId id="276" r:id="rId27"/>
+    <p:sldId id="277" r:id="rId28"/>
   </p:sldIdLst>
   <p:sldSz cx="12191695" cy="6858000" type="screen4x3"/>
   <p:notesSz cx="6858000" cy="9144000"/>
@@ -4335,69 +4336,122 @@
           </a:p>
         </p:txBody>
       </p:sp>
-      <p:sp>
-        <p:nvSpPr>
-          <p:cNvPr id="6" name="Rectangle 5"/>
-          <p:cNvSpPr/>
+      <p:pic>
+        <p:nvPicPr>
+          <p:cNvPr id="6" name="Picture 5" descr="04_variance_decomposition_iWAT.png"/>
+          <p:cNvPicPr>
+            <a:picLocks noChangeAspect="1"/>
+          </p:cNvPicPr>
           <p:nvPr/>
-        </p:nvSpPr>
+        </p:nvPicPr>
+        <p:blipFill>
+          <a:blip r:embed="rId2"/>
+          <a:stretch>
+            <a:fillRect/>
+          </a:stretch>
+        </p:blipFill>
         <p:spPr>
           <a:xfrm>
             <a:off x="5943600" y="1371600"/>
-            <a:ext cx="5486400" cy="4572000"/>
+            <a:ext cx="2743200" cy="2286000"/>
           </a:xfrm>
           <a:prstGeom prst="rect">
             <a:avLst/>
           </a:prstGeom>
-          <a:solidFill>
-            <a:srgbClr val="F2F2F2"/>
-          </a:solidFill>
-          <a:ln w="19050">
-            <a:solidFill>
-              <a:srgbClr val="999999"/>
-            </a:solidFill>
-            <a:prstDash val="sysDash"/>
-          </a:ln>
         </p:spPr>
-        <p:style>
-          <a:lnRef idx="1">
-            <a:schemeClr val="accent1"/>
-          </a:lnRef>
-          <a:fillRef idx="3">
-            <a:schemeClr val="accent1"/>
-          </a:fillRef>
-          <a:effectRef idx="2">
-            <a:schemeClr val="accent1"/>
-          </a:effectRef>
-          <a:fontRef idx="minor">
-            <a:schemeClr val="lt1"/>
-          </a:fontRef>
-        </p:style>
-        <p:txBody>
-          <a:bodyPr rtlCol="0" anchor="ctr" wrap="square"/>
+      </p:pic>
+      <p:pic>
+        <p:nvPicPr>
+          <p:cNvPr id="7" name="Picture 6" descr="04_variance_decomposition_gWAT.png"/>
+          <p:cNvPicPr>
+            <a:picLocks noChangeAspect="1"/>
+          </p:cNvPicPr>
+          <p:nvPr/>
+        </p:nvPicPr>
+        <p:blipFill>
+          <a:blip r:embed="rId3"/>
+          <a:stretch>
+            <a:fillRect/>
+          </a:stretch>
+        </p:blipFill>
+        <p:spPr>
+          <a:xfrm>
+            <a:off x="8869680" y="1371600"/>
+            <a:ext cx="2743200" cy="2286000"/>
+          </a:xfrm>
+          <a:prstGeom prst="rect">
+            <a:avLst/>
+          </a:prstGeom>
+        </p:spPr>
+      </p:pic>
+      <p:sp>
+        <p:nvSpPr>
+          <p:cNvPr id="8" name="TextBox 7"/>
+          <p:cNvSpPr txBox="1"/>
+          <p:nvPr/>
+        </p:nvSpPr>
+        <p:spPr>
+          <a:xfrm>
+            <a:off x="6675120" y="3749039"/>
+            <a:ext cx="1828800" cy="274320"/>
+          </a:xfrm>
+          <a:prstGeom prst="rect">
+            <a:avLst/>
+          </a:prstGeom>
+          <a:noFill/>
+        </p:spPr>
+        <p:txBody>
+          <a:bodyPr wrap="square">
+            <a:spAutoFit/>
+          </a:bodyPr>
           <a:lstStyle/>
           <a:p>
             <a:pPr algn="ctr">
-              <a:defRPr sz="1400" b="1">
+              <a:defRPr sz="1100" b="1">
                 <a:solidFill>
                   <a:srgbClr val="666666"/>
                 </a:solidFill>
-              </a:defRPr>
-            </a:pPr>
-            <a:r>
-              <a:t>INSERT PLOT</a:t>
-            </a:r>
-          </a:p>
+                <a:latin typeface="Calibri"/>
+              </a:defRPr>
+            </a:pPr>
+            <a:r>
+              <a:t>iWAT</a:t>
+            </a:r>
+          </a:p>
+        </p:txBody>
+      </p:sp>
+      <p:sp>
+        <p:nvSpPr>
+          <p:cNvPr id="9" name="TextBox 8"/>
+          <p:cNvSpPr txBox="1"/>
+          <p:nvPr/>
+        </p:nvSpPr>
+        <p:spPr>
+          <a:xfrm>
+            <a:off x="9601200" y="3749039"/>
+            <a:ext cx="1828800" cy="274320"/>
+          </a:xfrm>
+          <a:prstGeom prst="rect">
+            <a:avLst/>
+          </a:prstGeom>
+          <a:noFill/>
+        </p:spPr>
+        <p:txBody>
+          <a:bodyPr wrap="square">
+            <a:spAutoFit/>
+          </a:bodyPr>
+          <a:lstStyle/>
           <a:p>
             <a:pPr algn="ctr">
-              <a:defRPr sz="1100" i="1">
+              <a:defRPr sz="1100" b="1">
                 <a:solidFill>
                   <a:srgbClr val="666666"/>
                 </a:solidFill>
-              </a:defRPr>
-            </a:pPr>
-            <a:r>
-              <a:t>variance_explained_&lt;depot&gt;_&lt;run_tag&gt;.png</a:t>
+                <a:latin typeface="Calibri"/>
+              </a:defRPr>
+            </a:pPr>
+            <a:r>
+              <a:t>gWAT</a:t>
             </a:r>
           </a:p>
         </p:txBody>
@@ -5155,12 +5209,20 @@
           </a:p>
         </p:txBody>
       </p:sp>
-      <p:sp>
-        <p:nvSpPr>
-          <p:cNvPr id="5" name="Rectangle 4"/>
-          <p:cNvSpPr/>
+      <p:pic>
+        <p:nvPicPr>
+          <p:cNvPr id="5" name="Picture 4" descr="02_sex_concordance_scatter_iWAT.png"/>
+          <p:cNvPicPr>
+            <a:picLocks noChangeAspect="1"/>
+          </p:cNvPicPr>
           <p:nvPr/>
-        </p:nvSpPr>
+        </p:nvPicPr>
+        <p:blipFill>
+          <a:blip r:embed="rId2"/>
+          <a:stretch>
+            <a:fillRect/>
+          </a:stretch>
+        </p:blipFill>
         <p:spPr>
           <a:xfrm>
             <a:off x="5943600" y="1371600"/>
@@ -5169,59 +5231,8 @@
           <a:prstGeom prst="rect">
             <a:avLst/>
           </a:prstGeom>
-          <a:solidFill>
-            <a:srgbClr val="F2F2F2"/>
-          </a:solidFill>
-          <a:ln w="19050">
-            <a:solidFill>
-              <a:srgbClr val="999999"/>
-            </a:solidFill>
-            <a:prstDash val="sysDash"/>
-          </a:ln>
         </p:spPr>
-        <p:style>
-          <a:lnRef idx="1">
-            <a:schemeClr val="accent1"/>
-          </a:lnRef>
-          <a:fillRef idx="3">
-            <a:schemeClr val="accent1"/>
-          </a:fillRef>
-          <a:effectRef idx="2">
-            <a:schemeClr val="accent1"/>
-          </a:effectRef>
-          <a:fontRef idx="minor">
-            <a:schemeClr val="lt1"/>
-          </a:fontRef>
-        </p:style>
-        <p:txBody>
-          <a:bodyPr rtlCol="0" anchor="ctr" wrap="square"/>
-          <a:lstStyle/>
-          <a:p>
-            <a:pPr algn="ctr">
-              <a:defRPr sz="1400" b="1">
-                <a:solidFill>
-                  <a:srgbClr val="666666"/>
-                </a:solidFill>
-              </a:defRPr>
-            </a:pPr>
-            <a:r>
-              <a:t>INSERT PLOT</a:t>
-            </a:r>
-          </a:p>
-          <a:p>
-            <a:pPr algn="ctr">
-              <a:defRPr sz="1100" i="1">
-                <a:solidFill>
-                  <a:srgbClr val="666666"/>
-                </a:solidFill>
-              </a:defRPr>
-            </a:pPr>
-            <a:r>
-              <a:t>sex_concordance_scatter_iWAT_&lt;run_tag&gt;.png</a:t>
-            </a:r>
-          </a:p>
-        </p:txBody>
-      </p:sp>
+      </p:pic>
     </p:spTree>
   </p:cSld>
   <p:clrMapOvr>
@@ -5598,12 +5609,20 @@
           </a:p>
         </p:txBody>
       </p:sp>
-      <p:sp>
-        <p:nvSpPr>
-          <p:cNvPr id="5" name="Rectangle 4"/>
-          <p:cNvSpPr/>
+      <p:pic>
+        <p:nvPicPr>
+          <p:cNvPr id="5" name="Picture 4" descr="02_sex_concordance_scatter_gWAT.png"/>
+          <p:cNvPicPr>
+            <a:picLocks noChangeAspect="1"/>
+          </p:cNvPicPr>
           <p:nvPr/>
-        </p:nvSpPr>
+        </p:nvPicPr>
+        <p:blipFill>
+          <a:blip r:embed="rId2"/>
+          <a:stretch>
+            <a:fillRect/>
+          </a:stretch>
+        </p:blipFill>
         <p:spPr>
           <a:xfrm>
             <a:off x="5943600" y="1371600"/>
@@ -5612,59 +5631,8 @@
           <a:prstGeom prst="rect">
             <a:avLst/>
           </a:prstGeom>
-          <a:solidFill>
-            <a:srgbClr val="F2F2F2"/>
-          </a:solidFill>
-          <a:ln w="19050">
-            <a:solidFill>
-              <a:srgbClr val="999999"/>
-            </a:solidFill>
-            <a:prstDash val="sysDash"/>
-          </a:ln>
         </p:spPr>
-        <p:style>
-          <a:lnRef idx="1">
-            <a:schemeClr val="accent1"/>
-          </a:lnRef>
-          <a:fillRef idx="3">
-            <a:schemeClr val="accent1"/>
-          </a:fillRef>
-          <a:effectRef idx="2">
-            <a:schemeClr val="accent1"/>
-          </a:effectRef>
-          <a:fontRef idx="minor">
-            <a:schemeClr val="lt1"/>
-          </a:fontRef>
-        </p:style>
-        <p:txBody>
-          <a:bodyPr rtlCol="0" anchor="ctr" wrap="square"/>
-          <a:lstStyle/>
-          <a:p>
-            <a:pPr algn="ctr">
-              <a:defRPr sz="1400" b="1">
-                <a:solidFill>
-                  <a:srgbClr val="666666"/>
-                </a:solidFill>
-              </a:defRPr>
-            </a:pPr>
-            <a:r>
-              <a:t>INSERT PLOT</a:t>
-            </a:r>
-          </a:p>
-          <a:p>
-            <a:pPr algn="ctr">
-              <a:defRPr sz="1100" i="1">
-                <a:solidFill>
-                  <a:srgbClr val="666666"/>
-                </a:solidFill>
-              </a:defRPr>
-            </a:pPr>
-            <a:r>
-              <a:t>sex_concordance_scatter_gWAT_&lt;run_tag&gt;.png</a:t>
-            </a:r>
-          </a:p>
-        </p:txBody>
-      </p:sp>
+      </p:pic>
     </p:spTree>
   </p:cSld>
   <p:clrMapOvr>
@@ -6018,69 +5986,122 @@
           </a:p>
         </p:txBody>
       </p:sp>
-      <p:sp>
-        <p:nvSpPr>
-          <p:cNvPr id="4" name="Rectangle 3"/>
-          <p:cNvSpPr/>
+      <p:pic>
+        <p:nvPicPr>
+          <p:cNvPr id="4" name="Picture 3" descr="05_PCA_by_sex_iWAT.png"/>
+          <p:cNvPicPr>
+            <a:picLocks noChangeAspect="1"/>
+          </p:cNvPicPr>
           <p:nvPr/>
-        </p:nvSpPr>
+        </p:nvPicPr>
+        <p:blipFill>
+          <a:blip r:embed="rId2"/>
+          <a:stretch>
+            <a:fillRect/>
+          </a:stretch>
+        </p:blipFill>
         <p:spPr>
           <a:xfrm>
             <a:off x="5943600" y="1097280"/>
-            <a:ext cx="5486400" cy="4572000"/>
+            <a:ext cx="2926080" cy="2468880"/>
           </a:xfrm>
           <a:prstGeom prst="rect">
             <a:avLst/>
           </a:prstGeom>
-          <a:solidFill>
-            <a:srgbClr val="F2F2F2"/>
-          </a:solidFill>
-          <a:ln w="19050">
-            <a:solidFill>
-              <a:srgbClr val="999999"/>
-            </a:solidFill>
-            <a:prstDash val="sysDash"/>
-          </a:ln>
         </p:spPr>
-        <p:style>
-          <a:lnRef idx="1">
-            <a:schemeClr val="accent1"/>
-          </a:lnRef>
-          <a:fillRef idx="3">
-            <a:schemeClr val="accent1"/>
-          </a:fillRef>
-          <a:effectRef idx="2">
-            <a:schemeClr val="accent1"/>
-          </a:effectRef>
-          <a:fontRef idx="minor">
-            <a:schemeClr val="lt1"/>
-          </a:fontRef>
-        </p:style>
-        <p:txBody>
-          <a:bodyPr rtlCol="0" anchor="ctr" wrap="square"/>
+      </p:pic>
+      <p:pic>
+        <p:nvPicPr>
+          <p:cNvPr id="5" name="Picture 4" descr="05_PCA_by_sex_gWAT.png"/>
+          <p:cNvPicPr>
+            <a:picLocks noChangeAspect="1"/>
+          </p:cNvPicPr>
+          <p:nvPr/>
+        </p:nvPicPr>
+        <p:blipFill>
+          <a:blip r:embed="rId3"/>
+          <a:stretch>
+            <a:fillRect/>
+          </a:stretch>
+        </p:blipFill>
+        <p:spPr>
+          <a:xfrm>
+            <a:off x="8961120" y="1097280"/>
+            <a:ext cx="2926080" cy="2468880"/>
+          </a:xfrm>
+          <a:prstGeom prst="rect">
+            <a:avLst/>
+          </a:prstGeom>
+        </p:spPr>
+      </p:pic>
+      <p:sp>
+        <p:nvSpPr>
+          <p:cNvPr id="6" name="TextBox 5"/>
+          <p:cNvSpPr txBox="1"/>
+          <p:nvPr/>
+        </p:nvSpPr>
+        <p:spPr>
+          <a:xfrm>
+            <a:off x="6217920" y="3657600"/>
+            <a:ext cx="2286000" cy="274320"/>
+          </a:xfrm>
+          <a:prstGeom prst="rect">
+            <a:avLst/>
+          </a:prstGeom>
+          <a:noFill/>
+        </p:spPr>
+        <p:txBody>
+          <a:bodyPr wrap="square">
+            <a:spAutoFit/>
+          </a:bodyPr>
           <a:lstStyle/>
           <a:p>
             <a:pPr algn="ctr">
-              <a:defRPr sz="1400" b="1">
+              <a:defRPr sz="1100" b="1">
                 <a:solidFill>
                   <a:srgbClr val="666666"/>
                 </a:solidFill>
-              </a:defRPr>
-            </a:pPr>
-            <a:r>
-              <a:t>INSERT PLOT</a:t>
-            </a:r>
-          </a:p>
+                <a:latin typeface="Calibri"/>
+              </a:defRPr>
+            </a:pPr>
+            <a:r>
+              <a:t>iWAT</a:t>
+            </a:r>
+          </a:p>
+        </p:txBody>
+      </p:sp>
+      <p:sp>
+        <p:nvSpPr>
+          <p:cNvPr id="7" name="TextBox 6"/>
+          <p:cNvSpPr txBox="1"/>
+          <p:nvPr/>
+        </p:nvSpPr>
+        <p:spPr>
+          <a:xfrm>
+            <a:off x="9235440" y="3657600"/>
+            <a:ext cx="2286000" cy="274320"/>
+          </a:xfrm>
+          <a:prstGeom prst="rect">
+            <a:avLst/>
+          </a:prstGeom>
+          <a:noFill/>
+        </p:spPr>
+        <p:txBody>
+          <a:bodyPr wrap="square">
+            <a:spAutoFit/>
+          </a:bodyPr>
+          <a:lstStyle/>
           <a:p>
             <a:pPr algn="ctr">
-              <a:defRPr sz="1100" i="1">
+              <a:defRPr sz="1100" b="1">
                 <a:solidFill>
                   <a:srgbClr val="666666"/>
                 </a:solidFill>
-              </a:defRPr>
-            </a:pPr>
-            <a:r>
-              <a:t>PCA_by_sex_&lt;depot&gt;_&lt;run_tag&gt;.png</a:t>
+                <a:latin typeface="Calibri"/>
+              </a:defRPr>
+            </a:pPr>
+            <a:r>
+              <a:t>gWAT</a:t>
             </a:r>
           </a:p>
         </p:txBody>
@@ -6438,69 +6459,122 @@
           </a:p>
         </p:txBody>
       </p:sp>
-      <p:sp>
-        <p:nvSpPr>
-          <p:cNvPr id="4" name="Rectangle 3"/>
-          <p:cNvSpPr/>
+      <p:pic>
+        <p:nvPicPr>
+          <p:cNvPr id="4" name="Picture 3" descr="interaction_vs_genotype_iWAT_20260217_233911.png"/>
+          <p:cNvPicPr>
+            <a:picLocks noChangeAspect="1"/>
+          </p:cNvPicPr>
           <p:nvPr/>
-        </p:nvSpPr>
+        </p:nvPicPr>
+        <p:blipFill>
+          <a:blip r:embed="rId2"/>
+          <a:stretch>
+            <a:fillRect/>
+          </a:stretch>
+        </p:blipFill>
         <p:spPr>
           <a:xfrm>
             <a:off x="5943600" y="1097280"/>
-            <a:ext cx="5486400" cy="4572000"/>
+            <a:ext cx="2926080" cy="2468880"/>
           </a:xfrm>
           <a:prstGeom prst="rect">
             <a:avLst/>
           </a:prstGeom>
-          <a:solidFill>
-            <a:srgbClr val="F2F2F2"/>
-          </a:solidFill>
-          <a:ln w="19050">
-            <a:solidFill>
-              <a:srgbClr val="999999"/>
-            </a:solidFill>
-            <a:prstDash val="sysDash"/>
-          </a:ln>
         </p:spPr>
-        <p:style>
-          <a:lnRef idx="1">
-            <a:schemeClr val="accent1"/>
-          </a:lnRef>
-          <a:fillRef idx="3">
-            <a:schemeClr val="accent1"/>
-          </a:fillRef>
-          <a:effectRef idx="2">
-            <a:schemeClr val="accent1"/>
-          </a:effectRef>
-          <a:fontRef idx="minor">
-            <a:schemeClr val="lt1"/>
-          </a:fontRef>
-        </p:style>
-        <p:txBody>
-          <a:bodyPr rtlCol="0" anchor="ctr" wrap="square"/>
+      </p:pic>
+      <p:pic>
+        <p:nvPicPr>
+          <p:cNvPr id="5" name="Picture 4" descr="interaction_vs_genotype_gWAT_20260217_233911.png"/>
+          <p:cNvPicPr>
+            <a:picLocks noChangeAspect="1"/>
+          </p:cNvPicPr>
+          <p:nvPr/>
+        </p:nvPicPr>
+        <p:blipFill>
+          <a:blip r:embed="rId3"/>
+          <a:stretch>
+            <a:fillRect/>
+          </a:stretch>
+        </p:blipFill>
+        <p:spPr>
+          <a:xfrm>
+            <a:off x="8961120" y="1097280"/>
+            <a:ext cx="2926080" cy="2468880"/>
+          </a:xfrm>
+          <a:prstGeom prst="rect">
+            <a:avLst/>
+          </a:prstGeom>
+        </p:spPr>
+      </p:pic>
+      <p:sp>
+        <p:nvSpPr>
+          <p:cNvPr id="6" name="TextBox 5"/>
+          <p:cNvSpPr txBox="1"/>
+          <p:nvPr/>
+        </p:nvSpPr>
+        <p:spPr>
+          <a:xfrm>
+            <a:off x="6217920" y="3657600"/>
+            <a:ext cx="2286000" cy="274320"/>
+          </a:xfrm>
+          <a:prstGeom prst="rect">
+            <a:avLst/>
+          </a:prstGeom>
+          <a:noFill/>
+        </p:spPr>
+        <p:txBody>
+          <a:bodyPr wrap="square">
+            <a:spAutoFit/>
+          </a:bodyPr>
           <a:lstStyle/>
           <a:p>
             <a:pPr algn="ctr">
-              <a:defRPr sz="1400" b="1">
+              <a:defRPr sz="1100" b="1">
                 <a:solidFill>
                   <a:srgbClr val="666666"/>
                 </a:solidFill>
-              </a:defRPr>
-            </a:pPr>
-            <a:r>
-              <a:t>INSERT PLOT</a:t>
-            </a:r>
-          </a:p>
+                <a:latin typeface="Calibri"/>
+              </a:defRPr>
+            </a:pPr>
+            <a:r>
+              <a:t>iWAT</a:t>
+            </a:r>
+          </a:p>
+        </p:txBody>
+      </p:sp>
+      <p:sp>
+        <p:nvSpPr>
+          <p:cNvPr id="7" name="TextBox 6"/>
+          <p:cNvSpPr txBox="1"/>
+          <p:nvPr/>
+        </p:nvSpPr>
+        <p:spPr>
+          <a:xfrm>
+            <a:off x="9235440" y="3657600"/>
+            <a:ext cx="2286000" cy="274320"/>
+          </a:xfrm>
+          <a:prstGeom prst="rect">
+            <a:avLst/>
+          </a:prstGeom>
+          <a:noFill/>
+        </p:spPr>
+        <p:txBody>
+          <a:bodyPr wrap="square">
+            <a:spAutoFit/>
+          </a:bodyPr>
+          <a:lstStyle/>
           <a:p>
             <a:pPr algn="ctr">
-              <a:defRPr sz="1100" i="1">
+              <a:defRPr sz="1100" b="1">
                 <a:solidFill>
                   <a:srgbClr val="666666"/>
                 </a:solidFill>
-              </a:defRPr>
-            </a:pPr>
-            <a:r>
-              <a:t>interaction_vs_genotype_&lt;depot&gt;_&lt;run_tag&gt;.png</a:t>
+                <a:latin typeface="Calibri"/>
+              </a:defRPr>
+            </a:pPr>
+            <a:r>
+              <a:t>gWAT</a:t>
             </a:r>
           </a:p>
         </p:txBody>
@@ -7802,6 +7876,515 @@
 </file>
 
 <file path=ppt/slides/slide20.xml><?xml version="1.0" encoding="utf-8"?>
+<p:sld xmlns:a="http://schemas.openxmlformats.org/drawingml/2006/main" xmlns:p="http://schemas.openxmlformats.org/presentationml/2006/main" xmlns:r="http://schemas.openxmlformats.org/officeDocument/2006/relationships">
+  <p:cSld>
+    <p:spTree>
+      <p:nvGrpSpPr>
+        <p:cNvPr id="1" name=""/>
+        <p:cNvGrpSpPr/>
+        <p:nvPr/>
+      </p:nvGrpSpPr>
+      <p:grpSpPr/>
+      <p:sp>
+        <p:nvSpPr>
+          <p:cNvPr id="2" name="TextBox 1"/>
+          <p:cNvSpPr txBox="1"/>
+          <p:nvPr/>
+        </p:nvSpPr>
+        <p:spPr>
+          <a:xfrm>
+            <a:off x="548640" y="274320"/>
+            <a:ext cx="10972800" cy="548640"/>
+          </a:xfrm>
+          <a:prstGeom prst="rect">
+            <a:avLst/>
+          </a:prstGeom>
+          <a:noFill/>
+        </p:spPr>
+        <p:txBody>
+          <a:bodyPr wrap="square">
+            <a:spAutoFit/>
+          </a:bodyPr>
+          <a:lstStyle/>
+          <a:p>
+            <a:pPr algn="l">
+              <a:defRPr sz="2800" b="1">
+                <a:solidFill>
+                  <a:srgbClr val="1B3A5C"/>
+                </a:solidFill>
+                <a:latin typeface="Calibri"/>
+              </a:defRPr>
+            </a:pPr>
+            <a:r>
+              <a:t>Model Comparison: Scatter Plots (Part 7.7)</a:t>
+            </a:r>
+          </a:p>
+        </p:txBody>
+      </p:sp>
+      <p:sp>
+        <p:nvSpPr>
+          <p:cNvPr id="3" name="TextBox 2"/>
+          <p:cNvSpPr txBox="1"/>
+          <p:nvPr/>
+        </p:nvSpPr>
+        <p:spPr>
+          <a:xfrm>
+            <a:off x="548640" y="822960"/>
+            <a:ext cx="10972800" cy="365760"/>
+          </a:xfrm>
+          <a:prstGeom prst="rect">
+            <a:avLst/>
+          </a:prstGeom>
+          <a:noFill/>
+        </p:spPr>
+        <p:txBody>
+          <a:bodyPr wrap="square">
+            <a:spAutoFit/>
+          </a:bodyPr>
+          <a:lstStyle/>
+          <a:p>
+            <a:pPr algn="l">
+              <a:defRPr sz="1400" b="0">
+                <a:solidFill>
+                  <a:srgbClr val="666666"/>
+                </a:solidFill>
+                <a:latin typeface="Calibri"/>
+              </a:defRPr>
+            </a:pPr>
+            <a:r>
+              <a:t>logFC near-identity between models confirms biological conclusions are unchanged</a:t>
+            </a:r>
+          </a:p>
+        </p:txBody>
+      </p:sp>
+      <p:sp>
+        <p:nvSpPr>
+          <p:cNvPr id="4" name="TextBox 3"/>
+          <p:cNvSpPr txBox="1"/>
+          <p:nvPr/>
+        </p:nvSpPr>
+        <p:spPr>
+          <a:xfrm>
+            <a:off x="274320" y="1280160"/>
+            <a:ext cx="3657600" cy="274320"/>
+          </a:xfrm>
+          <a:prstGeom prst="rect">
+            <a:avLst/>
+          </a:prstGeom>
+          <a:noFill/>
+        </p:spPr>
+        <p:txBody>
+          <a:bodyPr wrap="square">
+            <a:spAutoFit/>
+          </a:bodyPr>
+          <a:lstStyle/>
+          <a:p>
+            <a:pPr algn="l">
+              <a:defRPr sz="1100" b="1">
+                <a:solidFill>
+                  <a:srgbClr val="1B3A5C"/>
+                </a:solidFill>
+                <a:latin typeface="Calibri"/>
+              </a:defRPr>
+            </a:pPr>
+            <a:r>
+              <a:t>3a: ~ Genotype vs ~ Sex + Genotype</a:t>
+            </a:r>
+          </a:p>
+        </p:txBody>
+      </p:sp>
+      <p:pic>
+        <p:nvPicPr>
+          <p:cNvPr id="5" name="Picture 4" descr="03a_model_comparison_sex_covariate_iWAT.png"/>
+          <p:cNvPicPr>
+            <a:picLocks noChangeAspect="1"/>
+          </p:cNvPicPr>
+          <p:nvPr/>
+        </p:nvPicPr>
+        <p:blipFill>
+          <a:blip r:embed="rId2"/>
+          <a:stretch>
+            <a:fillRect/>
+          </a:stretch>
+        </p:blipFill>
+        <p:spPr>
+          <a:xfrm>
+            <a:off x="274320" y="1554480"/>
+            <a:ext cx="3474720" cy="2286000"/>
+          </a:xfrm>
+          <a:prstGeom prst="rect">
+            <a:avLst/>
+          </a:prstGeom>
+        </p:spPr>
+      </p:pic>
+      <p:pic>
+        <p:nvPicPr>
+          <p:cNvPr id="6" name="Picture 5" descr="03a_model_comparison_sex_covariate_gWAT.png"/>
+          <p:cNvPicPr>
+            <a:picLocks noChangeAspect="1"/>
+          </p:cNvPicPr>
+          <p:nvPr/>
+        </p:nvPicPr>
+        <p:blipFill>
+          <a:blip r:embed="rId3"/>
+          <a:stretch>
+            <a:fillRect/>
+          </a:stretch>
+        </p:blipFill>
+        <p:spPr>
+          <a:xfrm>
+            <a:off x="3931920" y="1554480"/>
+            <a:ext cx="3474720" cy="2286000"/>
+          </a:xfrm>
+          <a:prstGeom prst="rect">
+            <a:avLst/>
+          </a:prstGeom>
+        </p:spPr>
+      </p:pic>
+      <p:sp>
+        <p:nvSpPr>
+          <p:cNvPr id="7" name="TextBox 6"/>
+          <p:cNvSpPr txBox="1"/>
+          <p:nvPr/>
+        </p:nvSpPr>
+        <p:spPr>
+          <a:xfrm>
+            <a:off x="274320" y="3931920"/>
+            <a:ext cx="5486400" cy="274320"/>
+          </a:xfrm>
+          <a:prstGeom prst="rect">
+            <a:avLst/>
+          </a:prstGeom>
+          <a:noFill/>
+        </p:spPr>
+        <p:txBody>
+          <a:bodyPr wrap="square">
+            <a:spAutoFit/>
+          </a:bodyPr>
+          <a:lstStyle/>
+          <a:p>
+            <a:pPr algn="l">
+              <a:defRPr sz="1100" b="1">
+                <a:solidFill>
+                  <a:srgbClr val="1B3A5C"/>
+                </a:solidFill>
+                <a:latin typeface="Calibri"/>
+              </a:defRPr>
+            </a:pPr>
+            <a:r>
+              <a:t>3c: Unified ~ 0 + GroupDepot vs ~ Sex + GroupDepot  (the key comparison)</a:t>
+            </a:r>
+          </a:p>
+        </p:txBody>
+      </p:sp>
+      <p:pic>
+        <p:nvPicPr>
+          <p:cNvPr id="8" name="Picture 7" descr="03c_nosex_vs_sex_unified_iWAT.png"/>
+          <p:cNvPicPr>
+            <a:picLocks noChangeAspect="1"/>
+          </p:cNvPicPr>
+          <p:nvPr/>
+        </p:nvPicPr>
+        <p:blipFill>
+          <a:blip r:embed="rId4"/>
+          <a:stretch>
+            <a:fillRect/>
+          </a:stretch>
+        </p:blipFill>
+        <p:spPr>
+          <a:xfrm>
+            <a:off x="274320" y="4206240"/>
+            <a:ext cx="3474720" cy="2286000"/>
+          </a:xfrm>
+          <a:prstGeom prst="rect">
+            <a:avLst/>
+          </a:prstGeom>
+        </p:spPr>
+      </p:pic>
+      <p:pic>
+        <p:nvPicPr>
+          <p:cNvPr id="9" name="Picture 8" descr="03c_nosex_vs_sex_unified_gWAT.png"/>
+          <p:cNvPicPr>
+            <a:picLocks noChangeAspect="1"/>
+          </p:cNvPicPr>
+          <p:nvPr/>
+        </p:nvPicPr>
+        <p:blipFill>
+          <a:blip r:embed="rId5"/>
+          <a:stretch>
+            <a:fillRect/>
+          </a:stretch>
+        </p:blipFill>
+        <p:spPr>
+          <a:xfrm>
+            <a:off x="3931920" y="4206240"/>
+            <a:ext cx="3474720" cy="2286000"/>
+          </a:xfrm>
+          <a:prstGeom prst="rect">
+            <a:avLst/>
+          </a:prstGeom>
+        </p:spPr>
+      </p:pic>
+      <p:sp>
+        <p:nvSpPr>
+          <p:cNvPr id="10" name="TextBox 9"/>
+          <p:cNvSpPr txBox="1"/>
+          <p:nvPr/>
+        </p:nvSpPr>
+        <p:spPr>
+          <a:xfrm>
+            <a:off x="7772400" y="1280160"/>
+            <a:ext cx="4114800" cy="274320"/>
+          </a:xfrm>
+          <a:prstGeom prst="rect">
+            <a:avLst/>
+          </a:prstGeom>
+          <a:noFill/>
+        </p:spPr>
+        <p:txBody>
+          <a:bodyPr wrap="square">
+            <a:spAutoFit/>
+          </a:bodyPr>
+          <a:lstStyle/>
+          <a:p>
+            <a:pPr algn="l">
+              <a:defRPr sz="1100" b="1">
+                <a:solidFill>
+                  <a:srgbClr val="1B3A5C"/>
+                </a:solidFill>
+                <a:latin typeface="Calibri"/>
+              </a:defRPr>
+            </a:pPr>
+            <a:r>
+              <a:t>3b: Per-depot vs Unified model</a:t>
+            </a:r>
+          </a:p>
+        </p:txBody>
+      </p:sp>
+      <p:pic>
+        <p:nvPicPr>
+          <p:cNvPr id="11" name="Picture 10" descr="03b_unified_vs_perdepot_iWAT.png"/>
+          <p:cNvPicPr>
+            <a:picLocks noChangeAspect="1"/>
+          </p:cNvPicPr>
+          <p:nvPr/>
+        </p:nvPicPr>
+        <p:blipFill>
+          <a:blip r:embed="rId6"/>
+          <a:stretch>
+            <a:fillRect/>
+          </a:stretch>
+        </p:blipFill>
+        <p:spPr>
+          <a:xfrm>
+            <a:off x="7772400" y="1554480"/>
+            <a:ext cx="2011680" cy="1554480"/>
+          </a:xfrm>
+          <a:prstGeom prst="rect">
+            <a:avLst/>
+          </a:prstGeom>
+        </p:spPr>
+      </p:pic>
+      <p:pic>
+        <p:nvPicPr>
+          <p:cNvPr id="12" name="Picture 11" descr="03b_unified_vs_perdepot_gWAT.png"/>
+          <p:cNvPicPr>
+            <a:picLocks noChangeAspect="1"/>
+          </p:cNvPicPr>
+          <p:nvPr/>
+        </p:nvPicPr>
+        <p:blipFill>
+          <a:blip r:embed="rId7"/>
+          <a:stretch>
+            <a:fillRect/>
+          </a:stretch>
+        </p:blipFill>
+        <p:spPr>
+          <a:xfrm>
+            <a:off x="9875520" y="1554480"/>
+            <a:ext cx="2011680" cy="1554480"/>
+          </a:xfrm>
+          <a:prstGeom prst="rect">
+            <a:avLst/>
+          </a:prstGeom>
+        </p:spPr>
+      </p:pic>
+      <p:sp>
+        <p:nvSpPr>
+          <p:cNvPr id="13" name="TextBox 12"/>
+          <p:cNvSpPr txBox="1"/>
+          <p:nvPr/>
+        </p:nvSpPr>
+        <p:spPr>
+          <a:xfrm>
+            <a:off x="7772400" y="3291840"/>
+            <a:ext cx="4114800" cy="3200400"/>
+          </a:xfrm>
+          <a:prstGeom prst="rect">
+            <a:avLst/>
+          </a:prstGeom>
+          <a:noFill/>
+        </p:spPr>
+        <p:txBody>
+          <a:bodyPr wrap="square">
+            <a:spAutoFit/>
+          </a:bodyPr>
+          <a:lstStyle/>
+          <a:p>
+            <a:pPr>
+              <a:spcAft>
+                <a:spcPts val="600"/>
+              </a:spcAft>
+              <a:defRPr sz="1100">
+                <a:solidFill>
+                  <a:srgbClr val="1B3A5C"/>
+                </a:solidFill>
+                <a:latin typeface="Calibri"/>
+              </a:defRPr>
+            </a:pPr>
+            <a:r>
+              <a:t>Key observations:</a:t>
+            </a:r>
+          </a:p>
+          <a:p>
+            <a:pPr>
+              <a:spcAft>
+                <a:spcPts val="600"/>
+              </a:spcAft>
+              <a:defRPr sz="1100">
+                <a:solidFill>
+                  <a:srgbClr val="1B3A5C"/>
+                </a:solidFill>
+                <a:latin typeface="Calibri"/>
+              </a:defRPr>
+            </a:pPr>
+            <a:r>
+              <a:t>  - All scatter plots cluster tightly</a:t>
+            </a:r>
+          </a:p>
+          <a:p>
+            <a:pPr>
+              <a:spcAft>
+                <a:spcPts val="600"/>
+              </a:spcAft>
+              <a:defRPr sz="1100">
+                <a:solidFill>
+                  <a:srgbClr val="1B3A5C"/>
+                </a:solidFill>
+                <a:latin typeface="Calibri"/>
+              </a:defRPr>
+            </a:pPr>
+            <a:r>
+              <a:t>    along the diagonal (y = x)</a:t>
+            </a:r>
+          </a:p>
+          <a:p>
+            <a:pPr>
+              <a:spcAft>
+                <a:spcPts val="600"/>
+              </a:spcAft>
+              <a:defRPr sz="1100">
+                <a:solidFill>
+                  <a:srgbClr val="1B3A5C"/>
+                </a:solidFill>
+                <a:latin typeface="Calibri"/>
+              </a:defRPr>
+            </a:pPr>
+            <a:r>
+              <a:t>  - Green dots = DEGs gained</a:t>
+            </a:r>
+          </a:p>
+          <a:p>
+            <a:pPr>
+              <a:spcAft>
+                <a:spcPts val="600"/>
+              </a:spcAft>
+              <a:defRPr sz="1100">
+                <a:solidFill>
+                  <a:srgbClr val="1B3A5C"/>
+                </a:solidFill>
+                <a:latin typeface="Calibri"/>
+              </a:defRPr>
+            </a:pPr>
+            <a:r>
+              <a:t>  - Red dots = DEGs lost</a:t>
+            </a:r>
+          </a:p>
+          <a:p>
+            <a:pPr>
+              <a:spcAft>
+                <a:spcPts val="600"/>
+              </a:spcAft>
+              <a:defRPr sz="1100">
+                <a:solidFill>
+                  <a:srgbClr val="1B3A5C"/>
+                </a:solidFill>
+                <a:latin typeface="Calibri"/>
+              </a:defRPr>
+            </a:pPr>
+            <a:r>
+              <a:t>  - Per-depot: adding Sex GAINS DEGs</a:t>
+            </a:r>
+          </a:p>
+          <a:p>
+            <a:pPr>
+              <a:spcAft>
+                <a:spcPts val="600"/>
+              </a:spcAft>
+              <a:defRPr sz="1100">
+                <a:solidFill>
+                  <a:srgbClr val="1B3A5C"/>
+                </a:solidFill>
+                <a:latin typeface="Calibri"/>
+              </a:defRPr>
+            </a:pPr>
+            <a:r>
+              <a:t>  - Unified: adding Sex LOSES DEGs</a:t>
+            </a:r>
+          </a:p>
+          <a:p>
+            <a:pPr>
+              <a:spcAft>
+                <a:spcPts val="600"/>
+              </a:spcAft>
+              <a:defRPr sz="1100">
+                <a:solidFill>
+                  <a:srgbClr val="1B3A5C"/>
+                </a:solidFill>
+                <a:latin typeface="Calibri"/>
+              </a:defRPr>
+            </a:pPr>
+            <a:r>
+              <a:t>  - logFC estimates nearly identical</a:t>
+            </a:r>
+          </a:p>
+          <a:p>
+            <a:pPr>
+              <a:spcAft>
+                <a:spcPts val="600"/>
+              </a:spcAft>
+              <a:defRPr sz="1100">
+                <a:solidFill>
+                  <a:srgbClr val="1B3A5C"/>
+                </a:solidFill>
+                <a:latin typeface="Calibri"/>
+              </a:defRPr>
+            </a:pPr>
+            <a:r>
+              <a:t>    regardless of model choice</a:t>
+            </a:r>
+          </a:p>
+        </p:txBody>
+      </p:sp>
+    </p:spTree>
+  </p:cSld>
+  <p:clrMapOvr>
+    <a:masterClrMapping/>
+  </p:clrMapOvr>
+</p:sld>
+</file>
+
+<file path=ppt/slides/slide21.xml><?xml version="1.0" encoding="utf-8"?>
 <p:sld xmlns:a="http://schemas.openxmlformats.org/drawingml/2006/main" xmlns:p="http://schemas.openxmlformats.org/presentationml/2006/main" xmlns:r="http://schemas.openxmlformats.org/officeDocument/2006/relationships">
   <p:cSld>
     <p:spTree>
@@ -8529,7 +9112,7 @@
 </p:sld>
 </file>
 
-<file path=ppt/slides/slide21.xml><?xml version="1.0" encoding="utf-8"?>
+<file path=ppt/slides/slide22.xml><?xml version="1.0" encoding="utf-8"?>
 <p:sld xmlns:a="http://schemas.openxmlformats.org/drawingml/2006/main" xmlns:p="http://schemas.openxmlformats.org/presentationml/2006/main" xmlns:r="http://schemas.openxmlformats.org/officeDocument/2006/relationships">
   <p:cSld>
     <p:bg>
@@ -10816,12 +11399,20 @@
           </a:p>
         </p:txBody>
       </p:sp>
-      <p:sp>
-        <p:nvSpPr>
-          <p:cNvPr id="4" name="Rectangle 3"/>
-          <p:cNvSpPr/>
+      <p:pic>
+        <p:nvPicPr>
+          <p:cNvPr id="4" name="Picture 3" descr="01_pvalue_hist_interaction_iWAT.png"/>
+          <p:cNvPicPr>
+            <a:picLocks noChangeAspect="1"/>
+          </p:cNvPicPr>
           <p:nvPr/>
-        </p:nvSpPr>
+        </p:nvPicPr>
+        <p:blipFill>
+          <a:blip r:embed="rId2"/>
+          <a:stretch>
+            <a:fillRect/>
+          </a:stretch>
+        </p:blipFill>
         <p:spPr>
           <a:xfrm>
             <a:off x="5943600" y="1097280"/>
@@ -10830,59 +11421,8 @@
           <a:prstGeom prst="rect">
             <a:avLst/>
           </a:prstGeom>
-          <a:solidFill>
-            <a:srgbClr val="F2F2F2"/>
-          </a:solidFill>
-          <a:ln w="19050">
-            <a:solidFill>
-              <a:srgbClr val="999999"/>
-            </a:solidFill>
-            <a:prstDash val="sysDash"/>
-          </a:ln>
         </p:spPr>
-        <p:style>
-          <a:lnRef idx="1">
-            <a:schemeClr val="accent1"/>
-          </a:lnRef>
-          <a:fillRef idx="3">
-            <a:schemeClr val="accent1"/>
-          </a:fillRef>
-          <a:effectRef idx="2">
-            <a:schemeClr val="accent1"/>
-          </a:effectRef>
-          <a:fontRef idx="minor">
-            <a:schemeClr val="lt1"/>
-          </a:fontRef>
-        </p:style>
-        <p:txBody>
-          <a:bodyPr rtlCol="0" anchor="ctr" wrap="square"/>
-          <a:lstStyle/>
-          <a:p>
-            <a:pPr algn="ctr">
-              <a:defRPr sz="1400" b="1">
-                <a:solidFill>
-                  <a:srgbClr val="666666"/>
-                </a:solidFill>
-              </a:defRPr>
-            </a:pPr>
-            <a:r>
-              <a:t>INSERT PLOT</a:t>
-            </a:r>
-          </a:p>
-          <a:p>
-            <a:pPr algn="ctr">
-              <a:defRPr sz="1100" i="1">
-                <a:solidFill>
-                  <a:srgbClr val="666666"/>
-                </a:solidFill>
-              </a:defRPr>
-            </a:pPr>
-            <a:r>
-              <a:t>pvalue_hist_interaction_iWAT_&lt;run_tag&gt;.png</a:t>
-            </a:r>
-          </a:p>
-        </p:txBody>
-      </p:sp>
+      </p:pic>
     </p:spTree>
   </p:cSld>
   <p:clrMapOvr>
@@ -11162,12 +11702,20 @@
           </a:p>
         </p:txBody>
       </p:sp>
-      <p:sp>
-        <p:nvSpPr>
-          <p:cNvPr id="4" name="Rectangle 3"/>
-          <p:cNvSpPr/>
+      <p:pic>
+        <p:nvPicPr>
+          <p:cNvPr id="4" name="Picture 3" descr="01_pvalue_hist_interaction_gWAT.png"/>
+          <p:cNvPicPr>
+            <a:picLocks noChangeAspect="1"/>
+          </p:cNvPicPr>
           <p:nvPr/>
-        </p:nvSpPr>
+        </p:nvPicPr>
+        <p:blipFill>
+          <a:blip r:embed="rId2"/>
+          <a:stretch>
+            <a:fillRect/>
+          </a:stretch>
+        </p:blipFill>
         <p:spPr>
           <a:xfrm>
             <a:off x="5943600" y="1097280"/>
@@ -11176,59 +11724,8 @@
           <a:prstGeom prst="rect">
             <a:avLst/>
           </a:prstGeom>
-          <a:solidFill>
-            <a:srgbClr val="F2F2F2"/>
-          </a:solidFill>
-          <a:ln w="19050">
-            <a:solidFill>
-              <a:srgbClr val="999999"/>
-            </a:solidFill>
-            <a:prstDash val="sysDash"/>
-          </a:ln>
         </p:spPr>
-        <p:style>
-          <a:lnRef idx="1">
-            <a:schemeClr val="accent1"/>
-          </a:lnRef>
-          <a:fillRef idx="3">
-            <a:schemeClr val="accent1"/>
-          </a:fillRef>
-          <a:effectRef idx="2">
-            <a:schemeClr val="accent1"/>
-          </a:effectRef>
-          <a:fontRef idx="minor">
-            <a:schemeClr val="lt1"/>
-          </a:fontRef>
-        </p:style>
-        <p:txBody>
-          <a:bodyPr rtlCol="0" anchor="ctr" wrap="square"/>
-          <a:lstStyle/>
-          <a:p>
-            <a:pPr algn="ctr">
-              <a:defRPr sz="1400" b="1">
-                <a:solidFill>
-                  <a:srgbClr val="666666"/>
-                </a:solidFill>
-              </a:defRPr>
-            </a:pPr>
-            <a:r>
-              <a:t>INSERT PLOT</a:t>
-            </a:r>
-          </a:p>
-          <a:p>
-            <a:pPr algn="ctr">
-              <a:defRPr sz="1100" i="1">
-                <a:solidFill>
-                  <a:srgbClr val="666666"/>
-                </a:solidFill>
-              </a:defRPr>
-            </a:pPr>
-            <a:r>
-              <a:t>pvalue_hist_interaction_gWAT_&lt;run_tag&gt;.png</a:t>
-            </a:r>
-          </a:p>
-        </p:txBody>
-      </p:sp>
+      </p:pic>
     </p:spTree>
   </p:cSld>
   <p:clrMapOvr>
